--- a/Diaporama_soutenance_Noa_FUSION.pptx
+++ b/Diaporama_soutenance_Noa_FUSION.pptx
@@ -18,6 +18,7 @@
     <p:sldId id="284" r:id="rId35"/>
     <p:sldId id="263" r:id="rId13"/>
     <p:sldId id="264" r:id="rId14"/>
+    <p:sldId id="285" r:id="rId36"/>
     <p:sldId id="265" r:id="rId15"/>
     <p:sldId id="266" r:id="rId16"/>
     <p:sldId id="267" r:id="rId17"/>
@@ -30,6 +31,7 @@
     <p:sldId id="274" r:id="rId24"/>
     <p:sldId id="275" r:id="rId25"/>
     <p:sldId id="276" r:id="rId26"/>
+    <p:sldId id="286" r:id="rId37"/>
     <p:sldId id="277" r:id="rId27"/>
     <p:sldId id="278" r:id="rId28"/>
     <p:sldId id="279" r:id="rId29"/>
@@ -19509,7 +19511,7 @@
                 <a:cs typeface="Calibri"/>
                 <a:sym typeface="Calibri"/>
               </a:rPr>
-              <a:t>10 / 29</a:t>
+              <a:t>10 / 31</a:t>
             </a:r>
             <a:endParaRPr b="0" i="0" sz="1400" u="none" cap="none" strike="noStrike">
               <a:solidFill>
@@ -20506,6 +20508,888 @@
 </file>
 
 <file path=ppt/slides/slide11.xml><?xml version="1.0" encoding="utf-8"?>
+<p:sld xmlns:a="http://schemas.openxmlformats.org/drawingml/2006/main" xmlns:r="http://schemas.openxmlformats.org/officeDocument/2006/relationships" xmlns:mc="http://schemas.openxmlformats.org/markup-compatibility/2006" xmlns:mv="urn:schemas-microsoft-com:mac:vml" xmlns:p="http://schemas.openxmlformats.org/presentationml/2006/main" xmlns:c="http://schemas.openxmlformats.org/drawingml/2006/chart" xmlns:dgm="http://schemas.openxmlformats.org/drawingml/2006/diagram" xmlns:o="urn:schemas-microsoft-com:office:office" xmlns:v="urn:schemas-microsoft-com:vml" xmlns:pvml="urn:schemas-microsoft-com:office:powerpoint" xmlns:com="http://schemas.openxmlformats.org/drawingml/2006/compatibility" xmlns:p14="http://schemas.microsoft.com/office/powerpoint/2010/main" xmlns:p15="http://schemas.microsoft.com/office/powerpoint/2012/main" xmlns:ahyp="http://schemas.microsoft.com/office/drawing/2018/hyperlinkcolor">
+  <p:cSld>
+    <p:spTree>
+      <p:nvGrpSpPr>
+        <p:cNvPr id="322" name="Shape 322"/>
+        <p:cNvGrpSpPr/>
+        <p:nvPr/>
+      </p:nvGrpSpPr>
+      <p:grpSpPr>
+        <a:xfrm>
+          <a:off x="0" y="0"/>
+          <a:ext cx="0" cy="0"/>
+          <a:chOff x="0" y="0"/>
+          <a:chExt cx="0" cy="0"/>
+        </a:xfrm>
+      </p:grpSpPr>
+      <p:sp>
+        <p:nvSpPr>
+          <p:cNvPr id="323" name="Google Shape;323;p13"/>
+          <p:cNvSpPr/>
+          <p:nvPr/>
+        </p:nvSpPr>
+        <p:spPr>
+          <a:xfrm>
+            <a:off x="0" y="0"/>
+            <a:ext cx="12191695" cy="6858000"/>
+          </a:xfrm>
+          <a:prstGeom prst="rect">
+            <a:avLst/>
+          </a:prstGeom>
+          <a:solidFill>
+            <a:srgbClr val="FAFAFC"/>
+          </a:solidFill>
+          <a:ln>
+            <a:noFill/>
+          </a:ln>
+        </p:spPr>
+        <p:txBody>
+          <a:bodyPr anchorCtr="0" anchor="ctr" bIns="45700" lIns="91425" spcFirstLastPara="1" rIns="91425" wrap="square" tIns="45700">
+            <a:noAutofit/>
+          </a:bodyPr>
+          <a:lstStyle/>
+          <a:p>
+            <a:pPr indent="0" lvl="0" marL="0" marR="0" rtl="0" algn="ctr">
+              <a:lnSpc>
+                <a:spcPct val="100000"/>
+              </a:lnSpc>
+              <a:spcBef>
+                <a:spcPts val="0"/>
+              </a:spcBef>
+              <a:spcAft>
+                <a:spcPts val="0"/>
+              </a:spcAft>
+              <a:buClr>
+                <a:srgbClr val="000000"/>
+              </a:buClr>
+              <a:buSzPts val="1800"/>
+              <a:buFont typeface="Arial"/>
+              <a:buNone/>
+            </a:pPr>
+            <a:r>
+              <a:t/>
+            </a:r>
+            <a:endParaRPr b="0" i="0" sz="1800" u="none" cap="none" strike="noStrike">
+              <a:solidFill>
+                <a:schemeClr val="dk1"/>
+              </a:solidFill>
+              <a:latin typeface="Calibri"/>
+              <a:ea typeface="Calibri"/>
+              <a:cs typeface="Calibri"/>
+              <a:sym typeface="Calibri"/>
+            </a:endParaRPr>
+          </a:p>
+        </p:txBody>
+      </p:sp>
+      <p:sp>
+        <p:nvSpPr>
+          <p:cNvPr id="324" name="Google Shape;324;p13"/>
+          <p:cNvSpPr/>
+          <p:nvPr/>
+        </p:nvSpPr>
+        <p:spPr>
+          <a:xfrm>
+            <a:off x="502920" y="530352"/>
+            <a:ext cx="228600" cy="228600"/>
+          </a:xfrm>
+          <a:prstGeom prst="ellipse">
+            <a:avLst/>
+          </a:prstGeom>
+          <a:solidFill>
+            <a:srgbClr val="8B5CF6"/>
+          </a:solidFill>
+          <a:ln>
+            <a:noFill/>
+          </a:ln>
+          <a:effectLst>
+            <a:outerShdw blurRad="40000" rotWithShape="0" dir="5400000" dist="23000">
+              <a:srgbClr val="000000">
+                <a:alpha val="34901"/>
+              </a:srgbClr>
+            </a:outerShdw>
+          </a:effectLst>
+        </p:spPr>
+        <p:txBody>
+          <a:bodyPr anchorCtr="0" anchor="ctr" bIns="45700" lIns="91425" spcFirstLastPara="1" rIns="91425" wrap="square" tIns="45700">
+            <a:noAutofit/>
+          </a:bodyPr>
+          <a:lstStyle/>
+          <a:p>
+            <a:pPr indent="0" lvl="0" marL="0" marR="0" rtl="0" algn="ctr">
+              <a:lnSpc>
+                <a:spcPct val="100000"/>
+              </a:lnSpc>
+              <a:spcBef>
+                <a:spcPts val="0"/>
+              </a:spcBef>
+              <a:spcAft>
+                <a:spcPts val="0"/>
+              </a:spcAft>
+              <a:buClr>
+                <a:srgbClr val="000000"/>
+              </a:buClr>
+              <a:buSzPts val="1800"/>
+              <a:buFont typeface="Arial"/>
+              <a:buNone/>
+            </a:pPr>
+            <a:r>
+              <a:t/>
+            </a:r>
+            <a:endParaRPr b="0" i="0" sz="1800" u="none" cap="none" strike="noStrike">
+              <a:solidFill>
+                <a:schemeClr val="dk1"/>
+              </a:solidFill>
+              <a:latin typeface="Calibri"/>
+              <a:ea typeface="Calibri"/>
+              <a:cs typeface="Calibri"/>
+              <a:sym typeface="Calibri"/>
+            </a:endParaRPr>
+          </a:p>
+        </p:txBody>
+      </p:sp>
+      <p:sp>
+        <p:nvSpPr>
+          <p:cNvPr id="325" name="Google Shape;325;p13"/>
+          <p:cNvSpPr txBox="1"/>
+          <p:nvPr/>
+        </p:nvSpPr>
+        <p:spPr>
+          <a:xfrm>
+            <a:off x="914400" y="384048"/>
+            <a:ext cx="10972800" cy="640080"/>
+          </a:xfrm>
+          <a:prstGeom prst="rect">
+            <a:avLst/>
+          </a:prstGeom>
+          <a:noFill/>
+          <a:ln>
+            <a:noFill/>
+          </a:ln>
+        </p:spPr>
+        <p:txBody>
+          <a:bodyPr anchorCtr="0" anchor="t" bIns="0" lIns="0" spcFirstLastPara="1" rIns="0" wrap="square" tIns="0">
+            <a:spAutoFit/>
+          </a:bodyPr>
+          <a:lstStyle/>
+          <a:p>
+            <a:pPr indent="0" lvl="0" marL="0" marR="0" rtl="0" algn="l">
+              <a:lnSpc>
+                <a:spcPct val="100000"/>
+              </a:lnSpc>
+              <a:spcBef>
+                <a:spcPts val="0"/>
+              </a:spcBef>
+              <a:spcAft>
+                <a:spcPts val="0"/>
+              </a:spcAft>
+              <a:buClr>
+                <a:srgbClr val="000000"/>
+              </a:buClr>
+              <a:buSzPts val="3000"/>
+              <a:buFont typeface="Arial"/>
+              <a:buNone/>
+            </a:pPr>
+            <a:r>
+              <a:rPr b="1" i="0" lang="en-US" sz="3000" u="none" cap="none" strike="noStrike">
+                <a:solidFill>
+                  <a:srgbClr val="1E293B"/>
+                </a:solidFill>
+                <a:latin typeface="Calibri"/>
+                <a:ea typeface="Calibri"/>
+                <a:cs typeface="Calibri"/>
+                <a:sym typeface="Calibri"/>
+              </a:rPr>
+              <a:t>Théorème de Shannon — fréquence d'échantillonnage</a:t>
+            </a:r>
+            <a:endParaRPr b="0" i="0" sz="1400" u="none" cap="none" strike="noStrike">
+              <a:solidFill>
+                <a:srgbClr val="000000"/>
+              </a:solidFill>
+              <a:latin typeface="Arial"/>
+              <a:ea typeface="Arial"/>
+              <a:cs typeface="Arial"/>
+              <a:sym typeface="Arial"/>
+            </a:endParaRPr>
+          </a:p>
+        </p:txBody>
+      </p:sp>
+      <p:sp>
+        <p:nvSpPr>
+          <p:cNvPr id="326" name="Google Shape;326;p13"/>
+          <p:cNvSpPr txBox="1"/>
+          <p:nvPr/>
+        </p:nvSpPr>
+        <p:spPr>
+          <a:xfrm>
+            <a:off x="10911535" y="6492240"/>
+            <a:ext cx="914400" cy="274320"/>
+          </a:xfrm>
+          <a:prstGeom prst="rect">
+            <a:avLst/>
+          </a:prstGeom>
+          <a:noFill/>
+          <a:ln>
+            <a:noFill/>
+          </a:ln>
+        </p:spPr>
+        <p:txBody>
+          <a:bodyPr anchorCtr="0" anchor="t" bIns="0" lIns="0" spcFirstLastPara="1" rIns="0" wrap="square" tIns="0">
+            <a:spAutoFit/>
+          </a:bodyPr>
+          <a:lstStyle/>
+          <a:p>
+            <a:pPr indent="0" lvl="0" marL="0" marR="0" rtl="0" algn="r">
+              <a:lnSpc>
+                <a:spcPct val="100000"/>
+              </a:lnSpc>
+              <a:spcBef>
+                <a:spcPts val="0"/>
+              </a:spcBef>
+              <a:spcAft>
+                <a:spcPts val="0"/>
+              </a:spcAft>
+              <a:buClr>
+                <a:srgbClr val="000000"/>
+              </a:buClr>
+              <a:buSzPts val="1000"/>
+              <a:buFont typeface="Arial"/>
+              <a:buNone/>
+            </a:pPr>
+            <a:r>
+              <a:rPr b="0" i="0" lang="en-US" sz="1000" u="none" cap="none" strike="noStrike">
+                <a:solidFill>
+                  <a:srgbClr val="64748B"/>
+                </a:solidFill>
+                <a:latin typeface="Calibri"/>
+                <a:ea typeface="Calibri"/>
+                <a:cs typeface="Calibri"/>
+                <a:sym typeface="Calibri"/>
+              </a:rPr>
+              <a:t>11 / 31</a:t>
+            </a:r>
+            <a:endParaRPr b="0" i="0" sz="1400" u="none" cap="none" strike="noStrike">
+              <a:solidFill>
+                <a:srgbClr val="000000"/>
+              </a:solidFill>
+              <a:latin typeface="Arial"/>
+              <a:ea typeface="Arial"/>
+              <a:cs typeface="Arial"/>
+              <a:sym typeface="Arial"/>
+            </a:endParaRPr>
+          </a:p>
+        </p:txBody>
+      </p:sp>
+      <p:sp>
+        <p:nvSpPr>
+          <p:cNvPr id="327" name="Google Shape;327;p13"/>
+          <p:cNvSpPr txBox="1"/>
+          <p:nvPr/>
+        </p:nvSpPr>
+        <p:spPr>
+          <a:xfrm>
+            <a:off x="502920" y="6492240"/>
+            <a:ext cx="8229600" cy="274320"/>
+          </a:xfrm>
+          <a:prstGeom prst="rect">
+            <a:avLst/>
+          </a:prstGeom>
+          <a:noFill/>
+          <a:ln>
+            <a:noFill/>
+          </a:ln>
+        </p:spPr>
+        <p:txBody>
+          <a:bodyPr anchorCtr="0" anchor="t" bIns="0" lIns="0" spcFirstLastPara="1" rIns="0" wrap="square" tIns="0">
+            <a:spAutoFit/>
+          </a:bodyPr>
+          <a:lstStyle/>
+          <a:p>
+            <a:pPr indent="0" lvl="0" marL="0" marR="0" rtl="0" algn="l">
+              <a:lnSpc>
+                <a:spcPct val="100000"/>
+              </a:lnSpc>
+              <a:spcBef>
+                <a:spcPts val="0"/>
+              </a:spcBef>
+              <a:spcAft>
+                <a:spcPts val="0"/>
+              </a:spcAft>
+              <a:buClr>
+                <a:srgbClr val="000000"/>
+              </a:buClr>
+              <a:buSzPts val="1000"/>
+              <a:buFont typeface="Arial"/>
+              <a:buNone/>
+            </a:pPr>
+            <a:r>
+              <a:rPr b="0" i="0" lang="en-US" sz="1000" u="none" cap="none" strike="noStrike">
+                <a:solidFill>
+                  <a:srgbClr val="64748B"/>
+                </a:solidFill>
+                <a:latin typeface="Calibri"/>
+                <a:ea typeface="Calibri"/>
+                <a:cs typeface="Calibri"/>
+                <a:sym typeface="Calibri"/>
+              </a:rPr>
+              <a:t>BTS CIEL 2026  ·  Soutenance U6  ·  Noa Orand</a:t>
+            </a:r>
+            <a:endParaRPr b="0" i="0" sz="1400" u="none" cap="none" strike="noStrike">
+              <a:solidFill>
+                <a:srgbClr val="000000"/>
+              </a:solidFill>
+              <a:latin typeface="Arial"/>
+              <a:ea typeface="Arial"/>
+              <a:cs typeface="Arial"/>
+              <a:sym typeface="Arial"/>
+            </a:endParaRPr>
+          </a:p>
+        </p:txBody>
+      </p:sp>
+      <p:sp>
+        <p:nvSpPr>
+          <p:cNvPr id="328" name="Google Shape;328;p13"/>
+          <p:cNvSpPr txBox="1"/>
+          <p:nvPr/>
+        </p:nvSpPr>
+        <p:spPr>
+          <a:xfrm>
+            <a:off x="640080" y="1554480"/>
+            <a:ext cx="10972800" cy="457200"/>
+          </a:xfrm>
+          <a:prstGeom prst="rect">
+            <a:avLst/>
+          </a:prstGeom>
+          <a:noFill/>
+          <a:ln>
+            <a:noFill/>
+          </a:ln>
+        </p:spPr>
+        <p:txBody>
+          <a:bodyPr anchorCtr="0" anchor="t" bIns="0" lIns="0" spcFirstLastPara="1" rIns="0" wrap="square" tIns="0">
+            <a:spAutoFit/>
+          </a:bodyPr>
+          <a:lstStyle/>
+          <a:p>
+            <a:pPr indent="0" lvl="0" marL="0" marR="0" rtl="0" algn="l">
+              <a:lnSpc>
+                <a:spcPct val="100000"/>
+              </a:lnSpc>
+              <a:spcBef>
+                <a:spcPts val="0"/>
+              </a:spcBef>
+              <a:spcAft>
+                <a:spcPts val="0"/>
+              </a:spcAft>
+              <a:buClr>
+                <a:srgbClr val="000000"/>
+              </a:buClr>
+              <a:buSzPts val="1700"/>
+              <a:buFont typeface="Arial"/>
+              <a:buNone/>
+            </a:pPr>
+            <a:r>
+              <a:rPr b="0" i="1" lang="en-US" sz="1700" u="none" cap="none" strike="noStrike">
+                <a:solidFill>
+                  <a:srgbClr val="8B5CF6"/>
+                </a:solidFill>
+                <a:latin typeface="Calibri"/>
+                <a:ea typeface="Calibri"/>
+                <a:cs typeface="Calibri"/>
+                <a:sym typeface="Calibri"/>
+              </a:rPr>
+              <a:t>Combien de fois par seconde mesurer un signal pour le reconstituer sans perte ?</a:t>
+            </a:r>
+            <a:endParaRPr b="0" i="0" sz="1400" u="none" cap="none" strike="noStrike">
+              <a:solidFill>
+                <a:srgbClr val="000000"/>
+              </a:solidFill>
+              <a:latin typeface="Arial"/>
+              <a:ea typeface="Arial"/>
+              <a:cs typeface="Arial"/>
+              <a:sym typeface="Arial"/>
+            </a:endParaRPr>
+          </a:p>
+        </p:txBody>
+      </p:sp>
+      <p:sp>
+        <p:nvSpPr>
+          <p:cNvPr id="329" name="Google Shape;329;p13"/>
+          <p:cNvSpPr txBox="1"/>
+          <p:nvPr/>
+        </p:nvSpPr>
+        <p:spPr>
+          <a:xfrm>
+            <a:off x="640080" y="2194560"/>
+            <a:ext cx="10972800" cy="3200400"/>
+          </a:xfrm>
+          <a:prstGeom prst="rect">
+            <a:avLst/>
+          </a:prstGeom>
+          <a:noFill/>
+          <a:ln>
+            <a:noFill/>
+          </a:ln>
+        </p:spPr>
+        <p:txBody>
+          <a:bodyPr anchorCtr="0" anchor="t" bIns="0" lIns="0" spcFirstLastPara="1" rIns="0" wrap="square" tIns="0">
+            <a:spAutoFit/>
+          </a:bodyPr>
+          <a:lstStyle/>
+          <a:p>
+            <a:pPr indent="0" lvl="0" marL="0" marR="0" rtl="0" algn="l">
+              <a:lnSpc>
+                <a:spcPct val="135000"/>
+              </a:lnSpc>
+              <a:spcBef>
+                <a:spcPts val="0"/>
+              </a:spcBef>
+              <a:spcAft>
+                <a:spcPts val="0"/>
+              </a:spcAft>
+              <a:buClr>
+                <a:srgbClr val="000000"/>
+              </a:buClr>
+              <a:buSzPts val="1600"/>
+              <a:buFont typeface="Arial"/>
+              <a:buNone/>
+            </a:pPr>
+            <a:r>
+              <a:rPr b="1" i="0" lang="en-US" sz="1600" u="none" cap="none" strike="noStrike">
+                <a:solidFill>
+                  <a:srgbClr val="8B5CF6"/>
+                </a:solidFill>
+                <a:latin typeface="Calibri"/>
+                <a:ea typeface="Calibri"/>
+                <a:cs typeface="Calibri"/>
+                <a:sym typeface="Calibri"/>
+              </a:rPr>
+              <a:t>● </a:t>
+            </a:r>
+            <a:r>
+              <a:rPr b="0" i="0" lang="en-US" sz="1600" u="none" cap="none" strike="noStrike">
+                <a:solidFill>
+                  <a:srgbClr val="334055"/>
+                </a:solidFill>
+                <a:latin typeface="Calibri"/>
+                <a:ea typeface="Calibri"/>
+                <a:cs typeface="Calibri"/>
+                <a:sym typeface="Calibri"/>
+              </a:rPr>
+              <a:t>Théorème de Nyquist–Shannon : la fréquence d'échantillonnage doit valoir au moins le double de la fréquence maximale utile du signal.</a:t>
+            </a:r>
+            <a:endParaRPr b="0" i="0" sz="1400" u="none" cap="none" strike="noStrike">
+              <a:solidFill>
+                <a:srgbClr val="000000"/>
+              </a:solidFill>
+              <a:latin typeface="Arial"/>
+              <a:ea typeface="Arial"/>
+              <a:cs typeface="Arial"/>
+              <a:sym typeface="Arial"/>
+            </a:endParaRPr>
+          </a:p>
+          <a:p>
+            <a:pPr indent="0" lvl="0" marL="0" marR="0" rtl="0" algn="l">
+              <a:lnSpc>
+                <a:spcPct val="135000"/>
+              </a:lnSpc>
+              <a:spcBef>
+                <a:spcPts val="0"/>
+              </a:spcBef>
+              <a:spcAft>
+                <a:spcPts val="0"/>
+              </a:spcAft>
+              <a:buClr>
+                <a:srgbClr val="000000"/>
+              </a:buClr>
+              <a:buSzPts val="1600"/>
+              <a:buFont typeface="Arial"/>
+              <a:buNone/>
+            </a:pPr>
+            <a:r>
+              <a:rPr b="1" i="0" lang="en-US" sz="1600" u="none" cap="none" strike="noStrike">
+                <a:solidFill>
+                  <a:srgbClr val="8B5CF6"/>
+                </a:solidFill>
+                <a:latin typeface="Calibri"/>
+                <a:ea typeface="Calibri"/>
+                <a:cs typeface="Calibri"/>
+                <a:sym typeface="Calibri"/>
+              </a:rPr>
+              <a:t>● </a:t>
+            </a:r>
+            <a:r>
+              <a:rPr b="0" i="0" lang="en-US" sz="1600" u="none" cap="none" strike="noStrike">
+                <a:solidFill>
+                  <a:srgbClr val="334055"/>
+                </a:solidFill>
+                <a:latin typeface="Calibri"/>
+                <a:ea typeface="Calibri"/>
+                <a:cs typeface="Calibri"/>
+                <a:sym typeface="Calibri"/>
+              </a:rPr>
+              <a:t>La fréquence de Nyquist — la moitié de la fréquence d'échantillonnage — est la plus haute fréquence représentable sans ambiguïté.</a:t>
+            </a:r>
+            <a:endParaRPr b="0" i="0" sz="1400" u="none" cap="none" strike="noStrike">
+              <a:solidFill>
+                <a:srgbClr val="000000"/>
+              </a:solidFill>
+              <a:latin typeface="Arial"/>
+              <a:ea typeface="Arial"/>
+              <a:cs typeface="Arial"/>
+              <a:sym typeface="Arial"/>
+            </a:endParaRPr>
+          </a:p>
+          <a:p>
+            <a:pPr indent="0" lvl="0" marL="0" marR="0" rtl="0" algn="l">
+              <a:lnSpc>
+                <a:spcPct val="135000"/>
+              </a:lnSpc>
+              <a:spcBef>
+                <a:spcPts val="0"/>
+              </a:spcBef>
+              <a:spcAft>
+                <a:spcPts val="0"/>
+              </a:spcAft>
+              <a:buClr>
+                <a:srgbClr val="000000"/>
+              </a:buClr>
+              <a:buSzPts val="1600"/>
+              <a:buFont typeface="Arial"/>
+              <a:buNone/>
+            </a:pPr>
+            <a:r>
+              <a:rPr b="1" i="0" lang="en-US" sz="1600" u="none" cap="none" strike="noStrike">
+                <a:solidFill>
+                  <a:srgbClr val="8B5CF6"/>
+                </a:solidFill>
+                <a:latin typeface="Calibri"/>
+                <a:ea typeface="Calibri"/>
+                <a:cs typeface="Calibri"/>
+                <a:sym typeface="Calibri"/>
+              </a:rPr>
+              <a:t>● </a:t>
+            </a:r>
+            <a:r>
+              <a:rPr b="0" i="0" lang="en-US" sz="1600" u="none" cap="none" strike="noStrike">
+                <a:solidFill>
+                  <a:srgbClr val="334055"/>
+                </a:solidFill>
+                <a:latin typeface="Calibri"/>
+                <a:ea typeface="Calibri"/>
+                <a:cs typeface="Calibri"/>
+                <a:sym typeface="Calibri"/>
+              </a:rPr>
+              <a:t>Sous ce seuil : repliement de spectre (aliasing) — des fréquences hautes se déguisent en basses fréquences parasites.</a:t>
+            </a:r>
+            <a:endParaRPr b="0" i="0" sz="1400" u="none" cap="none" strike="noStrike">
+              <a:solidFill>
+                <a:srgbClr val="000000"/>
+              </a:solidFill>
+              <a:latin typeface="Arial"/>
+              <a:ea typeface="Arial"/>
+              <a:cs typeface="Arial"/>
+              <a:sym typeface="Arial"/>
+            </a:endParaRPr>
+          </a:p>
+          <a:p>
+            <a:pPr indent="0" lvl="0" marL="0" marR="0" rtl="0" algn="l">
+              <a:lnSpc>
+                <a:spcPct val="135000"/>
+              </a:lnSpc>
+              <a:spcBef>
+                <a:spcPts val="0"/>
+              </a:spcBef>
+              <a:spcAft>
+                <a:spcPts val="0"/>
+              </a:spcAft>
+              <a:buClr>
+                <a:srgbClr val="000000"/>
+              </a:buClr>
+              <a:buSzPts val="1600"/>
+              <a:buFont typeface="Arial"/>
+              <a:buNone/>
+            </a:pPr>
+            <a:r>
+              <a:rPr b="1" i="0" lang="en-US" sz="1600" u="none" cap="none" strike="noStrike">
+                <a:solidFill>
+                  <a:srgbClr val="8B5CF6"/>
+                </a:solidFill>
+                <a:latin typeface="Calibri"/>
+                <a:ea typeface="Calibri"/>
+                <a:cs typeface="Calibri"/>
+                <a:sym typeface="Calibri"/>
+              </a:rPr>
+              <a:t>● </a:t>
+            </a:r>
+            <a:r>
+              <a:rPr b="0" i="0" lang="en-US" sz="1600" u="none" cap="none" strike="noStrike">
+                <a:solidFill>
+                  <a:srgbClr val="334055"/>
+                </a:solidFill>
+                <a:latin typeface="Calibri"/>
+                <a:ea typeface="Calibri"/>
+                <a:cs typeface="Calibri"/>
+                <a:sym typeface="Calibri"/>
+              </a:rPr>
+              <a:t>Son moteur : contenu utile sous 1 kHz → 16 kHz d'échantillonnage (Nyquist 8 kHz) largement suffisant.</a:t>
+            </a:r>
+            <a:endParaRPr b="0" i="0" sz="1400" u="none" cap="none" strike="noStrike">
+              <a:solidFill>
+                <a:srgbClr val="000000"/>
+              </a:solidFill>
+              <a:latin typeface="Arial"/>
+              <a:ea typeface="Arial"/>
+              <a:cs typeface="Arial"/>
+              <a:sym typeface="Arial"/>
+            </a:endParaRPr>
+          </a:p>
+          <a:p>
+            <a:pPr indent="0" lvl="0" marL="0" marR="0" rtl="0" algn="l">
+              <a:lnSpc>
+                <a:spcPct val="135000"/>
+              </a:lnSpc>
+              <a:spcBef>
+                <a:spcPts val="0"/>
+              </a:spcBef>
+              <a:spcAft>
+                <a:spcPts val="0"/>
+              </a:spcAft>
+              <a:buClr>
+                <a:srgbClr val="000000"/>
+              </a:buClr>
+              <a:buSzPts val="1600"/>
+              <a:buFont typeface="Arial"/>
+              <a:buNone/>
+            </a:pPr>
+            <a:r>
+              <a:rPr b="1" i="0" lang="en-US" sz="1600" u="none" cap="none" strike="noStrike">
+                <a:solidFill>
+                  <a:srgbClr val="8B5CF6"/>
+                </a:solidFill>
+                <a:latin typeface="Calibri"/>
+                <a:ea typeface="Calibri"/>
+                <a:cs typeface="Calibri"/>
+                <a:sym typeface="Calibri"/>
+              </a:rPr>
+              <a:t>● </a:t>
+            </a:r>
+            <a:r>
+              <a:rPr b="0" i="0" lang="en-US" sz="1600" u="none" cap="none" strike="noStrike">
+                <a:solidFill>
+                  <a:srgbClr val="334055"/>
+                </a:solidFill>
+                <a:latin typeface="Calibri"/>
+                <a:ea typeface="Calibri"/>
+                <a:cs typeface="Calibri"/>
+                <a:sym typeface="Calibri"/>
+              </a:rPr>
+              <a:t>Vibration : signature mécanique sous 5 Hz → les 10 Hz effectifs respectent le critère malgré le débit BLE limité.</a:t>
+            </a:r>
+            <a:endParaRPr b="0" i="0" sz="1400" u="none" cap="none" strike="noStrike">
+              <a:solidFill>
+                <a:srgbClr val="000000"/>
+              </a:solidFill>
+              <a:latin typeface="Arial"/>
+              <a:ea typeface="Arial"/>
+              <a:cs typeface="Arial"/>
+              <a:sym typeface="Arial"/>
+            </a:endParaRPr>
+          </a:p>
+        </p:txBody>
+      </p:sp>
+      <p:sp>
+        <p:nvSpPr>
+          <p:cNvPr id="330" name="Google Shape;330;p13"/>
+          <p:cNvSpPr/>
+          <p:nvPr/>
+        </p:nvSpPr>
+        <p:spPr>
+          <a:xfrm>
+            <a:off x="640080" y="5577840"/>
+            <a:ext cx="10972800" cy="868680"/>
+          </a:xfrm>
+          <a:prstGeom prst="roundRect">
+            <a:avLst>
+              <a:gd fmla="val 16667" name="adj"/>
+            </a:avLst>
+          </a:prstGeom>
+          <a:solidFill>
+            <a:srgbClr val="EFE9FE"/>
+          </a:solidFill>
+          <a:ln>
+            <a:noFill/>
+          </a:ln>
+          <a:effectLst>
+            <a:outerShdw blurRad="40000" rotWithShape="0" dir="5400000" dist="23000">
+              <a:srgbClr val="000000">
+                <a:alpha val="34901"/>
+              </a:srgbClr>
+            </a:outerShdw>
+          </a:effectLst>
+        </p:spPr>
+        <p:txBody>
+          <a:bodyPr anchorCtr="0" anchor="ctr" bIns="45700" lIns="91425" spcFirstLastPara="1" rIns="91425" wrap="square" tIns="45700">
+            <a:noAutofit/>
+          </a:bodyPr>
+          <a:lstStyle/>
+          <a:p>
+            <a:pPr indent="0" lvl="0" marL="0" marR="0" rtl="0" algn="ctr">
+              <a:lnSpc>
+                <a:spcPct val="100000"/>
+              </a:lnSpc>
+              <a:spcBef>
+                <a:spcPts val="0"/>
+              </a:spcBef>
+              <a:spcAft>
+                <a:spcPts val="0"/>
+              </a:spcAft>
+              <a:buClr>
+                <a:srgbClr val="000000"/>
+              </a:buClr>
+              <a:buSzPts val="1800"/>
+              <a:buFont typeface="Arial"/>
+              <a:buNone/>
+            </a:pPr>
+            <a:r>
+              <a:t/>
+            </a:r>
+            <a:endParaRPr b="0" i="0" sz="1800" u="none" cap="none" strike="noStrike">
+              <a:solidFill>
+                <a:schemeClr val="dk1"/>
+              </a:solidFill>
+              <a:latin typeface="Calibri"/>
+              <a:ea typeface="Calibri"/>
+              <a:cs typeface="Calibri"/>
+              <a:sym typeface="Calibri"/>
+            </a:endParaRPr>
+          </a:p>
+        </p:txBody>
+      </p:sp>
+      <p:sp>
+        <p:nvSpPr>
+          <p:cNvPr id="331" name="Google Shape;331;p13"/>
+          <p:cNvSpPr txBox="1"/>
+          <p:nvPr/>
+        </p:nvSpPr>
+        <p:spPr>
+          <a:xfrm>
+            <a:off x="822960" y="5852160"/>
+            <a:ext cx="10515600" cy="365760"/>
+          </a:xfrm>
+          <a:prstGeom prst="rect">
+            <a:avLst/>
+          </a:prstGeom>
+          <a:noFill/>
+          <a:ln>
+            <a:noFill/>
+          </a:ln>
+        </p:spPr>
+        <p:txBody>
+          <a:bodyPr anchorCtr="0" anchor="t" bIns="0" lIns="0" spcFirstLastPara="1" rIns="0" wrap="square" tIns="0">
+            <a:spAutoFit/>
+          </a:bodyPr>
+          <a:lstStyle/>
+          <a:p>
+            <a:pPr indent="0" lvl="0" marL="0" marR="0" rtl="0" algn="ctr">
+              <a:lnSpc>
+                <a:spcPct val="100000"/>
+              </a:lnSpc>
+              <a:spcBef>
+                <a:spcPts val="0"/>
+              </a:spcBef>
+              <a:spcAft>
+                <a:spcPts val="0"/>
+              </a:spcAft>
+              <a:buClr>
+                <a:srgbClr val="000000"/>
+              </a:buClr>
+              <a:buSzPts val="1300"/>
+              <a:buFont typeface="Arial"/>
+              <a:buNone/>
+            </a:pPr>
+            <a:r>
+              <a:rPr b="1" i="0" lang="en-US" sz="2400" u="none" cap="none" strike="noStrike">
+                <a:solidFill>
+                  <a:srgbClr val="1E293B"/>
+                </a:solidFill>
+                <a:latin typeface="Calibri"/>
+                <a:ea typeface="Calibri"/>
+                <a:cs typeface="Calibri"/>
+                <a:sym typeface="Calibri"/>
+              </a:rPr>
+              <a:t>f</a:t>
+            </a:r>
+            <a:r>
+              <a:rPr b="1" i="0" lang="en-US" sz="1400" baseline="-25000" u="none" cap="none" strike="noStrike">
+                <a:solidFill>
+                  <a:srgbClr val="1E293B"/>
+                </a:solidFill>
+                <a:latin typeface="Calibri"/>
+                <a:ea typeface="Calibri"/>
+                <a:cs typeface="Calibri"/>
+                <a:sym typeface="Calibri"/>
+              </a:rPr>
+              <a:t>e</a:t>
+            </a:r>
+            <a:r>
+              <a:rPr b="1" i="0" lang="en-US" sz="2400" u="none" cap="none" strike="noStrike">
+                <a:solidFill>
+                  <a:srgbClr val="1E293B"/>
+                </a:solidFill>
+                <a:latin typeface="Calibri"/>
+                <a:ea typeface="Calibri"/>
+                <a:cs typeface="Calibri"/>
+                <a:sym typeface="Calibri"/>
+              </a:rPr>
+              <a:t xml:space="preserve"> ≥ 2 · f</a:t>
+            </a:r>
+            <a:r>
+              <a:rPr b="1" i="0" lang="en-US" sz="1400" baseline="-25000" u="none" cap="none" strike="noStrike">
+                <a:solidFill>
+                  <a:srgbClr val="1E293B"/>
+                </a:solidFill>
+                <a:latin typeface="Calibri"/>
+                <a:ea typeface="Calibri"/>
+                <a:cs typeface="Calibri"/>
+                <a:sym typeface="Calibri"/>
+              </a:rPr>
+              <a:t>max</a:t>
+            </a:r>
+            <a:r>
+              <a:rPr b="0" i="1" lang="en-US" sz="1400" u="none" cap="none" strike="noStrike">
+                <a:solidFill>
+                  <a:srgbClr val="8B5CF6"/>
+                </a:solidFill>
+                <a:latin typeface="Calibri"/>
+                <a:ea typeface="Calibri"/>
+                <a:cs typeface="Calibri"/>
+                <a:sym typeface="Calibri"/>
+              </a:rPr>
+              <a:t xml:space="preserve">      —      critère de Nyquist–Shannon</a:t>
+            </a:r>
+            <a:endParaRPr b="0" i="0" sz="1400" u="none" cap="none" strike="noStrike">
+              <a:solidFill>
+                <a:srgbClr val="000000"/>
+              </a:solidFill>
+              <a:latin typeface="Arial"/>
+              <a:ea typeface="Arial"/>
+              <a:cs typeface="Arial"/>
+              <a:sym typeface="Arial"/>
+            </a:endParaRPr>
+          </a:p>
+        </p:txBody>
+      </p:sp>
+    </p:spTree>
+  </p:cSld>
+  <p:clrMapOvr>
+    <a:masterClrMapping/>
+  </p:clrMapOvr>
+</p:sld>
+</file>
+
+<file path=ppt/slides/slide12.xml><?xml version="1.0" encoding="utf-8"?>
 <p:sld xmlns:a="http://schemas.openxmlformats.org/drawingml/2006/main" xmlns:r="http://schemas.openxmlformats.org/officeDocument/2006/relationships" xmlns:mc="http://schemas.openxmlformats.org/markup-compatibility/2006" xmlns:mv="urn:schemas-microsoft-com:mac:vml" xmlns:p="http://schemas.openxmlformats.org/presentationml/2006/main" xmlns:c="http://schemas.openxmlformats.org/drawingml/2006/chart" xmlns:dgm="http://schemas.openxmlformats.org/drawingml/2006/diagram" xmlns:o="urn:schemas-microsoft-com:office:office" xmlns:v="urn:schemas-microsoft-com:vml" xmlns:pvml="urn:schemas-microsoft-com:office:powerpoint" xmlns:com="http://schemas.openxmlformats.org/drawingml/2006/compatibility" xmlns:p14="http://schemas.microsoft.com/office/powerpoint/2010/main" xmlns:p15="http://schemas.microsoft.com/office/powerpoint/2012/main" xmlns:ahyp="http://schemas.microsoft.com/office/drawing/2018/hyperlinkcolor">
   <p:cSld>
     <p:spTree>
@@ -20765,7 +21649,7 @@
                 <a:cs typeface="Calibri"/>
                 <a:sym typeface="Calibri"/>
               </a:rPr>
-              <a:t>11 / 29</a:t>
+              <a:t>12 / 31</a:t>
             </a:r>
             <a:endParaRPr b="0" i="0" sz="1400" u="none" cap="none" strike="noStrike">
               <a:solidFill>
@@ -20947,7 +21831,7 @@
 </p:sld>
 </file>
 
-<file path=ppt/slides/slide12.xml><?xml version="1.0" encoding="utf-8"?>
+<file path=ppt/slides/slide13.xml><?xml version="1.0" encoding="utf-8"?>
 <p:sld xmlns:a="http://schemas.openxmlformats.org/drawingml/2006/main" xmlns:r="http://schemas.openxmlformats.org/officeDocument/2006/relationships" xmlns:mc="http://schemas.openxmlformats.org/markup-compatibility/2006" xmlns:mv="urn:schemas-microsoft-com:mac:vml" xmlns:p="http://schemas.openxmlformats.org/presentationml/2006/main" xmlns:c="http://schemas.openxmlformats.org/drawingml/2006/chart" xmlns:dgm="http://schemas.openxmlformats.org/drawingml/2006/diagram" xmlns:o="urn:schemas-microsoft-com:office:office" xmlns:v="urn:schemas-microsoft-com:vml" xmlns:pvml="urn:schemas-microsoft-com:office:powerpoint" xmlns:com="http://schemas.openxmlformats.org/drawingml/2006/compatibility" xmlns:p14="http://schemas.microsoft.com/office/powerpoint/2010/main" xmlns:p15="http://schemas.microsoft.com/office/powerpoint/2012/main" xmlns:ahyp="http://schemas.microsoft.com/office/drawing/2018/hyperlinkcolor">
   <p:cSld>
     <p:spTree>
@@ -21207,7 +22091,7 @@
                 <a:cs typeface="Calibri"/>
                 <a:sym typeface="Calibri"/>
               </a:rPr>
-              <a:t>12 / 29</a:t>
+              <a:t>13 / 31</a:t>
             </a:r>
             <a:endParaRPr b="0" i="0" sz="1400" u="none" cap="none" strike="noStrike">
               <a:solidFill>
@@ -21781,7 +22665,7 @@
 </p:sld>
 </file>
 
-<file path=ppt/slides/slide13.xml><?xml version="1.0" encoding="utf-8"?>
+<file path=ppt/slides/slide14.xml><?xml version="1.0" encoding="utf-8"?>
 <p:sld xmlns:a="http://schemas.openxmlformats.org/drawingml/2006/main" xmlns:r="http://schemas.openxmlformats.org/officeDocument/2006/relationships" xmlns:mc="http://schemas.openxmlformats.org/markup-compatibility/2006" xmlns:mv="urn:schemas-microsoft-com:mac:vml" xmlns:p="http://schemas.openxmlformats.org/presentationml/2006/main" xmlns:c="http://schemas.openxmlformats.org/drawingml/2006/chart" xmlns:dgm="http://schemas.openxmlformats.org/drawingml/2006/diagram" xmlns:o="urn:schemas-microsoft-com:office:office" xmlns:v="urn:schemas-microsoft-com:vml" xmlns:pvml="urn:schemas-microsoft-com:office:powerpoint" xmlns:com="http://schemas.openxmlformats.org/drawingml/2006/compatibility" xmlns:p14="http://schemas.microsoft.com/office/powerpoint/2010/main" xmlns:p15="http://schemas.microsoft.com/office/powerpoint/2012/main" xmlns:ahyp="http://schemas.microsoft.com/office/drawing/2018/hyperlinkcolor">
   <p:cSld>
     <p:spTree>
@@ -22041,7 +22925,7 @@
                 <a:cs typeface="Calibri"/>
                 <a:sym typeface="Calibri"/>
               </a:rPr>
-              <a:t>13 / 29</a:t>
+              <a:t>14 / 31</a:t>
             </a:r>
             <a:endParaRPr b="0" i="0" sz="1400" u="none" cap="none" strike="noStrike">
               <a:solidFill>
@@ -22297,7 +23181,7 @@
 </p:sld>
 </file>
 
-<file path=ppt/slides/slide14.xml><?xml version="1.0" encoding="utf-8"?>
+<file path=ppt/slides/slide15.xml><?xml version="1.0" encoding="utf-8"?>
 <p:sld xmlns:a="http://schemas.openxmlformats.org/drawingml/2006/main" xmlns:r="http://schemas.openxmlformats.org/officeDocument/2006/relationships" xmlns:mc="http://schemas.openxmlformats.org/markup-compatibility/2006" xmlns:mv="urn:schemas-microsoft-com:mac:vml" xmlns:p="http://schemas.openxmlformats.org/presentationml/2006/main" xmlns:c="http://schemas.openxmlformats.org/drawingml/2006/chart" xmlns:dgm="http://schemas.openxmlformats.org/drawingml/2006/diagram" xmlns:o="urn:schemas-microsoft-com:office:office" xmlns:v="urn:schemas-microsoft-com:vml" xmlns:pvml="urn:schemas-microsoft-com:office:powerpoint" xmlns:com="http://schemas.openxmlformats.org/drawingml/2006/compatibility" xmlns:p14="http://schemas.microsoft.com/office/powerpoint/2010/main" xmlns:p15="http://schemas.microsoft.com/office/powerpoint/2012/main" xmlns:ahyp="http://schemas.microsoft.com/office/drawing/2018/hyperlinkcolor">
   <p:cSld>
     <p:spTree>
@@ -22557,7 +23441,7 @@
                 <a:cs typeface="Calibri"/>
                 <a:sym typeface="Calibri"/>
               </a:rPr>
-              <a:t>14 / 29</a:t>
+              <a:t>15 / 31</a:t>
             </a:r>
             <a:endParaRPr b="0" i="0" sz="1400" u="none" cap="none" strike="noStrike">
               <a:solidFill>
@@ -23407,7 +24291,7 @@
 </p:sld>
 </file>
 
-<file path=ppt/slides/slide15.xml><?xml version="1.0" encoding="utf-8"?>
+<file path=ppt/slides/slide16.xml><?xml version="1.0" encoding="utf-8"?>
 <p:sld xmlns:a="http://schemas.openxmlformats.org/drawingml/2006/main" xmlns:r="http://schemas.openxmlformats.org/officeDocument/2006/relationships" xmlns:mc="http://schemas.openxmlformats.org/markup-compatibility/2006" xmlns:mv="urn:schemas-microsoft-com:mac:vml" xmlns:p="http://schemas.openxmlformats.org/presentationml/2006/main" xmlns:c="http://schemas.openxmlformats.org/drawingml/2006/chart" xmlns:dgm="http://schemas.openxmlformats.org/drawingml/2006/diagram" xmlns:o="urn:schemas-microsoft-com:office:office" xmlns:v="urn:schemas-microsoft-com:vml" xmlns:pvml="urn:schemas-microsoft-com:office:powerpoint" xmlns:com="http://schemas.openxmlformats.org/drawingml/2006/compatibility" xmlns:p14="http://schemas.microsoft.com/office/powerpoint/2010/main" xmlns:p15="http://schemas.microsoft.com/office/powerpoint/2012/main" xmlns:ahyp="http://schemas.microsoft.com/office/drawing/2018/hyperlinkcolor">
   <p:cSld>
     <p:spTree>
@@ -23667,7 +24551,7 @@
                 <a:cs typeface="Calibri"/>
                 <a:sym typeface="Calibri"/>
               </a:rPr>
-              <a:t>15 / 29</a:t>
+              <a:t>16 / 31</a:t>
             </a:r>
             <a:endParaRPr b="0" i="0" sz="1400" u="none" cap="none" strike="noStrike">
               <a:solidFill>
@@ -24241,7 +25125,7 @@
 </p:sld>
 </file>
 
-<file path=ppt/slides/slide16.xml><?xml version="1.0" encoding="utf-8"?>
+<file path=ppt/slides/slide17.xml><?xml version="1.0" encoding="utf-8"?>
 <p:sld xmlns:a="http://schemas.openxmlformats.org/drawingml/2006/main" xmlns:r="http://schemas.openxmlformats.org/officeDocument/2006/relationships" xmlns:mc="http://schemas.openxmlformats.org/markup-compatibility/2006" xmlns:mv="urn:schemas-microsoft-com:mac:vml" xmlns:p="http://schemas.openxmlformats.org/presentationml/2006/main" xmlns:c="http://schemas.openxmlformats.org/drawingml/2006/chart" xmlns:dgm="http://schemas.openxmlformats.org/drawingml/2006/diagram" xmlns:o="urn:schemas-microsoft-com:office:office" xmlns:v="urn:schemas-microsoft-com:vml" xmlns:pvml="urn:schemas-microsoft-com:office:powerpoint" xmlns:com="http://schemas.openxmlformats.org/drawingml/2006/compatibility" xmlns:p14="http://schemas.microsoft.com/office/powerpoint/2010/main" xmlns:p15="http://schemas.microsoft.com/office/powerpoint/2012/main" xmlns:ahyp="http://schemas.microsoft.com/office/drawing/2018/hyperlinkcolor">
   <p:cSld>
     <p:spTree>
@@ -24689,7 +25573,7 @@
 </p:sld>
 </file>
 
-<file path=ppt/slides/slide17.xml><?xml version="1.0" encoding="utf-8"?>
+<file path=ppt/slides/slide18.xml><?xml version="1.0" encoding="utf-8"?>
 <p:sld xmlns:a="http://schemas.openxmlformats.org/drawingml/2006/main" xmlns:r="http://schemas.openxmlformats.org/officeDocument/2006/relationships" xmlns:mc="http://schemas.openxmlformats.org/markup-compatibility/2006" xmlns:mv="urn:schemas-microsoft-com:mac:vml" xmlns:p="http://schemas.openxmlformats.org/presentationml/2006/main" xmlns:c="http://schemas.openxmlformats.org/drawingml/2006/chart" xmlns:dgm="http://schemas.openxmlformats.org/drawingml/2006/diagram" xmlns:o="urn:schemas-microsoft-com:office:office" xmlns:v="urn:schemas-microsoft-com:vml" xmlns:pvml="urn:schemas-microsoft-com:office:powerpoint" xmlns:com="http://schemas.openxmlformats.org/drawingml/2006/compatibility" xmlns:p14="http://schemas.microsoft.com/office/powerpoint/2010/main" xmlns:p15="http://schemas.microsoft.com/office/powerpoint/2012/main" xmlns:ahyp="http://schemas.microsoft.com/office/drawing/2018/hyperlinkcolor">
   <p:cSld>
     <p:spTree>
@@ -24949,7 +25833,7 @@
                 <a:cs typeface="Calibri"/>
                 <a:sym typeface="Calibri"/>
               </a:rPr>
-              <a:t>17 / 29</a:t>
+              <a:t>18 / 31</a:t>
             </a:r>
             <a:endParaRPr b="0" i="0" sz="1400" u="none" cap="none" strike="noStrike">
               <a:solidFill>
@@ -26011,7 +26895,7 @@
 </p:sld>
 </file>
 
-<file path=ppt/slides/slide18.xml><?xml version="1.0" encoding="utf-8"?>
+<file path=ppt/slides/slide19.xml><?xml version="1.0" encoding="utf-8"?>
 <p:sld xmlns:a="http://schemas.openxmlformats.org/drawingml/2006/main" xmlns:r="http://schemas.openxmlformats.org/officeDocument/2006/relationships" xmlns:mc="http://schemas.openxmlformats.org/markup-compatibility/2006" xmlns:mv="urn:schemas-microsoft-com:mac:vml" xmlns:p="http://schemas.openxmlformats.org/presentationml/2006/main" xmlns:c="http://schemas.openxmlformats.org/drawingml/2006/chart" xmlns:dgm="http://schemas.openxmlformats.org/drawingml/2006/diagram" xmlns:o="urn:schemas-microsoft-com:office:office" xmlns:v="urn:schemas-microsoft-com:vml" xmlns:pvml="urn:schemas-microsoft-com:office:powerpoint" xmlns:com="http://schemas.openxmlformats.org/drawingml/2006/compatibility" xmlns:p14="http://schemas.microsoft.com/office/powerpoint/2010/main" xmlns:p15="http://schemas.microsoft.com/office/powerpoint/2012/main" xmlns:ahyp="http://schemas.microsoft.com/office/drawing/2018/hyperlinkcolor">
   <p:cSld>
     <p:spTree>
@@ -26271,7 +27155,7 @@
                 <a:cs typeface="Calibri"/>
                 <a:sym typeface="Calibri"/>
               </a:rPr>
-              <a:t>18 / 29</a:t>
+              <a:t>19 / 31</a:t>
             </a:r>
             <a:endParaRPr b="0" i="0" sz="1400" u="none" cap="none" strike="noStrike">
               <a:solidFill>
@@ -26794,810 +27678,6 @@
                 <a:sym typeface="Calibri"/>
               </a:rPr>
               <a:t>Génère les noms son_N.csv et vib_N.csv pour cohérence avec le client UDP</a:t>
-            </a:r>
-            <a:endParaRPr b="0" i="0" sz="1400" u="none" cap="none" strike="noStrike">
-              <a:solidFill>
-                <a:srgbClr val="000000"/>
-              </a:solidFill>
-              <a:latin typeface="Arial"/>
-              <a:ea typeface="Arial"/>
-              <a:cs typeface="Arial"/>
-              <a:sym typeface="Arial"/>
-            </a:endParaRPr>
-          </a:p>
-        </p:txBody>
-      </p:sp>
-    </p:spTree>
-  </p:cSld>
-  <p:clrMapOvr>
-    <a:masterClrMapping/>
-  </p:clrMapOvr>
-</p:sld>
-</file>
-
-<file path=ppt/slides/slide19.xml><?xml version="1.0" encoding="utf-8"?>
-<p:sld xmlns:a="http://schemas.openxmlformats.org/drawingml/2006/main" xmlns:r="http://schemas.openxmlformats.org/officeDocument/2006/relationships" xmlns:mc="http://schemas.openxmlformats.org/markup-compatibility/2006" xmlns:mv="urn:schemas-microsoft-com:mac:vml" xmlns:p="http://schemas.openxmlformats.org/presentationml/2006/main" xmlns:c="http://schemas.openxmlformats.org/drawingml/2006/chart" xmlns:dgm="http://schemas.openxmlformats.org/drawingml/2006/diagram" xmlns:o="urn:schemas-microsoft-com:office:office" xmlns:v="urn:schemas-microsoft-com:vml" xmlns:pvml="urn:schemas-microsoft-com:office:powerpoint" xmlns:com="http://schemas.openxmlformats.org/drawingml/2006/compatibility" xmlns:p14="http://schemas.microsoft.com/office/powerpoint/2010/main" xmlns:p15="http://schemas.microsoft.com/office/powerpoint/2012/main" xmlns:ahyp="http://schemas.microsoft.com/office/drawing/2018/hyperlinkcolor">
-  <p:cSld>
-    <p:spTree>
-      <p:nvGrpSpPr>
-        <p:cNvPr id="381" name="Shape 381"/>
-        <p:cNvGrpSpPr/>
-        <p:nvPr/>
-      </p:nvGrpSpPr>
-      <p:grpSpPr>
-        <a:xfrm>
-          <a:off x="0" y="0"/>
-          <a:ext cx="0" cy="0"/>
-          <a:chOff x="0" y="0"/>
-          <a:chExt cx="0" cy="0"/>
-        </a:xfrm>
-      </p:grpSpPr>
-      <p:sp>
-        <p:nvSpPr>
-          <p:cNvPr id="382" name="Google Shape;382;p17"/>
-          <p:cNvSpPr/>
-          <p:nvPr/>
-        </p:nvSpPr>
-        <p:spPr>
-          <a:xfrm>
-            <a:off x="0" y="0"/>
-            <a:ext cx="12191695" cy="6858000"/>
-          </a:xfrm>
-          <a:prstGeom prst="rect">
-            <a:avLst/>
-          </a:prstGeom>
-          <a:solidFill>
-            <a:srgbClr val="FAFAFC"/>
-          </a:solidFill>
-          <a:ln>
-            <a:noFill/>
-          </a:ln>
-        </p:spPr>
-        <p:txBody>
-          <a:bodyPr anchorCtr="0" anchor="ctr" bIns="45700" lIns="91425" spcFirstLastPara="1" rIns="91425" wrap="square" tIns="45700">
-            <a:noAutofit/>
-          </a:bodyPr>
-          <a:lstStyle/>
-          <a:p>
-            <a:pPr indent="0" lvl="0" marL="0" marR="0" rtl="0" algn="ctr">
-              <a:lnSpc>
-                <a:spcPct val="100000"/>
-              </a:lnSpc>
-              <a:spcBef>
-                <a:spcPts val="0"/>
-              </a:spcBef>
-              <a:spcAft>
-                <a:spcPts val="0"/>
-              </a:spcAft>
-              <a:buClr>
-                <a:srgbClr val="000000"/>
-              </a:buClr>
-              <a:buSzPts val="1800"/>
-              <a:buFont typeface="Arial"/>
-              <a:buNone/>
-            </a:pPr>
-            <a:r>
-              <a:t/>
-            </a:r>
-            <a:endParaRPr b="0" i="0" sz="1800" u="none" cap="none" strike="noStrike">
-              <a:solidFill>
-                <a:schemeClr val="dk1"/>
-              </a:solidFill>
-              <a:latin typeface="Calibri"/>
-              <a:ea typeface="Calibri"/>
-              <a:cs typeface="Calibri"/>
-              <a:sym typeface="Calibri"/>
-            </a:endParaRPr>
-          </a:p>
-        </p:txBody>
-      </p:sp>
-      <p:sp>
-        <p:nvSpPr>
-          <p:cNvPr id="383" name="Google Shape;383;p17"/>
-          <p:cNvSpPr/>
-          <p:nvPr/>
-        </p:nvSpPr>
-        <p:spPr>
-          <a:xfrm>
-            <a:off x="502920" y="530352"/>
-            <a:ext cx="228600" cy="228600"/>
-          </a:xfrm>
-          <a:prstGeom prst="ellipse">
-            <a:avLst/>
-          </a:prstGeom>
-          <a:solidFill>
-            <a:srgbClr val="8B5CF6"/>
-          </a:solidFill>
-          <a:ln>
-            <a:noFill/>
-          </a:ln>
-          <a:effectLst>
-            <a:outerShdw blurRad="40000" rotWithShape="0" dir="5400000" dist="23000">
-              <a:srgbClr val="000000">
-                <a:alpha val="34901"/>
-              </a:srgbClr>
-            </a:outerShdw>
-          </a:effectLst>
-        </p:spPr>
-        <p:txBody>
-          <a:bodyPr anchorCtr="0" anchor="ctr" bIns="45700" lIns="91425" spcFirstLastPara="1" rIns="91425" wrap="square" tIns="45700">
-            <a:noAutofit/>
-          </a:bodyPr>
-          <a:lstStyle/>
-          <a:p>
-            <a:pPr indent="0" lvl="0" marL="0" marR="0" rtl="0" algn="ctr">
-              <a:lnSpc>
-                <a:spcPct val="100000"/>
-              </a:lnSpc>
-              <a:spcBef>
-                <a:spcPts val="0"/>
-              </a:spcBef>
-              <a:spcAft>
-                <a:spcPts val="0"/>
-              </a:spcAft>
-              <a:buClr>
-                <a:srgbClr val="000000"/>
-              </a:buClr>
-              <a:buSzPts val="1800"/>
-              <a:buFont typeface="Arial"/>
-              <a:buNone/>
-            </a:pPr>
-            <a:r>
-              <a:t/>
-            </a:r>
-            <a:endParaRPr b="0" i="0" sz="1800" u="none" cap="none" strike="noStrike">
-              <a:solidFill>
-                <a:schemeClr val="dk1"/>
-              </a:solidFill>
-              <a:latin typeface="Calibri"/>
-              <a:ea typeface="Calibri"/>
-              <a:cs typeface="Calibri"/>
-              <a:sym typeface="Calibri"/>
-            </a:endParaRPr>
-          </a:p>
-        </p:txBody>
-      </p:sp>
-      <p:sp>
-        <p:nvSpPr>
-          <p:cNvPr id="384" name="Google Shape;384;p17"/>
-          <p:cNvSpPr txBox="1"/>
-          <p:nvPr/>
-        </p:nvSpPr>
-        <p:spPr>
-          <a:xfrm>
-            <a:off x="914400" y="384048"/>
-            <a:ext cx="10972800" cy="640080"/>
-          </a:xfrm>
-          <a:prstGeom prst="rect">
-            <a:avLst/>
-          </a:prstGeom>
-          <a:noFill/>
-          <a:ln>
-            <a:noFill/>
-          </a:ln>
-        </p:spPr>
-        <p:txBody>
-          <a:bodyPr anchorCtr="0" anchor="t" bIns="0" lIns="0" spcFirstLastPara="1" rIns="0" wrap="square" tIns="0">
-            <a:spAutoFit/>
-          </a:bodyPr>
-          <a:lstStyle/>
-          <a:p>
-            <a:pPr indent="0" lvl="0" marL="0" marR="0" rtl="0" algn="l">
-              <a:lnSpc>
-                <a:spcPct val="100000"/>
-              </a:lnSpc>
-              <a:spcBef>
-                <a:spcPts val="0"/>
-              </a:spcBef>
-              <a:spcAft>
-                <a:spcPts val="0"/>
-              </a:spcAft>
-              <a:buClr>
-                <a:srgbClr val="000000"/>
-              </a:buClr>
-              <a:buSzPts val="3000"/>
-              <a:buFont typeface="Arial"/>
-              <a:buNone/>
-            </a:pPr>
-            <a:r>
-              <a:rPr b="1" i="0" lang="en-US" sz="3000" u="none" cap="none" strike="noStrike">
-                <a:solidFill>
-                  <a:srgbClr val="1E293B"/>
-                </a:solidFill>
-                <a:latin typeface="Calibri"/>
-                <a:ea typeface="Calibri"/>
-                <a:cs typeface="Calibri"/>
-                <a:sym typeface="Calibri"/>
-              </a:rPr>
-              <a:t>Client UDP de données  ·  port 9091</a:t>
-            </a:r>
-            <a:endParaRPr b="0" i="0" sz="1400" u="none" cap="none" strike="noStrike">
-              <a:solidFill>
-                <a:srgbClr val="000000"/>
-              </a:solidFill>
-              <a:latin typeface="Arial"/>
-              <a:ea typeface="Arial"/>
-              <a:cs typeface="Arial"/>
-              <a:sym typeface="Arial"/>
-            </a:endParaRPr>
-          </a:p>
-        </p:txBody>
-      </p:sp>
-      <p:sp>
-        <p:nvSpPr>
-          <p:cNvPr id="385" name="Google Shape;385;p17"/>
-          <p:cNvSpPr txBox="1"/>
-          <p:nvPr/>
-        </p:nvSpPr>
-        <p:spPr>
-          <a:xfrm>
-            <a:off x="10911535" y="6492240"/>
-            <a:ext cx="914400" cy="274320"/>
-          </a:xfrm>
-          <a:prstGeom prst="rect">
-            <a:avLst/>
-          </a:prstGeom>
-          <a:noFill/>
-          <a:ln>
-            <a:noFill/>
-          </a:ln>
-        </p:spPr>
-        <p:txBody>
-          <a:bodyPr anchorCtr="0" anchor="t" bIns="0" lIns="0" spcFirstLastPara="1" rIns="0" wrap="square" tIns="0">
-            <a:spAutoFit/>
-          </a:bodyPr>
-          <a:lstStyle/>
-          <a:p>
-            <a:pPr indent="0" lvl="0" marL="0" marR="0" rtl="0" algn="r">
-              <a:lnSpc>
-                <a:spcPct val="100000"/>
-              </a:lnSpc>
-              <a:spcBef>
-                <a:spcPts val="0"/>
-              </a:spcBef>
-              <a:spcAft>
-                <a:spcPts val="0"/>
-              </a:spcAft>
-              <a:buClr>
-                <a:srgbClr val="000000"/>
-              </a:buClr>
-              <a:buSzPts val="1000"/>
-              <a:buFont typeface="Arial"/>
-              <a:buNone/>
-            </a:pPr>
-            <a:r>
-              <a:rPr b="0" i="0" lang="en-US" sz="1000" u="none" cap="none" strike="noStrike">
-                <a:solidFill>
-                  <a:srgbClr val="64748B"/>
-                </a:solidFill>
-                <a:latin typeface="Calibri"/>
-                <a:ea typeface="Calibri"/>
-                <a:cs typeface="Calibri"/>
-                <a:sym typeface="Calibri"/>
-              </a:rPr>
-              <a:t>19 / 29</a:t>
-            </a:r>
-            <a:endParaRPr b="0" i="0" sz="1400" u="none" cap="none" strike="noStrike">
-              <a:solidFill>
-                <a:srgbClr val="000000"/>
-              </a:solidFill>
-              <a:latin typeface="Arial"/>
-              <a:ea typeface="Arial"/>
-              <a:cs typeface="Arial"/>
-              <a:sym typeface="Arial"/>
-            </a:endParaRPr>
-          </a:p>
-        </p:txBody>
-      </p:sp>
-      <p:sp>
-        <p:nvSpPr>
-          <p:cNvPr id="386" name="Google Shape;386;p17"/>
-          <p:cNvSpPr txBox="1"/>
-          <p:nvPr/>
-        </p:nvSpPr>
-        <p:spPr>
-          <a:xfrm>
-            <a:off x="502920" y="6492240"/>
-            <a:ext cx="8229600" cy="274320"/>
-          </a:xfrm>
-          <a:prstGeom prst="rect">
-            <a:avLst/>
-          </a:prstGeom>
-          <a:noFill/>
-          <a:ln>
-            <a:noFill/>
-          </a:ln>
-        </p:spPr>
-        <p:txBody>
-          <a:bodyPr anchorCtr="0" anchor="t" bIns="0" lIns="0" spcFirstLastPara="1" rIns="0" wrap="square" tIns="0">
-            <a:spAutoFit/>
-          </a:bodyPr>
-          <a:lstStyle/>
-          <a:p>
-            <a:pPr indent="0" lvl="0" marL="0" marR="0" rtl="0" algn="l">
-              <a:lnSpc>
-                <a:spcPct val="100000"/>
-              </a:lnSpc>
-              <a:spcBef>
-                <a:spcPts val="0"/>
-              </a:spcBef>
-              <a:spcAft>
-                <a:spcPts val="0"/>
-              </a:spcAft>
-              <a:buClr>
-                <a:srgbClr val="000000"/>
-              </a:buClr>
-              <a:buSzPts val="1000"/>
-              <a:buFont typeface="Arial"/>
-              <a:buNone/>
-            </a:pPr>
-            <a:r>
-              <a:rPr b="0" i="0" lang="en-US" sz="1000" u="none" cap="none" strike="noStrike">
-                <a:solidFill>
-                  <a:srgbClr val="64748B"/>
-                </a:solidFill>
-                <a:latin typeface="Calibri"/>
-                <a:ea typeface="Calibri"/>
-                <a:cs typeface="Calibri"/>
-                <a:sym typeface="Calibri"/>
-              </a:rPr>
-              <a:t>BTS CIEL 2026  ·  Soutenance U6  ·  Noa Orand</a:t>
-            </a:r>
-            <a:endParaRPr b="0" i="0" sz="1400" u="none" cap="none" strike="noStrike">
-              <a:solidFill>
-                <a:srgbClr val="000000"/>
-              </a:solidFill>
-              <a:latin typeface="Arial"/>
-              <a:ea typeface="Arial"/>
-              <a:cs typeface="Arial"/>
-              <a:sym typeface="Arial"/>
-            </a:endParaRPr>
-          </a:p>
-        </p:txBody>
-      </p:sp>
-      <p:sp>
-        <p:nvSpPr>
-          <p:cNvPr id="387" name="Google Shape;387;p17"/>
-          <p:cNvSpPr txBox="1"/>
-          <p:nvPr/>
-        </p:nvSpPr>
-        <p:spPr>
-          <a:xfrm>
-            <a:off x="640080" y="1554480"/>
-            <a:ext cx="10972800" cy="457200"/>
-          </a:xfrm>
-          <a:prstGeom prst="rect">
-            <a:avLst/>
-          </a:prstGeom>
-          <a:noFill/>
-          <a:ln>
-            <a:noFill/>
-          </a:ln>
-        </p:spPr>
-        <p:txBody>
-          <a:bodyPr anchorCtr="0" anchor="t" bIns="0" lIns="0" spcFirstLastPara="1" rIns="0" wrap="square" tIns="0">
-            <a:spAutoFit/>
-          </a:bodyPr>
-          <a:lstStyle/>
-          <a:p>
-            <a:pPr indent="0" lvl="0" marL="0" marR="0" rtl="0" algn="l">
-              <a:lnSpc>
-                <a:spcPct val="100000"/>
-              </a:lnSpc>
-              <a:spcBef>
-                <a:spcPts val="0"/>
-              </a:spcBef>
-              <a:spcAft>
-                <a:spcPts val="0"/>
-              </a:spcAft>
-              <a:buClr>
-                <a:srgbClr val="000000"/>
-              </a:buClr>
-              <a:buSzPts val="1500"/>
-              <a:buFont typeface="Arial"/>
-              <a:buNone/>
-            </a:pPr>
-            <a:r>
-              <a:rPr b="0" i="1" lang="en-US" sz="1500" u="none" cap="none" strike="noStrike">
-                <a:solidFill>
-                  <a:srgbClr val="334055"/>
-                </a:solidFill>
-                <a:latin typeface="Calibri"/>
-                <a:ea typeface="Calibri"/>
-                <a:cs typeface="Calibri"/>
-                <a:sym typeface="Calibri"/>
-              </a:rPr>
-              <a:t>clientUDP_données.py — réception haut débit des signaux capteurs</a:t>
-            </a:r>
-            <a:endParaRPr b="0" i="0" sz="1400" u="none" cap="none" strike="noStrike">
-              <a:solidFill>
-                <a:srgbClr val="000000"/>
-              </a:solidFill>
-              <a:latin typeface="Arial"/>
-              <a:ea typeface="Arial"/>
-              <a:cs typeface="Arial"/>
-              <a:sym typeface="Arial"/>
-            </a:endParaRPr>
-          </a:p>
-        </p:txBody>
-      </p:sp>
-      <p:sp>
-        <p:nvSpPr>
-          <p:cNvPr id="388" name="Google Shape;388;p17"/>
-          <p:cNvSpPr txBox="1"/>
-          <p:nvPr/>
-        </p:nvSpPr>
-        <p:spPr>
-          <a:xfrm>
-            <a:off x="640080" y="2194560"/>
-            <a:ext cx="10972800" cy="4206240"/>
-          </a:xfrm>
-          <a:prstGeom prst="rect">
-            <a:avLst/>
-          </a:prstGeom>
-          <a:noFill/>
-          <a:ln>
-            <a:noFill/>
-          </a:ln>
-        </p:spPr>
-        <p:txBody>
-          <a:bodyPr anchorCtr="0" anchor="t" bIns="0" lIns="0" spcFirstLastPara="1" rIns="0" wrap="square" tIns="0">
-            <a:spAutoFit/>
-          </a:bodyPr>
-          <a:lstStyle/>
-          <a:p>
-            <a:pPr indent="0" lvl="0" marL="0" marR="0" rtl="0" algn="l">
-              <a:lnSpc>
-                <a:spcPct val="135000"/>
-              </a:lnSpc>
-              <a:spcBef>
-                <a:spcPts val="0"/>
-              </a:spcBef>
-              <a:spcAft>
-                <a:spcPts val="0"/>
-              </a:spcAft>
-              <a:buClr>
-                <a:srgbClr val="000000"/>
-              </a:buClr>
-              <a:buSzPts val="1500"/>
-              <a:buFont typeface="Arial"/>
-              <a:buNone/>
-            </a:pPr>
-            <a:r>
-              <a:rPr b="1" i="0" lang="en-US" sz="1500" u="none" cap="none" strike="noStrike">
-                <a:solidFill>
-                  <a:srgbClr val="8B5CF6"/>
-                </a:solidFill>
-                <a:latin typeface="Calibri"/>
-                <a:ea typeface="Calibri"/>
-                <a:cs typeface="Calibri"/>
-                <a:sym typeface="Calibri"/>
-              </a:rPr>
-              <a:t>● </a:t>
-            </a:r>
-            <a:r>
-              <a:rPr b="0" i="0" lang="en-US" sz="1500" u="none" cap="none" strike="noStrike">
-                <a:solidFill>
-                  <a:srgbClr val="334055"/>
-                </a:solidFill>
-                <a:latin typeface="Calibri"/>
-                <a:ea typeface="Calibri"/>
-                <a:cs typeface="Calibri"/>
-                <a:sym typeface="Calibri"/>
-              </a:rPr>
-              <a:t>Buffer UDP agrandi à 8 Mo pour éviter les pertes à haute fréquence</a:t>
-            </a:r>
-            <a:endParaRPr b="0" i="0" sz="1400" u="none" cap="none" strike="noStrike">
-              <a:solidFill>
-                <a:srgbClr val="000000"/>
-              </a:solidFill>
-              <a:latin typeface="Arial"/>
-              <a:ea typeface="Arial"/>
-              <a:cs typeface="Arial"/>
-              <a:sym typeface="Arial"/>
-            </a:endParaRPr>
-          </a:p>
-          <a:p>
-            <a:pPr indent="0" lvl="0" marL="0" marR="0" rtl="0" algn="l">
-              <a:lnSpc>
-                <a:spcPct val="135000"/>
-              </a:lnSpc>
-              <a:spcBef>
-                <a:spcPts val="0"/>
-              </a:spcBef>
-              <a:spcAft>
-                <a:spcPts val="0"/>
-              </a:spcAft>
-              <a:buClr>
-                <a:srgbClr val="000000"/>
-              </a:buClr>
-              <a:buSzPts val="1500"/>
-              <a:buFont typeface="Arial"/>
-              <a:buNone/>
-            </a:pPr>
-            <a:r>
-              <a:rPr b="1" i="0" lang="en-US" sz="1500" u="none" cap="none" strike="noStrike">
-                <a:solidFill>
-                  <a:srgbClr val="8B5CF6"/>
-                </a:solidFill>
-                <a:latin typeface="Calibri"/>
-                <a:ea typeface="Calibri"/>
-                <a:cs typeface="Calibri"/>
-                <a:sym typeface="Calibri"/>
-              </a:rPr>
-              <a:t>● </a:t>
-            </a:r>
-            <a:r>
-              <a:rPr b="0" i="0" lang="en-US" sz="1500" u="none" cap="none" strike="noStrike">
-                <a:solidFill>
-                  <a:srgbClr val="334055"/>
-                </a:solidFill>
-                <a:latin typeface="Calibri"/>
-                <a:ea typeface="Calibri"/>
-                <a:cs typeface="Calibri"/>
-                <a:sym typeface="Calibri"/>
-              </a:rPr>
-              <a:t>Lit l'identifiant de session courant depuis le fichier maître TCP</a:t>
-            </a:r>
-            <a:endParaRPr b="0" i="0" sz="1400" u="none" cap="none" strike="noStrike">
-              <a:solidFill>
-                <a:srgbClr val="000000"/>
-              </a:solidFill>
-              <a:latin typeface="Arial"/>
-              <a:ea typeface="Arial"/>
-              <a:cs typeface="Arial"/>
-              <a:sym typeface="Arial"/>
-            </a:endParaRPr>
-          </a:p>
-          <a:p>
-            <a:pPr indent="0" lvl="0" marL="0" marR="0" rtl="0" algn="l">
-              <a:lnSpc>
-                <a:spcPct val="135000"/>
-              </a:lnSpc>
-              <a:spcBef>
-                <a:spcPts val="0"/>
-              </a:spcBef>
-              <a:spcAft>
-                <a:spcPts val="0"/>
-              </a:spcAft>
-              <a:buClr>
-                <a:srgbClr val="000000"/>
-              </a:buClr>
-              <a:buSzPts val="1500"/>
-              <a:buFont typeface="Arial"/>
-              <a:buNone/>
-            </a:pPr>
-            <a:r>
-              <a:rPr b="1" i="0" lang="en-US" sz="1500" u="none" cap="none" strike="noStrike">
-                <a:solidFill>
-                  <a:srgbClr val="8B5CF6"/>
-                </a:solidFill>
-                <a:latin typeface="Calibri"/>
-                <a:ea typeface="Calibri"/>
-                <a:cs typeface="Calibri"/>
-                <a:sym typeface="Calibri"/>
-              </a:rPr>
-              <a:t>● </a:t>
-            </a:r>
-            <a:r>
-              <a:rPr b="0" i="0" lang="en-US" sz="1500" u="none" cap="none" strike="noStrike">
-                <a:solidFill>
-                  <a:srgbClr val="334055"/>
-                </a:solidFill>
-                <a:latin typeface="Calibri"/>
-                <a:ea typeface="Calibri"/>
-                <a:cs typeface="Calibri"/>
-                <a:sym typeface="Calibri"/>
-              </a:rPr>
-              <a:t>Détecte automatiquement le début et la fin d'une capture (timeout 3 s d'inactivité)</a:t>
-            </a:r>
-            <a:endParaRPr b="0" i="0" sz="1400" u="none" cap="none" strike="noStrike">
-              <a:solidFill>
-                <a:srgbClr val="000000"/>
-              </a:solidFill>
-              <a:latin typeface="Arial"/>
-              <a:ea typeface="Arial"/>
-              <a:cs typeface="Arial"/>
-              <a:sym typeface="Arial"/>
-            </a:endParaRPr>
-          </a:p>
-          <a:p>
-            <a:pPr indent="0" lvl="0" marL="0" marR="0" rtl="0" algn="l">
-              <a:lnSpc>
-                <a:spcPct val="135000"/>
-              </a:lnSpc>
-              <a:spcBef>
-                <a:spcPts val="0"/>
-              </a:spcBef>
-              <a:spcAft>
-                <a:spcPts val="0"/>
-              </a:spcAft>
-              <a:buClr>
-                <a:srgbClr val="000000"/>
-              </a:buClr>
-              <a:buSzPts val="1500"/>
-              <a:buFont typeface="Arial"/>
-              <a:buNone/>
-            </a:pPr>
-            <a:r>
-              <a:rPr b="1" i="0" lang="en-US" sz="1500" u="none" cap="none" strike="noStrike">
-                <a:solidFill>
-                  <a:srgbClr val="8B5CF6"/>
-                </a:solidFill>
-                <a:latin typeface="Calibri"/>
-                <a:ea typeface="Calibri"/>
-                <a:cs typeface="Calibri"/>
-                <a:sym typeface="Calibri"/>
-              </a:rPr>
-              <a:t>● </a:t>
-            </a:r>
-            <a:r>
-              <a:rPr b="0" i="0" lang="en-US" sz="1500" u="none" cap="none" strike="noStrike">
-                <a:solidFill>
-                  <a:srgbClr val="334055"/>
-                </a:solidFill>
-                <a:latin typeface="Calibri"/>
-                <a:ea typeface="Calibri"/>
-                <a:cs typeface="Calibri"/>
-                <a:sym typeface="Calibri"/>
-              </a:rPr>
-              <a:t>Parse 2 formats de trames : SOUND,ts,amp1,amp2,…  et  VIB,ts,VX,VY,…,HZZ</a:t>
-            </a:r>
-            <a:endParaRPr b="0" i="0" sz="1400" u="none" cap="none" strike="noStrike">
-              <a:solidFill>
-                <a:srgbClr val="000000"/>
-              </a:solidFill>
-              <a:latin typeface="Arial"/>
-              <a:ea typeface="Arial"/>
-              <a:cs typeface="Arial"/>
-              <a:sym typeface="Arial"/>
-            </a:endParaRPr>
-          </a:p>
-          <a:p>
-            <a:pPr indent="0" lvl="0" marL="0" marR="0" rtl="0" algn="l">
-              <a:lnSpc>
-                <a:spcPct val="135000"/>
-              </a:lnSpc>
-              <a:spcBef>
-                <a:spcPts val="0"/>
-              </a:spcBef>
-              <a:spcAft>
-                <a:spcPts val="0"/>
-              </a:spcAft>
-              <a:buClr>
-                <a:srgbClr val="000000"/>
-              </a:buClr>
-              <a:buSzPts val="1500"/>
-              <a:buFont typeface="Arial"/>
-              <a:buNone/>
-            </a:pPr>
-            <a:r>
-              <a:rPr b="1" i="0" lang="en-US" sz="1500" u="none" cap="none" strike="noStrike">
-                <a:solidFill>
-                  <a:srgbClr val="8B5CF6"/>
-                </a:solidFill>
-                <a:latin typeface="Calibri"/>
-                <a:ea typeface="Calibri"/>
-                <a:cs typeface="Calibri"/>
-                <a:sym typeface="Calibri"/>
-              </a:rPr>
-              <a:t>● </a:t>
-            </a:r>
-            <a:r>
-              <a:rPr b="0" i="0" lang="en-US" sz="1500" u="none" cap="none" strike="noStrike">
-                <a:solidFill>
-                  <a:srgbClr val="334055"/>
-                </a:solidFill>
-                <a:latin typeface="Calibri"/>
-                <a:ea typeface="Calibri"/>
-                <a:cs typeface="Calibri"/>
-                <a:sym typeface="Calibri"/>
-              </a:rPr>
-              <a:t>Trames VIB strictement contrôlées : 15 champs exacts sinon rejet (défense en profondeur)</a:t>
-            </a:r>
-            <a:endParaRPr b="0" i="0" sz="1400" u="none" cap="none" strike="noStrike">
-              <a:solidFill>
-                <a:srgbClr val="000000"/>
-              </a:solidFill>
-              <a:latin typeface="Arial"/>
-              <a:ea typeface="Arial"/>
-              <a:cs typeface="Arial"/>
-              <a:sym typeface="Arial"/>
-            </a:endParaRPr>
-          </a:p>
-          <a:p>
-            <a:pPr indent="0" lvl="0" marL="0" marR="0" rtl="0" algn="l">
-              <a:lnSpc>
-                <a:spcPct val="135000"/>
-              </a:lnSpc>
-              <a:spcBef>
-                <a:spcPts val="0"/>
-              </a:spcBef>
-              <a:spcAft>
-                <a:spcPts val="0"/>
-              </a:spcAft>
-              <a:buClr>
-                <a:srgbClr val="000000"/>
-              </a:buClr>
-              <a:buSzPts val="1500"/>
-              <a:buFont typeface="Arial"/>
-              <a:buNone/>
-            </a:pPr>
-            <a:r>
-              <a:rPr b="1" i="0" lang="en-US" sz="1500" u="none" cap="none" strike="noStrike">
-                <a:solidFill>
-                  <a:srgbClr val="8B5CF6"/>
-                </a:solidFill>
-                <a:latin typeface="Calibri"/>
-                <a:ea typeface="Calibri"/>
-                <a:cs typeface="Calibri"/>
-                <a:sym typeface="Calibri"/>
-              </a:rPr>
-              <a:t>● </a:t>
-            </a:r>
-            <a:r>
-              <a:rPr b="0" i="0" lang="en-US" sz="1500" u="none" cap="none" strike="noStrike">
-                <a:solidFill>
-                  <a:srgbClr val="334055"/>
-                </a:solidFill>
-                <a:latin typeface="Calibri"/>
-                <a:ea typeface="Calibri"/>
-                <a:cs typeface="Calibri"/>
-                <a:sym typeface="Calibri"/>
-              </a:rPr>
-              <a:t>Reconstruction des timestamps son à partir de la fréquence d'échantillonnage déclarée</a:t>
-            </a:r>
-            <a:endParaRPr b="0" i="0" sz="1400" u="none" cap="none" strike="noStrike">
-              <a:solidFill>
-                <a:srgbClr val="000000"/>
-              </a:solidFill>
-              <a:latin typeface="Arial"/>
-              <a:ea typeface="Arial"/>
-              <a:cs typeface="Arial"/>
-              <a:sym typeface="Arial"/>
-            </a:endParaRPr>
-          </a:p>
-          <a:p>
-            <a:pPr indent="0" lvl="0" marL="0" marR="0" rtl="0" algn="l">
-              <a:lnSpc>
-                <a:spcPct val="135000"/>
-              </a:lnSpc>
-              <a:spcBef>
-                <a:spcPts val="0"/>
-              </a:spcBef>
-              <a:spcAft>
-                <a:spcPts val="0"/>
-              </a:spcAft>
-              <a:buClr>
-                <a:srgbClr val="000000"/>
-              </a:buClr>
-              <a:buSzPts val="1500"/>
-              <a:buFont typeface="Arial"/>
-              <a:buNone/>
-            </a:pPr>
-            <a:r>
-              <a:rPr b="1" i="0" lang="en-US" sz="1500" u="none" cap="none" strike="noStrike">
-                <a:solidFill>
-                  <a:srgbClr val="8B5CF6"/>
-                </a:solidFill>
-                <a:latin typeface="Calibri"/>
-                <a:ea typeface="Calibri"/>
-                <a:cs typeface="Calibri"/>
-                <a:sym typeface="Calibri"/>
-              </a:rPr>
-              <a:t>● </a:t>
-            </a:r>
-            <a:r>
-              <a:rPr b="0" i="0" lang="en-US" sz="1500" u="none" cap="none" strike="noStrike">
-                <a:solidFill>
-                  <a:srgbClr val="334055"/>
-                </a:solidFill>
-                <a:latin typeface="Calibri"/>
-                <a:ea typeface="Calibri"/>
-                <a:cs typeface="Calibri"/>
-                <a:sym typeface="Calibri"/>
-              </a:rPr>
-              <a:t>Estimation de la fréquence effective + taux de perte affichés en fin de capture</a:t>
             </a:r>
             <a:endParaRPr b="0" i="0" sz="1400" u="none" cap="none" strike="noStrike">
               <a:solidFill>
@@ -27879,7 +27959,7 @@
                 <a:cs typeface="Calibri"/>
                 <a:sym typeface="Calibri"/>
               </a:rPr>
-              <a:t>02 / 29</a:t>
+              <a:t>02 / 31</a:t>
             </a:r>
             <a:endParaRPr b="0" i="0" sz="1400" u="none" cap="none" strike="noStrike">
               <a:solidFill>
@@ -28968,6 +29048,810 @@
 </file>
 
 <file path=ppt/slides/slide20.xml><?xml version="1.0" encoding="utf-8"?>
+<p:sld xmlns:a="http://schemas.openxmlformats.org/drawingml/2006/main" xmlns:r="http://schemas.openxmlformats.org/officeDocument/2006/relationships" xmlns:mc="http://schemas.openxmlformats.org/markup-compatibility/2006" xmlns:mv="urn:schemas-microsoft-com:mac:vml" xmlns:p="http://schemas.openxmlformats.org/presentationml/2006/main" xmlns:c="http://schemas.openxmlformats.org/drawingml/2006/chart" xmlns:dgm="http://schemas.openxmlformats.org/drawingml/2006/diagram" xmlns:o="urn:schemas-microsoft-com:office:office" xmlns:v="urn:schemas-microsoft-com:vml" xmlns:pvml="urn:schemas-microsoft-com:office:powerpoint" xmlns:com="http://schemas.openxmlformats.org/drawingml/2006/compatibility" xmlns:p14="http://schemas.microsoft.com/office/powerpoint/2010/main" xmlns:p15="http://schemas.microsoft.com/office/powerpoint/2012/main" xmlns:ahyp="http://schemas.microsoft.com/office/drawing/2018/hyperlinkcolor">
+  <p:cSld>
+    <p:spTree>
+      <p:nvGrpSpPr>
+        <p:cNvPr id="381" name="Shape 381"/>
+        <p:cNvGrpSpPr/>
+        <p:nvPr/>
+      </p:nvGrpSpPr>
+      <p:grpSpPr>
+        <a:xfrm>
+          <a:off x="0" y="0"/>
+          <a:ext cx="0" cy="0"/>
+          <a:chOff x="0" y="0"/>
+          <a:chExt cx="0" cy="0"/>
+        </a:xfrm>
+      </p:grpSpPr>
+      <p:sp>
+        <p:nvSpPr>
+          <p:cNvPr id="382" name="Google Shape;382;p17"/>
+          <p:cNvSpPr/>
+          <p:nvPr/>
+        </p:nvSpPr>
+        <p:spPr>
+          <a:xfrm>
+            <a:off x="0" y="0"/>
+            <a:ext cx="12191695" cy="6858000"/>
+          </a:xfrm>
+          <a:prstGeom prst="rect">
+            <a:avLst/>
+          </a:prstGeom>
+          <a:solidFill>
+            <a:srgbClr val="FAFAFC"/>
+          </a:solidFill>
+          <a:ln>
+            <a:noFill/>
+          </a:ln>
+        </p:spPr>
+        <p:txBody>
+          <a:bodyPr anchorCtr="0" anchor="ctr" bIns="45700" lIns="91425" spcFirstLastPara="1" rIns="91425" wrap="square" tIns="45700">
+            <a:noAutofit/>
+          </a:bodyPr>
+          <a:lstStyle/>
+          <a:p>
+            <a:pPr indent="0" lvl="0" marL="0" marR="0" rtl="0" algn="ctr">
+              <a:lnSpc>
+                <a:spcPct val="100000"/>
+              </a:lnSpc>
+              <a:spcBef>
+                <a:spcPts val="0"/>
+              </a:spcBef>
+              <a:spcAft>
+                <a:spcPts val="0"/>
+              </a:spcAft>
+              <a:buClr>
+                <a:srgbClr val="000000"/>
+              </a:buClr>
+              <a:buSzPts val="1800"/>
+              <a:buFont typeface="Arial"/>
+              <a:buNone/>
+            </a:pPr>
+            <a:r>
+              <a:t/>
+            </a:r>
+            <a:endParaRPr b="0" i="0" sz="1800" u="none" cap="none" strike="noStrike">
+              <a:solidFill>
+                <a:schemeClr val="dk1"/>
+              </a:solidFill>
+              <a:latin typeface="Calibri"/>
+              <a:ea typeface="Calibri"/>
+              <a:cs typeface="Calibri"/>
+              <a:sym typeface="Calibri"/>
+            </a:endParaRPr>
+          </a:p>
+        </p:txBody>
+      </p:sp>
+      <p:sp>
+        <p:nvSpPr>
+          <p:cNvPr id="383" name="Google Shape;383;p17"/>
+          <p:cNvSpPr/>
+          <p:nvPr/>
+        </p:nvSpPr>
+        <p:spPr>
+          <a:xfrm>
+            <a:off x="502920" y="530352"/>
+            <a:ext cx="228600" cy="228600"/>
+          </a:xfrm>
+          <a:prstGeom prst="ellipse">
+            <a:avLst/>
+          </a:prstGeom>
+          <a:solidFill>
+            <a:srgbClr val="8B5CF6"/>
+          </a:solidFill>
+          <a:ln>
+            <a:noFill/>
+          </a:ln>
+          <a:effectLst>
+            <a:outerShdw blurRad="40000" rotWithShape="0" dir="5400000" dist="23000">
+              <a:srgbClr val="000000">
+                <a:alpha val="34901"/>
+              </a:srgbClr>
+            </a:outerShdw>
+          </a:effectLst>
+        </p:spPr>
+        <p:txBody>
+          <a:bodyPr anchorCtr="0" anchor="ctr" bIns="45700" lIns="91425" spcFirstLastPara="1" rIns="91425" wrap="square" tIns="45700">
+            <a:noAutofit/>
+          </a:bodyPr>
+          <a:lstStyle/>
+          <a:p>
+            <a:pPr indent="0" lvl="0" marL="0" marR="0" rtl="0" algn="ctr">
+              <a:lnSpc>
+                <a:spcPct val="100000"/>
+              </a:lnSpc>
+              <a:spcBef>
+                <a:spcPts val="0"/>
+              </a:spcBef>
+              <a:spcAft>
+                <a:spcPts val="0"/>
+              </a:spcAft>
+              <a:buClr>
+                <a:srgbClr val="000000"/>
+              </a:buClr>
+              <a:buSzPts val="1800"/>
+              <a:buFont typeface="Arial"/>
+              <a:buNone/>
+            </a:pPr>
+            <a:r>
+              <a:t/>
+            </a:r>
+            <a:endParaRPr b="0" i="0" sz="1800" u="none" cap="none" strike="noStrike">
+              <a:solidFill>
+                <a:schemeClr val="dk1"/>
+              </a:solidFill>
+              <a:latin typeface="Calibri"/>
+              <a:ea typeface="Calibri"/>
+              <a:cs typeface="Calibri"/>
+              <a:sym typeface="Calibri"/>
+            </a:endParaRPr>
+          </a:p>
+        </p:txBody>
+      </p:sp>
+      <p:sp>
+        <p:nvSpPr>
+          <p:cNvPr id="384" name="Google Shape;384;p17"/>
+          <p:cNvSpPr txBox="1"/>
+          <p:nvPr/>
+        </p:nvSpPr>
+        <p:spPr>
+          <a:xfrm>
+            <a:off x="914400" y="384048"/>
+            <a:ext cx="10972800" cy="640080"/>
+          </a:xfrm>
+          <a:prstGeom prst="rect">
+            <a:avLst/>
+          </a:prstGeom>
+          <a:noFill/>
+          <a:ln>
+            <a:noFill/>
+          </a:ln>
+        </p:spPr>
+        <p:txBody>
+          <a:bodyPr anchorCtr="0" anchor="t" bIns="0" lIns="0" spcFirstLastPara="1" rIns="0" wrap="square" tIns="0">
+            <a:spAutoFit/>
+          </a:bodyPr>
+          <a:lstStyle/>
+          <a:p>
+            <a:pPr indent="0" lvl="0" marL="0" marR="0" rtl="0" algn="l">
+              <a:lnSpc>
+                <a:spcPct val="100000"/>
+              </a:lnSpc>
+              <a:spcBef>
+                <a:spcPts val="0"/>
+              </a:spcBef>
+              <a:spcAft>
+                <a:spcPts val="0"/>
+              </a:spcAft>
+              <a:buClr>
+                <a:srgbClr val="000000"/>
+              </a:buClr>
+              <a:buSzPts val="3000"/>
+              <a:buFont typeface="Arial"/>
+              <a:buNone/>
+            </a:pPr>
+            <a:r>
+              <a:rPr b="1" i="0" lang="en-US" sz="3000" u="none" cap="none" strike="noStrike">
+                <a:solidFill>
+                  <a:srgbClr val="1E293B"/>
+                </a:solidFill>
+                <a:latin typeface="Calibri"/>
+                <a:ea typeface="Calibri"/>
+                <a:cs typeface="Calibri"/>
+                <a:sym typeface="Calibri"/>
+              </a:rPr>
+              <a:t>Client UDP de données  ·  port 9091</a:t>
+            </a:r>
+            <a:endParaRPr b="0" i="0" sz="1400" u="none" cap="none" strike="noStrike">
+              <a:solidFill>
+                <a:srgbClr val="000000"/>
+              </a:solidFill>
+              <a:latin typeface="Arial"/>
+              <a:ea typeface="Arial"/>
+              <a:cs typeface="Arial"/>
+              <a:sym typeface="Arial"/>
+            </a:endParaRPr>
+          </a:p>
+        </p:txBody>
+      </p:sp>
+      <p:sp>
+        <p:nvSpPr>
+          <p:cNvPr id="385" name="Google Shape;385;p17"/>
+          <p:cNvSpPr txBox="1"/>
+          <p:nvPr/>
+        </p:nvSpPr>
+        <p:spPr>
+          <a:xfrm>
+            <a:off x="10911535" y="6492240"/>
+            <a:ext cx="914400" cy="274320"/>
+          </a:xfrm>
+          <a:prstGeom prst="rect">
+            <a:avLst/>
+          </a:prstGeom>
+          <a:noFill/>
+          <a:ln>
+            <a:noFill/>
+          </a:ln>
+        </p:spPr>
+        <p:txBody>
+          <a:bodyPr anchorCtr="0" anchor="t" bIns="0" lIns="0" spcFirstLastPara="1" rIns="0" wrap="square" tIns="0">
+            <a:spAutoFit/>
+          </a:bodyPr>
+          <a:lstStyle/>
+          <a:p>
+            <a:pPr indent="0" lvl="0" marL="0" marR="0" rtl="0" algn="r">
+              <a:lnSpc>
+                <a:spcPct val="100000"/>
+              </a:lnSpc>
+              <a:spcBef>
+                <a:spcPts val="0"/>
+              </a:spcBef>
+              <a:spcAft>
+                <a:spcPts val="0"/>
+              </a:spcAft>
+              <a:buClr>
+                <a:srgbClr val="000000"/>
+              </a:buClr>
+              <a:buSzPts val="1000"/>
+              <a:buFont typeface="Arial"/>
+              <a:buNone/>
+            </a:pPr>
+            <a:r>
+              <a:rPr b="0" i="0" lang="en-US" sz="1000" u="none" cap="none" strike="noStrike">
+                <a:solidFill>
+                  <a:srgbClr val="64748B"/>
+                </a:solidFill>
+                <a:latin typeface="Calibri"/>
+                <a:ea typeface="Calibri"/>
+                <a:cs typeface="Calibri"/>
+                <a:sym typeface="Calibri"/>
+              </a:rPr>
+              <a:t>20 / 31</a:t>
+            </a:r>
+            <a:endParaRPr b="0" i="0" sz="1400" u="none" cap="none" strike="noStrike">
+              <a:solidFill>
+                <a:srgbClr val="000000"/>
+              </a:solidFill>
+              <a:latin typeface="Arial"/>
+              <a:ea typeface="Arial"/>
+              <a:cs typeface="Arial"/>
+              <a:sym typeface="Arial"/>
+            </a:endParaRPr>
+          </a:p>
+        </p:txBody>
+      </p:sp>
+      <p:sp>
+        <p:nvSpPr>
+          <p:cNvPr id="386" name="Google Shape;386;p17"/>
+          <p:cNvSpPr txBox="1"/>
+          <p:nvPr/>
+        </p:nvSpPr>
+        <p:spPr>
+          <a:xfrm>
+            <a:off x="502920" y="6492240"/>
+            <a:ext cx="8229600" cy="274320"/>
+          </a:xfrm>
+          <a:prstGeom prst="rect">
+            <a:avLst/>
+          </a:prstGeom>
+          <a:noFill/>
+          <a:ln>
+            <a:noFill/>
+          </a:ln>
+        </p:spPr>
+        <p:txBody>
+          <a:bodyPr anchorCtr="0" anchor="t" bIns="0" lIns="0" spcFirstLastPara="1" rIns="0" wrap="square" tIns="0">
+            <a:spAutoFit/>
+          </a:bodyPr>
+          <a:lstStyle/>
+          <a:p>
+            <a:pPr indent="0" lvl="0" marL="0" marR="0" rtl="0" algn="l">
+              <a:lnSpc>
+                <a:spcPct val="100000"/>
+              </a:lnSpc>
+              <a:spcBef>
+                <a:spcPts val="0"/>
+              </a:spcBef>
+              <a:spcAft>
+                <a:spcPts val="0"/>
+              </a:spcAft>
+              <a:buClr>
+                <a:srgbClr val="000000"/>
+              </a:buClr>
+              <a:buSzPts val="1000"/>
+              <a:buFont typeface="Arial"/>
+              <a:buNone/>
+            </a:pPr>
+            <a:r>
+              <a:rPr b="0" i="0" lang="en-US" sz="1000" u="none" cap="none" strike="noStrike">
+                <a:solidFill>
+                  <a:srgbClr val="64748B"/>
+                </a:solidFill>
+                <a:latin typeface="Calibri"/>
+                <a:ea typeface="Calibri"/>
+                <a:cs typeface="Calibri"/>
+                <a:sym typeface="Calibri"/>
+              </a:rPr>
+              <a:t>BTS CIEL 2026  ·  Soutenance U6  ·  Noa Orand</a:t>
+            </a:r>
+            <a:endParaRPr b="0" i="0" sz="1400" u="none" cap="none" strike="noStrike">
+              <a:solidFill>
+                <a:srgbClr val="000000"/>
+              </a:solidFill>
+              <a:latin typeface="Arial"/>
+              <a:ea typeface="Arial"/>
+              <a:cs typeface="Arial"/>
+              <a:sym typeface="Arial"/>
+            </a:endParaRPr>
+          </a:p>
+        </p:txBody>
+      </p:sp>
+      <p:sp>
+        <p:nvSpPr>
+          <p:cNvPr id="387" name="Google Shape;387;p17"/>
+          <p:cNvSpPr txBox="1"/>
+          <p:nvPr/>
+        </p:nvSpPr>
+        <p:spPr>
+          <a:xfrm>
+            <a:off x="640080" y="1554480"/>
+            <a:ext cx="10972800" cy="457200"/>
+          </a:xfrm>
+          <a:prstGeom prst="rect">
+            <a:avLst/>
+          </a:prstGeom>
+          <a:noFill/>
+          <a:ln>
+            <a:noFill/>
+          </a:ln>
+        </p:spPr>
+        <p:txBody>
+          <a:bodyPr anchorCtr="0" anchor="t" bIns="0" lIns="0" spcFirstLastPara="1" rIns="0" wrap="square" tIns="0">
+            <a:spAutoFit/>
+          </a:bodyPr>
+          <a:lstStyle/>
+          <a:p>
+            <a:pPr indent="0" lvl="0" marL="0" marR="0" rtl="0" algn="l">
+              <a:lnSpc>
+                <a:spcPct val="100000"/>
+              </a:lnSpc>
+              <a:spcBef>
+                <a:spcPts val="0"/>
+              </a:spcBef>
+              <a:spcAft>
+                <a:spcPts val="0"/>
+              </a:spcAft>
+              <a:buClr>
+                <a:srgbClr val="000000"/>
+              </a:buClr>
+              <a:buSzPts val="1500"/>
+              <a:buFont typeface="Arial"/>
+              <a:buNone/>
+            </a:pPr>
+            <a:r>
+              <a:rPr b="0" i="1" lang="en-US" sz="1500" u="none" cap="none" strike="noStrike">
+                <a:solidFill>
+                  <a:srgbClr val="334055"/>
+                </a:solidFill>
+                <a:latin typeface="Calibri"/>
+                <a:ea typeface="Calibri"/>
+                <a:cs typeface="Calibri"/>
+                <a:sym typeface="Calibri"/>
+              </a:rPr>
+              <a:t>clientUDP_données.py — réception haut débit des signaux capteurs</a:t>
+            </a:r>
+            <a:endParaRPr b="0" i="0" sz="1400" u="none" cap="none" strike="noStrike">
+              <a:solidFill>
+                <a:srgbClr val="000000"/>
+              </a:solidFill>
+              <a:latin typeface="Arial"/>
+              <a:ea typeface="Arial"/>
+              <a:cs typeface="Arial"/>
+              <a:sym typeface="Arial"/>
+            </a:endParaRPr>
+          </a:p>
+        </p:txBody>
+      </p:sp>
+      <p:sp>
+        <p:nvSpPr>
+          <p:cNvPr id="388" name="Google Shape;388;p17"/>
+          <p:cNvSpPr txBox="1"/>
+          <p:nvPr/>
+        </p:nvSpPr>
+        <p:spPr>
+          <a:xfrm>
+            <a:off x="640080" y="2194560"/>
+            <a:ext cx="10972800" cy="4206240"/>
+          </a:xfrm>
+          <a:prstGeom prst="rect">
+            <a:avLst/>
+          </a:prstGeom>
+          <a:noFill/>
+          <a:ln>
+            <a:noFill/>
+          </a:ln>
+        </p:spPr>
+        <p:txBody>
+          <a:bodyPr anchorCtr="0" anchor="t" bIns="0" lIns="0" spcFirstLastPara="1" rIns="0" wrap="square" tIns="0">
+            <a:spAutoFit/>
+          </a:bodyPr>
+          <a:lstStyle/>
+          <a:p>
+            <a:pPr indent="0" lvl="0" marL="0" marR="0" rtl="0" algn="l">
+              <a:lnSpc>
+                <a:spcPct val="135000"/>
+              </a:lnSpc>
+              <a:spcBef>
+                <a:spcPts val="0"/>
+              </a:spcBef>
+              <a:spcAft>
+                <a:spcPts val="0"/>
+              </a:spcAft>
+              <a:buClr>
+                <a:srgbClr val="000000"/>
+              </a:buClr>
+              <a:buSzPts val="1500"/>
+              <a:buFont typeface="Arial"/>
+              <a:buNone/>
+            </a:pPr>
+            <a:r>
+              <a:rPr b="1" i="0" lang="en-US" sz="1500" u="none" cap="none" strike="noStrike">
+                <a:solidFill>
+                  <a:srgbClr val="8B5CF6"/>
+                </a:solidFill>
+                <a:latin typeface="Calibri"/>
+                <a:ea typeface="Calibri"/>
+                <a:cs typeface="Calibri"/>
+                <a:sym typeface="Calibri"/>
+              </a:rPr>
+              <a:t>● </a:t>
+            </a:r>
+            <a:r>
+              <a:rPr b="0" i="0" lang="en-US" sz="1500" u="none" cap="none" strike="noStrike">
+                <a:solidFill>
+                  <a:srgbClr val="334055"/>
+                </a:solidFill>
+                <a:latin typeface="Calibri"/>
+                <a:ea typeface="Calibri"/>
+                <a:cs typeface="Calibri"/>
+                <a:sym typeface="Calibri"/>
+              </a:rPr>
+              <a:t>Buffer UDP agrandi à 8 Mo pour éviter les pertes à haute fréquence</a:t>
+            </a:r>
+            <a:endParaRPr b="0" i="0" sz="1400" u="none" cap="none" strike="noStrike">
+              <a:solidFill>
+                <a:srgbClr val="000000"/>
+              </a:solidFill>
+              <a:latin typeface="Arial"/>
+              <a:ea typeface="Arial"/>
+              <a:cs typeface="Arial"/>
+              <a:sym typeface="Arial"/>
+            </a:endParaRPr>
+          </a:p>
+          <a:p>
+            <a:pPr indent="0" lvl="0" marL="0" marR="0" rtl="0" algn="l">
+              <a:lnSpc>
+                <a:spcPct val="135000"/>
+              </a:lnSpc>
+              <a:spcBef>
+                <a:spcPts val="0"/>
+              </a:spcBef>
+              <a:spcAft>
+                <a:spcPts val="0"/>
+              </a:spcAft>
+              <a:buClr>
+                <a:srgbClr val="000000"/>
+              </a:buClr>
+              <a:buSzPts val="1500"/>
+              <a:buFont typeface="Arial"/>
+              <a:buNone/>
+            </a:pPr>
+            <a:r>
+              <a:rPr b="1" i="0" lang="en-US" sz="1500" u="none" cap="none" strike="noStrike">
+                <a:solidFill>
+                  <a:srgbClr val="8B5CF6"/>
+                </a:solidFill>
+                <a:latin typeface="Calibri"/>
+                <a:ea typeface="Calibri"/>
+                <a:cs typeface="Calibri"/>
+                <a:sym typeface="Calibri"/>
+              </a:rPr>
+              <a:t>● </a:t>
+            </a:r>
+            <a:r>
+              <a:rPr b="0" i="0" lang="en-US" sz="1500" u="none" cap="none" strike="noStrike">
+                <a:solidFill>
+                  <a:srgbClr val="334055"/>
+                </a:solidFill>
+                <a:latin typeface="Calibri"/>
+                <a:ea typeface="Calibri"/>
+                <a:cs typeface="Calibri"/>
+                <a:sym typeface="Calibri"/>
+              </a:rPr>
+              <a:t>Lit l'identifiant de session courant depuis le fichier maître TCP</a:t>
+            </a:r>
+            <a:endParaRPr b="0" i="0" sz="1400" u="none" cap="none" strike="noStrike">
+              <a:solidFill>
+                <a:srgbClr val="000000"/>
+              </a:solidFill>
+              <a:latin typeface="Arial"/>
+              <a:ea typeface="Arial"/>
+              <a:cs typeface="Arial"/>
+              <a:sym typeface="Arial"/>
+            </a:endParaRPr>
+          </a:p>
+          <a:p>
+            <a:pPr indent="0" lvl="0" marL="0" marR="0" rtl="0" algn="l">
+              <a:lnSpc>
+                <a:spcPct val="135000"/>
+              </a:lnSpc>
+              <a:spcBef>
+                <a:spcPts val="0"/>
+              </a:spcBef>
+              <a:spcAft>
+                <a:spcPts val="0"/>
+              </a:spcAft>
+              <a:buClr>
+                <a:srgbClr val="000000"/>
+              </a:buClr>
+              <a:buSzPts val="1500"/>
+              <a:buFont typeface="Arial"/>
+              <a:buNone/>
+            </a:pPr>
+            <a:r>
+              <a:rPr b="1" i="0" lang="en-US" sz="1500" u="none" cap="none" strike="noStrike">
+                <a:solidFill>
+                  <a:srgbClr val="8B5CF6"/>
+                </a:solidFill>
+                <a:latin typeface="Calibri"/>
+                <a:ea typeface="Calibri"/>
+                <a:cs typeface="Calibri"/>
+                <a:sym typeface="Calibri"/>
+              </a:rPr>
+              <a:t>● </a:t>
+            </a:r>
+            <a:r>
+              <a:rPr b="0" i="0" lang="en-US" sz="1500" u="none" cap="none" strike="noStrike">
+                <a:solidFill>
+                  <a:srgbClr val="334055"/>
+                </a:solidFill>
+                <a:latin typeface="Calibri"/>
+                <a:ea typeface="Calibri"/>
+                <a:cs typeface="Calibri"/>
+                <a:sym typeface="Calibri"/>
+              </a:rPr>
+              <a:t>Détecte automatiquement le début et la fin d'une capture (timeout 3 s d'inactivité)</a:t>
+            </a:r>
+            <a:endParaRPr b="0" i="0" sz="1400" u="none" cap="none" strike="noStrike">
+              <a:solidFill>
+                <a:srgbClr val="000000"/>
+              </a:solidFill>
+              <a:latin typeface="Arial"/>
+              <a:ea typeface="Arial"/>
+              <a:cs typeface="Arial"/>
+              <a:sym typeface="Arial"/>
+            </a:endParaRPr>
+          </a:p>
+          <a:p>
+            <a:pPr indent="0" lvl="0" marL="0" marR="0" rtl="0" algn="l">
+              <a:lnSpc>
+                <a:spcPct val="135000"/>
+              </a:lnSpc>
+              <a:spcBef>
+                <a:spcPts val="0"/>
+              </a:spcBef>
+              <a:spcAft>
+                <a:spcPts val="0"/>
+              </a:spcAft>
+              <a:buClr>
+                <a:srgbClr val="000000"/>
+              </a:buClr>
+              <a:buSzPts val="1500"/>
+              <a:buFont typeface="Arial"/>
+              <a:buNone/>
+            </a:pPr>
+            <a:r>
+              <a:rPr b="1" i="0" lang="en-US" sz="1500" u="none" cap="none" strike="noStrike">
+                <a:solidFill>
+                  <a:srgbClr val="8B5CF6"/>
+                </a:solidFill>
+                <a:latin typeface="Calibri"/>
+                <a:ea typeface="Calibri"/>
+                <a:cs typeface="Calibri"/>
+                <a:sym typeface="Calibri"/>
+              </a:rPr>
+              <a:t>● </a:t>
+            </a:r>
+            <a:r>
+              <a:rPr b="0" i="0" lang="en-US" sz="1500" u="none" cap="none" strike="noStrike">
+                <a:solidFill>
+                  <a:srgbClr val="334055"/>
+                </a:solidFill>
+                <a:latin typeface="Calibri"/>
+                <a:ea typeface="Calibri"/>
+                <a:cs typeface="Calibri"/>
+                <a:sym typeface="Calibri"/>
+              </a:rPr>
+              <a:t>Parse 2 formats de trames : SOUND,ts,amp1,amp2,…  et  VIB,ts,VX,VY,…,HZZ</a:t>
+            </a:r>
+            <a:endParaRPr b="0" i="0" sz="1400" u="none" cap="none" strike="noStrike">
+              <a:solidFill>
+                <a:srgbClr val="000000"/>
+              </a:solidFill>
+              <a:latin typeface="Arial"/>
+              <a:ea typeface="Arial"/>
+              <a:cs typeface="Arial"/>
+              <a:sym typeface="Arial"/>
+            </a:endParaRPr>
+          </a:p>
+          <a:p>
+            <a:pPr indent="0" lvl="0" marL="0" marR="0" rtl="0" algn="l">
+              <a:lnSpc>
+                <a:spcPct val="135000"/>
+              </a:lnSpc>
+              <a:spcBef>
+                <a:spcPts val="0"/>
+              </a:spcBef>
+              <a:spcAft>
+                <a:spcPts val="0"/>
+              </a:spcAft>
+              <a:buClr>
+                <a:srgbClr val="000000"/>
+              </a:buClr>
+              <a:buSzPts val="1500"/>
+              <a:buFont typeface="Arial"/>
+              <a:buNone/>
+            </a:pPr>
+            <a:r>
+              <a:rPr b="1" i="0" lang="en-US" sz="1500" u="none" cap="none" strike="noStrike">
+                <a:solidFill>
+                  <a:srgbClr val="8B5CF6"/>
+                </a:solidFill>
+                <a:latin typeface="Calibri"/>
+                <a:ea typeface="Calibri"/>
+                <a:cs typeface="Calibri"/>
+                <a:sym typeface="Calibri"/>
+              </a:rPr>
+              <a:t>● </a:t>
+            </a:r>
+            <a:r>
+              <a:rPr b="0" i="0" lang="en-US" sz="1500" u="none" cap="none" strike="noStrike">
+                <a:solidFill>
+                  <a:srgbClr val="334055"/>
+                </a:solidFill>
+                <a:latin typeface="Calibri"/>
+                <a:ea typeface="Calibri"/>
+                <a:cs typeface="Calibri"/>
+                <a:sym typeface="Calibri"/>
+              </a:rPr>
+              <a:t>Trames VIB strictement contrôlées : 15 champs exacts sinon rejet (défense en profondeur)</a:t>
+            </a:r>
+            <a:endParaRPr b="0" i="0" sz="1400" u="none" cap="none" strike="noStrike">
+              <a:solidFill>
+                <a:srgbClr val="000000"/>
+              </a:solidFill>
+              <a:latin typeface="Arial"/>
+              <a:ea typeface="Arial"/>
+              <a:cs typeface="Arial"/>
+              <a:sym typeface="Arial"/>
+            </a:endParaRPr>
+          </a:p>
+          <a:p>
+            <a:pPr indent="0" lvl="0" marL="0" marR="0" rtl="0" algn="l">
+              <a:lnSpc>
+                <a:spcPct val="135000"/>
+              </a:lnSpc>
+              <a:spcBef>
+                <a:spcPts val="0"/>
+              </a:spcBef>
+              <a:spcAft>
+                <a:spcPts val="0"/>
+              </a:spcAft>
+              <a:buClr>
+                <a:srgbClr val="000000"/>
+              </a:buClr>
+              <a:buSzPts val="1500"/>
+              <a:buFont typeface="Arial"/>
+              <a:buNone/>
+            </a:pPr>
+            <a:r>
+              <a:rPr b="1" i="0" lang="en-US" sz="1500" u="none" cap="none" strike="noStrike">
+                <a:solidFill>
+                  <a:srgbClr val="8B5CF6"/>
+                </a:solidFill>
+                <a:latin typeface="Calibri"/>
+                <a:ea typeface="Calibri"/>
+                <a:cs typeface="Calibri"/>
+                <a:sym typeface="Calibri"/>
+              </a:rPr>
+              <a:t>● </a:t>
+            </a:r>
+            <a:r>
+              <a:rPr b="0" i="0" lang="en-US" sz="1500" u="none" cap="none" strike="noStrike">
+                <a:solidFill>
+                  <a:srgbClr val="334055"/>
+                </a:solidFill>
+                <a:latin typeface="Calibri"/>
+                <a:ea typeface="Calibri"/>
+                <a:cs typeface="Calibri"/>
+                <a:sym typeface="Calibri"/>
+              </a:rPr>
+              <a:t>Reconstruction des timestamps son à partir de la fréquence d'échantillonnage déclarée</a:t>
+            </a:r>
+            <a:endParaRPr b="0" i="0" sz="1400" u="none" cap="none" strike="noStrike">
+              <a:solidFill>
+                <a:srgbClr val="000000"/>
+              </a:solidFill>
+              <a:latin typeface="Arial"/>
+              <a:ea typeface="Arial"/>
+              <a:cs typeface="Arial"/>
+              <a:sym typeface="Arial"/>
+            </a:endParaRPr>
+          </a:p>
+          <a:p>
+            <a:pPr indent="0" lvl="0" marL="0" marR="0" rtl="0" algn="l">
+              <a:lnSpc>
+                <a:spcPct val="135000"/>
+              </a:lnSpc>
+              <a:spcBef>
+                <a:spcPts val="0"/>
+              </a:spcBef>
+              <a:spcAft>
+                <a:spcPts val="0"/>
+              </a:spcAft>
+              <a:buClr>
+                <a:srgbClr val="000000"/>
+              </a:buClr>
+              <a:buSzPts val="1500"/>
+              <a:buFont typeface="Arial"/>
+              <a:buNone/>
+            </a:pPr>
+            <a:r>
+              <a:rPr b="1" i="0" lang="en-US" sz="1500" u="none" cap="none" strike="noStrike">
+                <a:solidFill>
+                  <a:srgbClr val="8B5CF6"/>
+                </a:solidFill>
+                <a:latin typeface="Calibri"/>
+                <a:ea typeface="Calibri"/>
+                <a:cs typeface="Calibri"/>
+                <a:sym typeface="Calibri"/>
+              </a:rPr>
+              <a:t>● </a:t>
+            </a:r>
+            <a:r>
+              <a:rPr b="0" i="0" lang="en-US" sz="1500" u="none" cap="none" strike="noStrike">
+                <a:solidFill>
+                  <a:srgbClr val="334055"/>
+                </a:solidFill>
+                <a:latin typeface="Calibri"/>
+                <a:ea typeface="Calibri"/>
+                <a:cs typeface="Calibri"/>
+                <a:sym typeface="Calibri"/>
+              </a:rPr>
+              <a:t>Estimation de la fréquence effective + taux de perte affichés en fin de capture</a:t>
+            </a:r>
+            <a:endParaRPr b="0" i="0" sz="1400" u="none" cap="none" strike="noStrike">
+              <a:solidFill>
+                <a:srgbClr val="000000"/>
+              </a:solidFill>
+              <a:latin typeface="Arial"/>
+              <a:ea typeface="Arial"/>
+              <a:cs typeface="Arial"/>
+              <a:sym typeface="Arial"/>
+            </a:endParaRPr>
+          </a:p>
+        </p:txBody>
+      </p:sp>
+    </p:spTree>
+  </p:cSld>
+  <p:clrMapOvr>
+    <a:masterClrMapping/>
+  </p:clrMapOvr>
+</p:sld>
+</file>
+
+<file path=ppt/slides/slide21.xml><?xml version="1.0" encoding="utf-8"?>
 <p:sld xmlns:a="http://schemas.openxmlformats.org/drawingml/2006/main" xmlns:r="http://schemas.openxmlformats.org/officeDocument/2006/relationships" xmlns:mc="http://schemas.openxmlformats.org/markup-compatibility/2006" xmlns:mv="urn:schemas-microsoft-com:mac:vml" xmlns:p="http://schemas.openxmlformats.org/presentationml/2006/main" xmlns:c="http://schemas.openxmlformats.org/drawingml/2006/chart" xmlns:dgm="http://schemas.openxmlformats.org/drawingml/2006/diagram" xmlns:o="urn:schemas-microsoft-com:office:office" xmlns:v="urn:schemas-microsoft-com:vml" xmlns:pvml="urn:schemas-microsoft-com:office:powerpoint" xmlns:com="http://schemas.openxmlformats.org/drawingml/2006/compatibility" xmlns:p14="http://schemas.microsoft.com/office/powerpoint/2010/main" xmlns:p15="http://schemas.microsoft.com/office/powerpoint/2012/main" xmlns:ahyp="http://schemas.microsoft.com/office/drawing/2018/hyperlinkcolor">
   <p:cSld>
     <p:spTree>
@@ -29227,7 +30111,7 @@
                 <a:cs typeface="Calibri"/>
                 <a:sym typeface="Calibri"/>
               </a:rPr>
-              <a:t>20 / 29</a:t>
+              <a:t>21 / 31</a:t>
             </a:r>
             <a:endParaRPr b="0" i="0" sz="1400" u="none" cap="none" strike="noStrike">
               <a:solidFill>
@@ -31181,7 +32065,7 @@
 </p:sld>
 </file>
 
-<file path=ppt/slides/slide21.xml><?xml version="1.0" encoding="utf-8"?>
+<file path=ppt/slides/slide22.xml><?xml version="1.0" encoding="utf-8"?>
 <p:sld xmlns:a="http://schemas.openxmlformats.org/drawingml/2006/main" xmlns:r="http://schemas.openxmlformats.org/officeDocument/2006/relationships" xmlns:mc="http://schemas.openxmlformats.org/markup-compatibility/2006" xmlns:mv="urn:schemas-microsoft-com:mac:vml" xmlns:p="http://schemas.openxmlformats.org/presentationml/2006/main" xmlns:c="http://schemas.openxmlformats.org/drawingml/2006/chart" xmlns:dgm="http://schemas.openxmlformats.org/drawingml/2006/diagram" xmlns:o="urn:schemas-microsoft-com:office:office" xmlns:v="urn:schemas-microsoft-com:vml" xmlns:pvml="urn:schemas-microsoft-com:office:powerpoint" xmlns:com="http://schemas.openxmlformats.org/drawingml/2006/compatibility" xmlns:p14="http://schemas.microsoft.com/office/powerpoint/2010/main" xmlns:p15="http://schemas.microsoft.com/office/powerpoint/2012/main" xmlns:ahyp="http://schemas.microsoft.com/office/drawing/2018/hyperlinkcolor">
   <p:cSld>
     <p:spTree>
@@ -31441,7 +32325,7 @@
                 <a:cs typeface="Calibri"/>
                 <a:sym typeface="Calibri"/>
               </a:rPr>
-              <a:t>21 / 29</a:t>
+              <a:t>22 / 31</a:t>
             </a:r>
             <a:endParaRPr b="0" i="0" sz="1400" u="none" cap="none" strike="noStrike">
               <a:solidFill>
@@ -32651,7 +33535,7 @@
 </p:sld>
 </file>
 
-<file path=ppt/slides/slide22.xml><?xml version="1.0" encoding="utf-8"?>
+<file path=ppt/slides/slide23.xml><?xml version="1.0" encoding="utf-8"?>
 <p:sld xmlns:a="http://schemas.openxmlformats.org/drawingml/2006/main" xmlns:r="http://schemas.openxmlformats.org/officeDocument/2006/relationships" xmlns:mc="http://schemas.openxmlformats.org/markup-compatibility/2006" xmlns:mv="urn:schemas-microsoft-com:mac:vml" xmlns:p="http://schemas.openxmlformats.org/presentationml/2006/main" xmlns:c="http://schemas.openxmlformats.org/drawingml/2006/chart" xmlns:dgm="http://schemas.openxmlformats.org/drawingml/2006/diagram" xmlns:o="urn:schemas-microsoft-com:office:office" xmlns:v="urn:schemas-microsoft-com:vml" xmlns:pvml="urn:schemas-microsoft-com:office:powerpoint" xmlns:com="http://schemas.openxmlformats.org/drawingml/2006/compatibility" xmlns:p14="http://schemas.microsoft.com/office/powerpoint/2010/main" xmlns:p15="http://schemas.microsoft.com/office/powerpoint/2012/main" xmlns:ahyp="http://schemas.microsoft.com/office/drawing/2018/hyperlinkcolor">
   <p:cSld>
     <p:spTree>
@@ -32911,7 +33795,7 @@
                 <a:cs typeface="Calibri"/>
                 <a:sym typeface="Calibri"/>
               </a:rPr>
-              <a:t>22 / 29</a:t>
+              <a:t>23 / 31</a:t>
             </a:r>
             <a:endParaRPr b="0" i="0" sz="1400" u="none" cap="none" strike="noStrike">
               <a:solidFill>
@@ -33092,7 +33976,877 @@
 </p:sld>
 </file>
 
-<file path=ppt/slides/slide23.xml><?xml version="1.0" encoding="utf-8"?>
+<file path=ppt/slides/slide24.xml><?xml version="1.0" encoding="utf-8"?>
+<p:sld xmlns:a="http://schemas.openxmlformats.org/drawingml/2006/main" xmlns:r="http://schemas.openxmlformats.org/officeDocument/2006/relationships" xmlns:mc="http://schemas.openxmlformats.org/markup-compatibility/2006" xmlns:mv="urn:schemas-microsoft-com:mac:vml" xmlns:p="http://schemas.openxmlformats.org/presentationml/2006/main" xmlns:c="http://schemas.openxmlformats.org/drawingml/2006/chart" xmlns:dgm="http://schemas.openxmlformats.org/drawingml/2006/diagram" xmlns:o="urn:schemas-microsoft-com:office:office" xmlns:v="urn:schemas-microsoft-com:vml" xmlns:pvml="urn:schemas-microsoft-com:office:powerpoint" xmlns:com="http://schemas.openxmlformats.org/drawingml/2006/compatibility" xmlns:p14="http://schemas.microsoft.com/office/powerpoint/2010/main" xmlns:p15="http://schemas.microsoft.com/office/powerpoint/2012/main" xmlns:ahyp="http://schemas.microsoft.com/office/drawing/2018/hyperlinkcolor">
+  <p:cSld>
+    <p:spTree>
+      <p:nvGrpSpPr>
+        <p:cNvPr id="322" name="Shape 322"/>
+        <p:cNvGrpSpPr/>
+        <p:nvPr/>
+      </p:nvGrpSpPr>
+      <p:grpSpPr>
+        <a:xfrm>
+          <a:off x="0" y="0"/>
+          <a:ext cx="0" cy="0"/>
+          <a:chOff x="0" y="0"/>
+          <a:chExt cx="0" cy="0"/>
+        </a:xfrm>
+      </p:grpSpPr>
+      <p:sp>
+        <p:nvSpPr>
+          <p:cNvPr id="323" name="Google Shape;323;p13"/>
+          <p:cNvSpPr/>
+          <p:nvPr/>
+        </p:nvSpPr>
+        <p:spPr>
+          <a:xfrm>
+            <a:off x="0" y="0"/>
+            <a:ext cx="12191695" cy="6858000"/>
+          </a:xfrm>
+          <a:prstGeom prst="rect">
+            <a:avLst/>
+          </a:prstGeom>
+          <a:solidFill>
+            <a:srgbClr val="FAFAFC"/>
+          </a:solidFill>
+          <a:ln>
+            <a:noFill/>
+          </a:ln>
+        </p:spPr>
+        <p:txBody>
+          <a:bodyPr anchorCtr="0" anchor="ctr" bIns="45700" lIns="91425" spcFirstLastPara="1" rIns="91425" wrap="square" tIns="45700">
+            <a:noAutofit/>
+          </a:bodyPr>
+          <a:lstStyle/>
+          <a:p>
+            <a:pPr indent="0" lvl="0" marL="0" marR="0" rtl="0" algn="ctr">
+              <a:lnSpc>
+                <a:spcPct val="100000"/>
+              </a:lnSpc>
+              <a:spcBef>
+                <a:spcPts val="0"/>
+              </a:spcBef>
+              <a:spcAft>
+                <a:spcPts val="0"/>
+              </a:spcAft>
+              <a:buClr>
+                <a:srgbClr val="000000"/>
+              </a:buClr>
+              <a:buSzPts val="1800"/>
+              <a:buFont typeface="Arial"/>
+              <a:buNone/>
+            </a:pPr>
+            <a:r>
+              <a:t/>
+            </a:r>
+            <a:endParaRPr b="0" i="0" sz="1800" u="none" cap="none" strike="noStrike">
+              <a:solidFill>
+                <a:schemeClr val="dk1"/>
+              </a:solidFill>
+              <a:latin typeface="Calibri"/>
+              <a:ea typeface="Calibri"/>
+              <a:cs typeface="Calibri"/>
+              <a:sym typeface="Calibri"/>
+            </a:endParaRPr>
+          </a:p>
+        </p:txBody>
+      </p:sp>
+      <p:sp>
+        <p:nvSpPr>
+          <p:cNvPr id="324" name="Google Shape;324;p13"/>
+          <p:cNvSpPr/>
+          <p:nvPr/>
+        </p:nvSpPr>
+        <p:spPr>
+          <a:xfrm>
+            <a:off x="502920" y="530352"/>
+            <a:ext cx="228600" cy="228600"/>
+          </a:xfrm>
+          <a:prstGeom prst="ellipse">
+            <a:avLst/>
+          </a:prstGeom>
+          <a:solidFill>
+            <a:srgbClr val="8B5CF6"/>
+          </a:solidFill>
+          <a:ln>
+            <a:noFill/>
+          </a:ln>
+          <a:effectLst>
+            <a:outerShdw blurRad="40000" rotWithShape="0" dir="5400000" dist="23000">
+              <a:srgbClr val="000000">
+                <a:alpha val="34901"/>
+              </a:srgbClr>
+            </a:outerShdw>
+          </a:effectLst>
+        </p:spPr>
+        <p:txBody>
+          <a:bodyPr anchorCtr="0" anchor="ctr" bIns="45700" lIns="91425" spcFirstLastPara="1" rIns="91425" wrap="square" tIns="45700">
+            <a:noAutofit/>
+          </a:bodyPr>
+          <a:lstStyle/>
+          <a:p>
+            <a:pPr indent="0" lvl="0" marL="0" marR="0" rtl="0" algn="ctr">
+              <a:lnSpc>
+                <a:spcPct val="100000"/>
+              </a:lnSpc>
+              <a:spcBef>
+                <a:spcPts val="0"/>
+              </a:spcBef>
+              <a:spcAft>
+                <a:spcPts val="0"/>
+              </a:spcAft>
+              <a:buClr>
+                <a:srgbClr val="000000"/>
+              </a:buClr>
+              <a:buSzPts val="1800"/>
+              <a:buFont typeface="Arial"/>
+              <a:buNone/>
+            </a:pPr>
+            <a:r>
+              <a:t/>
+            </a:r>
+            <a:endParaRPr b="0" i="0" sz="1800" u="none" cap="none" strike="noStrike">
+              <a:solidFill>
+                <a:schemeClr val="dk1"/>
+              </a:solidFill>
+              <a:latin typeface="Calibri"/>
+              <a:ea typeface="Calibri"/>
+              <a:cs typeface="Calibri"/>
+              <a:sym typeface="Calibri"/>
+            </a:endParaRPr>
+          </a:p>
+        </p:txBody>
+      </p:sp>
+      <p:sp>
+        <p:nvSpPr>
+          <p:cNvPr id="325" name="Google Shape;325;p13"/>
+          <p:cNvSpPr txBox="1"/>
+          <p:nvPr/>
+        </p:nvSpPr>
+        <p:spPr>
+          <a:xfrm>
+            <a:off x="914400" y="384048"/>
+            <a:ext cx="10972800" cy="640080"/>
+          </a:xfrm>
+          <a:prstGeom prst="rect">
+            <a:avLst/>
+          </a:prstGeom>
+          <a:noFill/>
+          <a:ln>
+            <a:noFill/>
+          </a:ln>
+        </p:spPr>
+        <p:txBody>
+          <a:bodyPr anchorCtr="0" anchor="t" bIns="0" lIns="0" spcFirstLastPara="1" rIns="0" wrap="square" tIns="0">
+            <a:spAutoFit/>
+          </a:bodyPr>
+          <a:lstStyle/>
+          <a:p>
+            <a:pPr indent="0" lvl="0" marL="0" marR="0" rtl="0" algn="l">
+              <a:lnSpc>
+                <a:spcPct val="100000"/>
+              </a:lnSpc>
+              <a:spcBef>
+                <a:spcPts val="0"/>
+              </a:spcBef>
+              <a:spcAft>
+                <a:spcPts val="0"/>
+              </a:spcAft>
+              <a:buClr>
+                <a:srgbClr val="000000"/>
+              </a:buClr>
+              <a:buSzPts val="3000"/>
+              <a:buFont typeface="Arial"/>
+              <a:buNone/>
+            </a:pPr>
+            <a:r>
+              <a:rPr b="1" i="0" lang="en-US" sz="3000" u="none" cap="none" strike="noStrike">
+                <a:solidFill>
+                  <a:srgbClr val="1E293B"/>
+                </a:solidFill>
+                <a:latin typeface="Calibri"/>
+                <a:ea typeface="Calibri"/>
+                <a:cs typeface="Calibri"/>
+                <a:sym typeface="Calibri"/>
+              </a:rPr>
+              <a:t>Transformée de Fourier — créer le mel-spectrogramme</a:t>
+            </a:r>
+            <a:endParaRPr b="0" i="0" sz="1400" u="none" cap="none" strike="noStrike">
+              <a:solidFill>
+                <a:srgbClr val="000000"/>
+              </a:solidFill>
+              <a:latin typeface="Arial"/>
+              <a:ea typeface="Arial"/>
+              <a:cs typeface="Arial"/>
+              <a:sym typeface="Arial"/>
+            </a:endParaRPr>
+          </a:p>
+        </p:txBody>
+      </p:sp>
+      <p:sp>
+        <p:nvSpPr>
+          <p:cNvPr id="326" name="Google Shape;326;p13"/>
+          <p:cNvSpPr txBox="1"/>
+          <p:nvPr/>
+        </p:nvSpPr>
+        <p:spPr>
+          <a:xfrm>
+            <a:off x="10911535" y="6492240"/>
+            <a:ext cx="914400" cy="274320"/>
+          </a:xfrm>
+          <a:prstGeom prst="rect">
+            <a:avLst/>
+          </a:prstGeom>
+          <a:noFill/>
+          <a:ln>
+            <a:noFill/>
+          </a:ln>
+        </p:spPr>
+        <p:txBody>
+          <a:bodyPr anchorCtr="0" anchor="t" bIns="0" lIns="0" spcFirstLastPara="1" rIns="0" wrap="square" tIns="0">
+            <a:spAutoFit/>
+          </a:bodyPr>
+          <a:lstStyle/>
+          <a:p>
+            <a:pPr indent="0" lvl="0" marL="0" marR="0" rtl="0" algn="r">
+              <a:lnSpc>
+                <a:spcPct val="100000"/>
+              </a:lnSpc>
+              <a:spcBef>
+                <a:spcPts val="0"/>
+              </a:spcBef>
+              <a:spcAft>
+                <a:spcPts val="0"/>
+              </a:spcAft>
+              <a:buClr>
+                <a:srgbClr val="000000"/>
+              </a:buClr>
+              <a:buSzPts val="1000"/>
+              <a:buFont typeface="Arial"/>
+              <a:buNone/>
+            </a:pPr>
+            <a:r>
+              <a:rPr b="0" i="0" lang="en-US" sz="1000" u="none" cap="none" strike="noStrike">
+                <a:solidFill>
+                  <a:srgbClr val="64748B"/>
+                </a:solidFill>
+                <a:latin typeface="Calibri"/>
+                <a:ea typeface="Calibri"/>
+                <a:cs typeface="Calibri"/>
+                <a:sym typeface="Calibri"/>
+              </a:rPr>
+              <a:t>24 / 31</a:t>
+            </a:r>
+            <a:endParaRPr b="0" i="0" sz="1400" u="none" cap="none" strike="noStrike">
+              <a:solidFill>
+                <a:srgbClr val="000000"/>
+              </a:solidFill>
+              <a:latin typeface="Arial"/>
+              <a:ea typeface="Arial"/>
+              <a:cs typeface="Arial"/>
+              <a:sym typeface="Arial"/>
+            </a:endParaRPr>
+          </a:p>
+        </p:txBody>
+      </p:sp>
+      <p:sp>
+        <p:nvSpPr>
+          <p:cNvPr id="327" name="Google Shape;327;p13"/>
+          <p:cNvSpPr txBox="1"/>
+          <p:nvPr/>
+        </p:nvSpPr>
+        <p:spPr>
+          <a:xfrm>
+            <a:off x="502920" y="6492240"/>
+            <a:ext cx="8229600" cy="274320"/>
+          </a:xfrm>
+          <a:prstGeom prst="rect">
+            <a:avLst/>
+          </a:prstGeom>
+          <a:noFill/>
+          <a:ln>
+            <a:noFill/>
+          </a:ln>
+        </p:spPr>
+        <p:txBody>
+          <a:bodyPr anchorCtr="0" anchor="t" bIns="0" lIns="0" spcFirstLastPara="1" rIns="0" wrap="square" tIns="0">
+            <a:spAutoFit/>
+          </a:bodyPr>
+          <a:lstStyle/>
+          <a:p>
+            <a:pPr indent="0" lvl="0" marL="0" marR="0" rtl="0" algn="l">
+              <a:lnSpc>
+                <a:spcPct val="100000"/>
+              </a:lnSpc>
+              <a:spcBef>
+                <a:spcPts val="0"/>
+              </a:spcBef>
+              <a:spcAft>
+                <a:spcPts val="0"/>
+              </a:spcAft>
+              <a:buClr>
+                <a:srgbClr val="000000"/>
+              </a:buClr>
+              <a:buSzPts val="1000"/>
+              <a:buFont typeface="Arial"/>
+              <a:buNone/>
+            </a:pPr>
+            <a:r>
+              <a:rPr b="0" i="0" lang="en-US" sz="1000" u="none" cap="none" strike="noStrike">
+                <a:solidFill>
+                  <a:srgbClr val="64748B"/>
+                </a:solidFill>
+                <a:latin typeface="Calibri"/>
+                <a:ea typeface="Calibri"/>
+                <a:cs typeface="Calibri"/>
+                <a:sym typeface="Calibri"/>
+              </a:rPr>
+              <a:t>BTS CIEL 2026  ·  Soutenance U6  ·  Noa Orand</a:t>
+            </a:r>
+            <a:endParaRPr b="0" i="0" sz="1400" u="none" cap="none" strike="noStrike">
+              <a:solidFill>
+                <a:srgbClr val="000000"/>
+              </a:solidFill>
+              <a:latin typeface="Arial"/>
+              <a:ea typeface="Arial"/>
+              <a:cs typeface="Arial"/>
+              <a:sym typeface="Arial"/>
+            </a:endParaRPr>
+          </a:p>
+        </p:txBody>
+      </p:sp>
+      <p:sp>
+        <p:nvSpPr>
+          <p:cNvPr id="328" name="Google Shape;328;p13"/>
+          <p:cNvSpPr txBox="1"/>
+          <p:nvPr/>
+        </p:nvSpPr>
+        <p:spPr>
+          <a:xfrm>
+            <a:off x="640080" y="1554480"/>
+            <a:ext cx="10972800" cy="457200"/>
+          </a:xfrm>
+          <a:prstGeom prst="rect">
+            <a:avLst/>
+          </a:prstGeom>
+          <a:noFill/>
+          <a:ln>
+            <a:noFill/>
+          </a:ln>
+        </p:spPr>
+        <p:txBody>
+          <a:bodyPr anchorCtr="0" anchor="t" bIns="0" lIns="0" spcFirstLastPara="1" rIns="0" wrap="square" tIns="0">
+            <a:spAutoFit/>
+          </a:bodyPr>
+          <a:lstStyle/>
+          <a:p>
+            <a:pPr indent="0" lvl="0" marL="0" marR="0" rtl="0" algn="l">
+              <a:lnSpc>
+                <a:spcPct val="100000"/>
+              </a:lnSpc>
+              <a:spcBef>
+                <a:spcPts val="0"/>
+              </a:spcBef>
+              <a:spcAft>
+                <a:spcPts val="0"/>
+              </a:spcAft>
+              <a:buClr>
+                <a:srgbClr val="000000"/>
+              </a:buClr>
+              <a:buSzPts val="1700"/>
+              <a:buFont typeface="Arial"/>
+              <a:buNone/>
+            </a:pPr>
+            <a:r>
+              <a:rPr b="0" i="1" lang="en-US" sz="1700" u="none" cap="none" strike="noStrike">
+                <a:solidFill>
+                  <a:srgbClr val="8B5CF6"/>
+                </a:solidFill>
+                <a:latin typeface="Calibri"/>
+                <a:ea typeface="Calibri"/>
+                <a:cs typeface="Calibri"/>
+                <a:sym typeface="Calibri"/>
+              </a:rPr>
+              <a:t>Passer du domaine temporel au domaine fréquentiel pour révéler le contenu spectral.</a:t>
+            </a:r>
+            <a:endParaRPr b="0" i="0" sz="1400" u="none" cap="none" strike="noStrike">
+              <a:solidFill>
+                <a:srgbClr val="000000"/>
+              </a:solidFill>
+              <a:latin typeface="Arial"/>
+              <a:ea typeface="Arial"/>
+              <a:cs typeface="Arial"/>
+              <a:sym typeface="Arial"/>
+            </a:endParaRPr>
+          </a:p>
+        </p:txBody>
+      </p:sp>
+      <p:sp>
+        <p:nvSpPr>
+          <p:cNvPr id="329" name="Google Shape;329;p13"/>
+          <p:cNvSpPr txBox="1"/>
+          <p:nvPr/>
+        </p:nvSpPr>
+        <p:spPr>
+          <a:xfrm>
+            <a:off x="640080" y="2194560"/>
+            <a:ext cx="10972800" cy="3200400"/>
+          </a:xfrm>
+          <a:prstGeom prst="rect">
+            <a:avLst/>
+          </a:prstGeom>
+          <a:noFill/>
+          <a:ln>
+            <a:noFill/>
+          </a:ln>
+        </p:spPr>
+        <p:txBody>
+          <a:bodyPr anchorCtr="0" anchor="t" bIns="0" lIns="0" spcFirstLastPara="1" rIns="0" wrap="square" tIns="0">
+            <a:spAutoFit/>
+          </a:bodyPr>
+          <a:lstStyle/>
+          <a:p>
+            <a:pPr indent="0" lvl="0" marL="0" marR="0" rtl="0" algn="l">
+              <a:lnSpc>
+                <a:spcPct val="135000"/>
+              </a:lnSpc>
+              <a:spcBef>
+                <a:spcPts val="0"/>
+              </a:spcBef>
+              <a:spcAft>
+                <a:spcPts val="0"/>
+              </a:spcAft>
+              <a:buClr>
+                <a:srgbClr val="000000"/>
+              </a:buClr>
+              <a:buSzPts val="1600"/>
+              <a:buFont typeface="Arial"/>
+              <a:buNone/>
+            </a:pPr>
+            <a:r>
+              <a:rPr b="1" i="0" lang="en-US" sz="1600" u="none" cap="none" strike="noStrike">
+                <a:solidFill>
+                  <a:srgbClr val="8B5CF6"/>
+                </a:solidFill>
+                <a:latin typeface="Calibri"/>
+                <a:ea typeface="Calibri"/>
+                <a:cs typeface="Calibri"/>
+                <a:sym typeface="Calibri"/>
+              </a:rPr>
+              <a:t>● </a:t>
+            </a:r>
+            <a:r>
+              <a:rPr b="0" i="0" lang="en-US" sz="1600" u="none" cap="none" strike="noStrike">
+                <a:solidFill>
+                  <a:srgbClr val="334055"/>
+                </a:solidFill>
+                <a:latin typeface="Calibri"/>
+                <a:ea typeface="Calibri"/>
+                <a:cs typeface="Calibri"/>
+                <a:sym typeface="Calibri"/>
+              </a:rPr>
+              <a:t>La transformée de Fourier décompose un signal en une somme de sinusoïdes : elle donne l'amplitude de chaque fréquence présente.</a:t>
+            </a:r>
+            <a:endParaRPr b="0" i="0" sz="1400" u="none" cap="none" strike="noStrike">
+              <a:solidFill>
+                <a:srgbClr val="000000"/>
+              </a:solidFill>
+              <a:latin typeface="Arial"/>
+              <a:ea typeface="Arial"/>
+              <a:cs typeface="Arial"/>
+              <a:sym typeface="Arial"/>
+            </a:endParaRPr>
+          </a:p>
+          <a:p>
+            <a:pPr indent="0" lvl="0" marL="0" marR="0" rtl="0" algn="l">
+              <a:lnSpc>
+                <a:spcPct val="135000"/>
+              </a:lnSpc>
+              <a:spcBef>
+                <a:spcPts val="0"/>
+              </a:spcBef>
+              <a:spcAft>
+                <a:spcPts val="0"/>
+              </a:spcAft>
+              <a:buClr>
+                <a:srgbClr val="000000"/>
+              </a:buClr>
+              <a:buSzPts val="1600"/>
+              <a:buFont typeface="Arial"/>
+              <a:buNone/>
+            </a:pPr>
+            <a:r>
+              <a:rPr b="1" i="0" lang="en-US" sz="1600" u="none" cap="none" strike="noStrike">
+                <a:solidFill>
+                  <a:srgbClr val="8B5CF6"/>
+                </a:solidFill>
+                <a:latin typeface="Calibri"/>
+                <a:ea typeface="Calibri"/>
+                <a:cs typeface="Calibri"/>
+                <a:sym typeface="Calibri"/>
+              </a:rPr>
+              <a:t>● </a:t>
+            </a:r>
+            <a:r>
+              <a:rPr b="0" i="0" lang="en-US" sz="1600" u="none" cap="none" strike="noStrike">
+                <a:solidFill>
+                  <a:srgbClr val="334055"/>
+                </a:solidFill>
+                <a:latin typeface="Calibri"/>
+                <a:ea typeface="Calibri"/>
+                <a:cs typeface="Calibri"/>
+                <a:sym typeface="Calibri"/>
+              </a:rPr>
+              <a:t>STFT (Fourier à court terme) : la FFT est appliquée sur des fenêtres glissantes → on suit l'évolution du spectre dans le temps (spectrogramme).</a:t>
+            </a:r>
+            <a:endParaRPr b="0" i="0" sz="1400" u="none" cap="none" strike="noStrike">
+              <a:solidFill>
+                <a:srgbClr val="000000"/>
+              </a:solidFill>
+              <a:latin typeface="Arial"/>
+              <a:ea typeface="Arial"/>
+              <a:cs typeface="Arial"/>
+              <a:sym typeface="Arial"/>
+            </a:endParaRPr>
+          </a:p>
+          <a:p>
+            <a:pPr indent="0" lvl="0" marL="0" marR="0" rtl="0" algn="l">
+              <a:lnSpc>
+                <a:spcPct val="135000"/>
+              </a:lnSpc>
+              <a:spcBef>
+                <a:spcPts val="0"/>
+              </a:spcBef>
+              <a:spcAft>
+                <a:spcPts val="0"/>
+              </a:spcAft>
+              <a:buClr>
+                <a:srgbClr val="000000"/>
+              </a:buClr>
+              <a:buSzPts val="1600"/>
+              <a:buFont typeface="Arial"/>
+              <a:buNone/>
+            </a:pPr>
+            <a:r>
+              <a:rPr b="1" i="0" lang="en-US" sz="1600" u="none" cap="none" strike="noStrike">
+                <a:solidFill>
+                  <a:srgbClr val="8B5CF6"/>
+                </a:solidFill>
+                <a:latin typeface="Calibri"/>
+                <a:ea typeface="Calibri"/>
+                <a:cs typeface="Calibri"/>
+                <a:sym typeface="Calibri"/>
+              </a:rPr>
+              <a:t>● </a:t>
+            </a:r>
+            <a:r>
+              <a:rPr b="0" i="0" lang="en-US" sz="1600" u="none" cap="none" strike="noStrike">
+                <a:solidFill>
+                  <a:srgbClr val="334055"/>
+                </a:solidFill>
+                <a:latin typeface="Calibri"/>
+                <a:ea typeface="Calibri"/>
+                <a:cs typeface="Calibri"/>
+                <a:sym typeface="Calibri"/>
+              </a:rPr>
+              <a:t>Échelle de Mel : compression perceptuelle des fréquences, calquée sur l'oreille humaine (plus fine en basses fréquences).</a:t>
+            </a:r>
+            <a:endParaRPr b="0" i="0" sz="1400" u="none" cap="none" strike="noStrike">
+              <a:solidFill>
+                <a:srgbClr val="000000"/>
+              </a:solidFill>
+              <a:latin typeface="Arial"/>
+              <a:ea typeface="Arial"/>
+              <a:cs typeface="Arial"/>
+              <a:sym typeface="Arial"/>
+            </a:endParaRPr>
+          </a:p>
+          <a:p>
+            <a:pPr indent="0" lvl="0" marL="0" marR="0" rtl="0" algn="l">
+              <a:lnSpc>
+                <a:spcPct val="135000"/>
+              </a:lnSpc>
+              <a:spcBef>
+                <a:spcPts val="0"/>
+              </a:spcBef>
+              <a:spcAft>
+                <a:spcPts val="0"/>
+              </a:spcAft>
+              <a:buClr>
+                <a:srgbClr val="000000"/>
+              </a:buClr>
+              <a:buSzPts val="1600"/>
+              <a:buFont typeface="Arial"/>
+              <a:buNone/>
+            </a:pPr>
+            <a:r>
+              <a:rPr b="1" i="0" lang="en-US" sz="1600" u="none" cap="none" strike="noStrike">
+                <a:solidFill>
+                  <a:srgbClr val="8B5CF6"/>
+                </a:solidFill>
+                <a:latin typeface="Calibri"/>
+                <a:ea typeface="Calibri"/>
+                <a:cs typeface="Calibri"/>
+                <a:sym typeface="Calibri"/>
+              </a:rPr>
+              <a:t>● </a:t>
+            </a:r>
+            <a:r>
+              <a:rPr b="0" i="0" lang="en-US" sz="1600" u="none" cap="none" strike="noStrike">
+                <a:solidFill>
+                  <a:srgbClr val="334055"/>
+                </a:solidFill>
+                <a:latin typeface="Calibri"/>
+                <a:ea typeface="Calibri"/>
+                <a:cs typeface="Calibri"/>
+                <a:sym typeface="Calibri"/>
+              </a:rPr>
+              <a:t>Conversion en décibels (log) puis normalisation [0, 1] → une image 2D exploitable par le CNN.</a:t>
+            </a:r>
+            <a:endParaRPr b="0" i="0" sz="1400" u="none" cap="none" strike="noStrike">
+              <a:solidFill>
+                <a:srgbClr val="000000"/>
+              </a:solidFill>
+              <a:latin typeface="Arial"/>
+              <a:ea typeface="Arial"/>
+              <a:cs typeface="Arial"/>
+              <a:sym typeface="Arial"/>
+            </a:endParaRPr>
+          </a:p>
+          <a:p>
+            <a:pPr indent="0" lvl="0" marL="0" marR="0" rtl="0" algn="l">
+              <a:lnSpc>
+                <a:spcPct val="135000"/>
+              </a:lnSpc>
+              <a:spcBef>
+                <a:spcPts val="0"/>
+              </a:spcBef>
+              <a:spcAft>
+                <a:spcPts val="0"/>
+              </a:spcAft>
+              <a:buClr>
+                <a:srgbClr val="000000"/>
+              </a:buClr>
+              <a:buSzPts val="1600"/>
+              <a:buFont typeface="Arial"/>
+              <a:buNone/>
+            </a:pPr>
+            <a:r>
+              <a:rPr b="1" i="0" lang="en-US" sz="1600" u="none" cap="none" strike="noStrike">
+                <a:solidFill>
+                  <a:srgbClr val="8B5CF6"/>
+                </a:solidFill>
+                <a:latin typeface="Calibri"/>
+                <a:ea typeface="Calibri"/>
+                <a:cs typeface="Calibri"/>
+                <a:sym typeface="Calibri"/>
+              </a:rPr>
+              <a:t>● </a:t>
+            </a:r>
+            <a:r>
+              <a:rPr b="0" i="0" lang="en-US" sz="1600" u="none" cap="none" strike="noStrike">
+                <a:solidFill>
+                  <a:srgbClr val="334055"/>
+                </a:solidFill>
+                <a:latin typeface="Calibri"/>
+                <a:ea typeface="Calibri"/>
+                <a:cs typeface="Calibri"/>
+                <a:sym typeface="Calibri"/>
+              </a:rPr>
+              <a:t>Paramètres adaptés à chaque modalité : 64 bandes de Mel pour le son, 32 pour la vibration (n_fft et hop_length réduits).</a:t>
+            </a:r>
+            <a:endParaRPr b="0" i="0" sz="1400" u="none" cap="none" strike="noStrike">
+              <a:solidFill>
+                <a:srgbClr val="000000"/>
+              </a:solidFill>
+              <a:latin typeface="Arial"/>
+              <a:ea typeface="Arial"/>
+              <a:cs typeface="Arial"/>
+              <a:sym typeface="Arial"/>
+            </a:endParaRPr>
+          </a:p>
+        </p:txBody>
+      </p:sp>
+      <p:sp>
+        <p:nvSpPr>
+          <p:cNvPr id="330" name="Google Shape;330;p13"/>
+          <p:cNvSpPr/>
+          <p:nvPr/>
+        </p:nvSpPr>
+        <p:spPr>
+          <a:xfrm>
+            <a:off x="640080" y="5577840"/>
+            <a:ext cx="10972800" cy="868680"/>
+          </a:xfrm>
+          <a:prstGeom prst="roundRect">
+            <a:avLst>
+              <a:gd fmla="val 16667" name="adj"/>
+            </a:avLst>
+          </a:prstGeom>
+          <a:solidFill>
+            <a:srgbClr val="EFE9FE"/>
+          </a:solidFill>
+          <a:ln>
+            <a:noFill/>
+          </a:ln>
+          <a:effectLst>
+            <a:outerShdw blurRad="40000" rotWithShape="0" dir="5400000" dist="23000">
+              <a:srgbClr val="000000">
+                <a:alpha val="34901"/>
+              </a:srgbClr>
+            </a:outerShdw>
+          </a:effectLst>
+        </p:spPr>
+        <p:txBody>
+          <a:bodyPr anchorCtr="0" anchor="ctr" bIns="45700" lIns="91425" spcFirstLastPara="1" rIns="91425" wrap="square" tIns="45700">
+            <a:noAutofit/>
+          </a:bodyPr>
+          <a:lstStyle/>
+          <a:p>
+            <a:pPr indent="0" lvl="0" marL="0" marR="0" rtl="0" algn="ctr">
+              <a:lnSpc>
+                <a:spcPct val="100000"/>
+              </a:lnSpc>
+              <a:spcBef>
+                <a:spcPts val="0"/>
+              </a:spcBef>
+              <a:spcAft>
+                <a:spcPts val="0"/>
+              </a:spcAft>
+              <a:buClr>
+                <a:srgbClr val="000000"/>
+              </a:buClr>
+              <a:buSzPts val="1800"/>
+              <a:buFont typeface="Arial"/>
+              <a:buNone/>
+            </a:pPr>
+            <a:r>
+              <a:t/>
+            </a:r>
+            <a:endParaRPr b="0" i="0" sz="1800" u="none" cap="none" strike="noStrike">
+              <a:solidFill>
+                <a:schemeClr val="dk1"/>
+              </a:solidFill>
+              <a:latin typeface="Calibri"/>
+              <a:ea typeface="Calibri"/>
+              <a:cs typeface="Calibri"/>
+              <a:sym typeface="Calibri"/>
+            </a:endParaRPr>
+          </a:p>
+        </p:txBody>
+      </p:sp>
+      <p:sp>
+        <p:nvSpPr>
+          <p:cNvPr id="331" name="Google Shape;331;p13"/>
+          <p:cNvSpPr txBox="1"/>
+          <p:nvPr/>
+        </p:nvSpPr>
+        <p:spPr>
+          <a:xfrm>
+            <a:off x="822960" y="5852160"/>
+            <a:ext cx="10515600" cy="365760"/>
+          </a:xfrm>
+          <a:prstGeom prst="rect">
+            <a:avLst/>
+          </a:prstGeom>
+          <a:noFill/>
+          <a:ln>
+            <a:noFill/>
+          </a:ln>
+        </p:spPr>
+        <p:txBody>
+          <a:bodyPr anchorCtr="0" anchor="t" bIns="0" lIns="0" spcFirstLastPara="1" rIns="0" wrap="square" tIns="0">
+            <a:spAutoFit/>
+          </a:bodyPr>
+          <a:lstStyle/>
+          <a:p>
+            <a:pPr indent="0" lvl="0" marL="0" marR="0" rtl="0" algn="ctr">
+              <a:lnSpc>
+                <a:spcPct val="100000"/>
+              </a:lnSpc>
+              <a:spcBef>
+                <a:spcPts val="0"/>
+              </a:spcBef>
+              <a:spcAft>
+                <a:spcPts val="0"/>
+              </a:spcAft>
+              <a:buClr>
+                <a:srgbClr val="000000"/>
+              </a:buClr>
+              <a:buSzPts val="1300"/>
+              <a:buFont typeface="Arial"/>
+              <a:buNone/>
+            </a:pPr>
+            <a:r>
+              <a:rPr b="1" i="0" lang="en-US" sz="2400" u="none" cap="none" strike="noStrike">
+                <a:solidFill>
+                  <a:srgbClr val="1E293B"/>
+                </a:solidFill>
+                <a:latin typeface="Calibri"/>
+                <a:ea typeface="Calibri"/>
+                <a:cs typeface="Calibri"/>
+                <a:sym typeface="Calibri"/>
+              </a:rPr>
+              <a:t>X(f) = ∫ x(t) · e</a:t>
+            </a:r>
+            <a:r>
+              <a:rPr b="1" i="0" lang="en-US" sz="1400" baseline="30000" u="none" cap="none" strike="noStrike">
+                <a:solidFill>
+                  <a:srgbClr val="1E293B"/>
+                </a:solidFill>
+                <a:latin typeface="Calibri"/>
+                <a:ea typeface="Calibri"/>
+                <a:cs typeface="Calibri"/>
+                <a:sym typeface="Calibri"/>
+              </a:rPr>
+              <a:t>−2iπft</a:t>
+            </a:r>
+            <a:r>
+              <a:rPr b="1" i="0" lang="en-US" sz="2400" u="none" cap="none" strike="noStrike">
+                <a:solidFill>
+                  <a:srgbClr val="1E293B"/>
+                </a:solidFill>
+                <a:latin typeface="Calibri"/>
+                <a:ea typeface="Calibri"/>
+                <a:cs typeface="Calibri"/>
+                <a:sym typeface="Calibri"/>
+              </a:rPr>
+              <a:t xml:space="preserve"> dt</a:t>
+            </a:r>
+            <a:r>
+              <a:rPr b="0" i="1" lang="en-US" sz="1400" u="none" cap="none" strike="noStrike">
+                <a:solidFill>
+                  <a:srgbClr val="8B5CF6"/>
+                </a:solidFill>
+                <a:latin typeface="Calibri"/>
+                <a:ea typeface="Calibri"/>
+                <a:cs typeface="Calibri"/>
+                <a:sym typeface="Calibri"/>
+              </a:rPr>
+              <a:t xml:space="preserve">      —      appliquée par fenêtres glissantes (STFT)</a:t>
+            </a:r>
+            <a:endParaRPr b="0" i="0" sz="1400" u="none" cap="none" strike="noStrike">
+              <a:solidFill>
+                <a:srgbClr val="000000"/>
+              </a:solidFill>
+              <a:latin typeface="Arial"/>
+              <a:ea typeface="Arial"/>
+              <a:cs typeface="Arial"/>
+              <a:sym typeface="Arial"/>
+            </a:endParaRPr>
+          </a:p>
+        </p:txBody>
+      </p:sp>
+    </p:spTree>
+  </p:cSld>
+  <p:clrMapOvr>
+    <a:masterClrMapping/>
+  </p:clrMapOvr>
+</p:sld>
+</file>
+
+<file path=ppt/slides/slide25.xml><?xml version="1.0" encoding="utf-8"?>
 <p:sld xmlns:a="http://schemas.openxmlformats.org/drawingml/2006/main" xmlns:r="http://schemas.openxmlformats.org/officeDocument/2006/relationships" xmlns:mc="http://schemas.openxmlformats.org/markup-compatibility/2006" xmlns:mv="urn:schemas-microsoft-com:mac:vml" xmlns:p="http://schemas.openxmlformats.org/presentationml/2006/main" xmlns:c="http://schemas.openxmlformats.org/drawingml/2006/chart" xmlns:dgm="http://schemas.openxmlformats.org/drawingml/2006/diagram" xmlns:o="urn:schemas-microsoft-com:office:office" xmlns:v="urn:schemas-microsoft-com:vml" xmlns:pvml="urn:schemas-microsoft-com:office:powerpoint" xmlns:com="http://schemas.openxmlformats.org/drawingml/2006/compatibility" xmlns:p14="http://schemas.microsoft.com/office/powerpoint/2010/main" xmlns:p15="http://schemas.microsoft.com/office/powerpoint/2012/main" xmlns:ahyp="http://schemas.microsoft.com/office/drawing/2018/hyperlinkcolor">
   <p:cSld>
     <p:spTree>
@@ -33352,7 +35106,7 @@
                 <a:cs typeface="Calibri"/>
                 <a:sym typeface="Calibri"/>
               </a:rPr>
-              <a:t>23 / 29</a:t>
+              <a:t>25 / 31</a:t>
             </a:r>
             <a:endParaRPr b="0" i="0" sz="1400" u="none" cap="none" strike="noStrike">
               <a:solidFill>
@@ -35058,7 +36812,7 @@
 </p:sld>
 </file>
 
-<file path=ppt/slides/slide24.xml><?xml version="1.0" encoding="utf-8"?>
+<file path=ppt/slides/slide26.xml><?xml version="1.0" encoding="utf-8"?>
 <p:sld xmlns:a="http://schemas.openxmlformats.org/drawingml/2006/main" xmlns:r="http://schemas.openxmlformats.org/officeDocument/2006/relationships" xmlns:mc="http://schemas.openxmlformats.org/markup-compatibility/2006" xmlns:mv="urn:schemas-microsoft-com:mac:vml" xmlns:p="http://schemas.openxmlformats.org/presentationml/2006/main" xmlns:c="http://schemas.openxmlformats.org/drawingml/2006/chart" xmlns:dgm="http://schemas.openxmlformats.org/drawingml/2006/diagram" xmlns:o="urn:schemas-microsoft-com:office:office" xmlns:v="urn:schemas-microsoft-com:vml" xmlns:pvml="urn:schemas-microsoft-com:office:powerpoint" xmlns:com="http://schemas.openxmlformats.org/drawingml/2006/compatibility" xmlns:p14="http://schemas.microsoft.com/office/powerpoint/2010/main" xmlns:p15="http://schemas.microsoft.com/office/powerpoint/2012/main" xmlns:ahyp="http://schemas.microsoft.com/office/drawing/2018/hyperlinkcolor">
   <p:cSld>
     <p:spTree>
@@ -35318,7 +37072,7 @@
                 <a:cs typeface="Calibri"/>
                 <a:sym typeface="Calibri"/>
               </a:rPr>
-              <a:t>24 / 29</a:t>
+              <a:t>26 / 31</a:t>
             </a:r>
             <a:endParaRPr b="0" i="0" sz="1400" u="none" cap="none" strike="noStrike">
               <a:solidFill>
@@ -36168,7 +37922,7 @@
 </p:sld>
 </file>
 
-<file path=ppt/slides/slide25.xml><?xml version="1.0" encoding="utf-8"?>
+<file path=ppt/slides/slide27.xml><?xml version="1.0" encoding="utf-8"?>
 <p:sld xmlns:a="http://schemas.openxmlformats.org/drawingml/2006/main" xmlns:r="http://schemas.openxmlformats.org/officeDocument/2006/relationships" xmlns:mc="http://schemas.openxmlformats.org/markup-compatibility/2006" xmlns:mv="urn:schemas-microsoft-com:mac:vml" xmlns:p="http://schemas.openxmlformats.org/presentationml/2006/main" xmlns:c="http://schemas.openxmlformats.org/drawingml/2006/chart" xmlns:dgm="http://schemas.openxmlformats.org/drawingml/2006/diagram" xmlns:o="urn:schemas-microsoft-com:office:office" xmlns:v="urn:schemas-microsoft-com:vml" xmlns:pvml="urn:schemas-microsoft-com:office:powerpoint" xmlns:com="http://schemas.openxmlformats.org/drawingml/2006/compatibility" xmlns:p14="http://schemas.microsoft.com/office/powerpoint/2010/main" xmlns:p15="http://schemas.microsoft.com/office/powerpoint/2012/main" xmlns:ahyp="http://schemas.microsoft.com/office/drawing/2018/hyperlinkcolor">
   <p:cSld>
     <p:spTree>
@@ -36428,7 +38182,7 @@
                 <a:cs typeface="Calibri"/>
                 <a:sym typeface="Calibri"/>
               </a:rPr>
-              <a:t>25 / 29</a:t>
+              <a:t>27 / 31</a:t>
             </a:r>
             <a:endParaRPr b="0" i="0" sz="1400" u="none" cap="none" strike="noStrike">
               <a:solidFill>
@@ -39094,7 +40848,7 @@
 </p:sld>
 </file>
 
-<file path=ppt/slides/slide26.xml><?xml version="1.0" encoding="utf-8"?>
+<file path=ppt/slides/slide28.xml><?xml version="1.0" encoding="utf-8"?>
 <p:sld xmlns:a="http://schemas.openxmlformats.org/drawingml/2006/main" xmlns:r="http://schemas.openxmlformats.org/officeDocument/2006/relationships" xmlns:mc="http://schemas.openxmlformats.org/markup-compatibility/2006" xmlns:mv="urn:schemas-microsoft-com:mac:vml" xmlns:p="http://schemas.openxmlformats.org/presentationml/2006/main" xmlns:c="http://schemas.openxmlformats.org/drawingml/2006/chart" xmlns:dgm="http://schemas.openxmlformats.org/drawingml/2006/diagram" xmlns:o="urn:schemas-microsoft-com:office:office" xmlns:v="urn:schemas-microsoft-com:vml" xmlns:pvml="urn:schemas-microsoft-com:office:powerpoint" xmlns:com="http://schemas.openxmlformats.org/drawingml/2006/compatibility" xmlns:p14="http://schemas.microsoft.com/office/powerpoint/2010/main" xmlns:p15="http://schemas.microsoft.com/office/powerpoint/2012/main" xmlns:ahyp="http://schemas.microsoft.com/office/drawing/2018/hyperlinkcolor">
   <p:cSld>
     <p:spTree>
@@ -39354,7 +41108,7 @@
                 <a:cs typeface="Calibri"/>
                 <a:sym typeface="Calibri"/>
               </a:rPr>
-              <a:t>26 / 29</a:t>
+              <a:t>28 / 31</a:t>
             </a:r>
             <a:endParaRPr b="0" i="0" sz="1400" u="none" cap="none" strike="noStrike">
               <a:solidFill>
@@ -39742,7 +41496,7 @@
 </p:sld>
 </file>
 
-<file path=ppt/slides/slide27.xml><?xml version="1.0" encoding="utf-8"?>
+<file path=ppt/slides/slide29.xml><?xml version="1.0" encoding="utf-8"?>
 <p:sld xmlns:a="http://schemas.openxmlformats.org/drawingml/2006/main" xmlns:r="http://schemas.openxmlformats.org/officeDocument/2006/relationships" xmlns:mc="http://schemas.openxmlformats.org/markup-compatibility/2006" xmlns:mv="urn:schemas-microsoft-com:mac:vml" xmlns:p="http://schemas.openxmlformats.org/presentationml/2006/main" xmlns:c="http://schemas.openxmlformats.org/drawingml/2006/chart" xmlns:dgm="http://schemas.openxmlformats.org/drawingml/2006/diagram" xmlns:o="urn:schemas-microsoft-com:office:office" xmlns:v="urn:schemas-microsoft-com:vml" xmlns:pvml="urn:schemas-microsoft-com:office:powerpoint" xmlns:com="http://schemas.openxmlformats.org/drawingml/2006/compatibility" xmlns:p14="http://schemas.microsoft.com/office/powerpoint/2010/main" xmlns:p15="http://schemas.microsoft.com/office/powerpoint/2012/main" xmlns:ahyp="http://schemas.microsoft.com/office/drawing/2018/hyperlinkcolor">
   <p:cSld>
     <p:spTree>
@@ -40002,7 +41756,7 @@
                 <a:cs typeface="Calibri"/>
                 <a:sym typeface="Calibri"/>
               </a:rPr>
-              <a:t>27 / 29</a:t>
+              <a:t>29 / 31</a:t>
             </a:r>
             <a:endParaRPr b="0" i="0" sz="1400" u="none" cap="none" strike="noStrike">
               <a:solidFill>
@@ -40503,2252 +42257,6 @@
               <a:ea typeface="Arial"/>
               <a:cs typeface="Arial"/>
               <a:sym typeface="Arial"/>
-            </a:endParaRPr>
-          </a:p>
-        </p:txBody>
-      </p:sp>
-    </p:spTree>
-  </p:cSld>
-  <p:clrMapOvr>
-    <a:masterClrMapping/>
-  </p:clrMapOvr>
-</p:sld>
-</file>
-
-<file path=ppt/slides/slide28.xml><?xml version="1.0" encoding="utf-8"?>
-<p:sld xmlns:a="http://schemas.openxmlformats.org/drawingml/2006/main" xmlns:r="http://schemas.openxmlformats.org/officeDocument/2006/relationships" xmlns:mc="http://schemas.openxmlformats.org/markup-compatibility/2006" xmlns:mv="urn:schemas-microsoft-com:mac:vml" xmlns:p="http://schemas.openxmlformats.org/presentationml/2006/main" xmlns:c="http://schemas.openxmlformats.org/drawingml/2006/chart" xmlns:dgm="http://schemas.openxmlformats.org/drawingml/2006/diagram" xmlns:o="urn:schemas-microsoft-com:office:office" xmlns:v="urn:schemas-microsoft-com:vml" xmlns:pvml="urn:schemas-microsoft-com:office:powerpoint" xmlns:com="http://schemas.openxmlformats.org/drawingml/2006/compatibility" xmlns:p14="http://schemas.microsoft.com/office/powerpoint/2010/main" xmlns:p15="http://schemas.microsoft.com/office/powerpoint/2012/main" xmlns:ahyp="http://schemas.microsoft.com/office/drawing/2018/hyperlinkcolor">
-  <p:cSld>
-    <p:spTree>
-      <p:nvGrpSpPr>
-        <p:cNvPr id="583" name="Shape 583"/>
-        <p:cNvGrpSpPr/>
-        <p:nvPr/>
-      </p:nvGrpSpPr>
-      <p:grpSpPr>
-        <a:xfrm>
-          <a:off x="0" y="0"/>
-          <a:ext cx="0" cy="0"/>
-          <a:chOff x="0" y="0"/>
-          <a:chExt cx="0" cy="0"/>
-        </a:xfrm>
-      </p:grpSpPr>
-      <p:sp>
-        <p:nvSpPr>
-          <p:cNvPr id="584" name="Google Shape;584;p25"/>
-          <p:cNvSpPr/>
-          <p:nvPr/>
-        </p:nvSpPr>
-        <p:spPr>
-          <a:xfrm>
-            <a:off x="0" y="0"/>
-            <a:ext cx="12191695" cy="6858000"/>
-          </a:xfrm>
-          <a:prstGeom prst="rect">
-            <a:avLst/>
-          </a:prstGeom>
-          <a:solidFill>
-            <a:srgbClr val="FAFAFC"/>
-          </a:solidFill>
-          <a:ln>
-            <a:noFill/>
-          </a:ln>
-        </p:spPr>
-        <p:txBody>
-          <a:bodyPr anchorCtr="0" anchor="ctr" bIns="45700" lIns="91425" spcFirstLastPara="1" rIns="91425" wrap="square" tIns="45700">
-            <a:noAutofit/>
-          </a:bodyPr>
-          <a:lstStyle/>
-          <a:p>
-            <a:pPr indent="0" lvl="0" marL="0" marR="0" rtl="0" algn="ctr">
-              <a:lnSpc>
-                <a:spcPct val="100000"/>
-              </a:lnSpc>
-              <a:spcBef>
-                <a:spcPts val="0"/>
-              </a:spcBef>
-              <a:spcAft>
-                <a:spcPts val="0"/>
-              </a:spcAft>
-              <a:buClr>
-                <a:srgbClr val="000000"/>
-              </a:buClr>
-              <a:buSzPts val="1800"/>
-              <a:buFont typeface="Arial"/>
-              <a:buNone/>
-            </a:pPr>
-            <a:r>
-              <a:t/>
-            </a:r>
-            <a:endParaRPr b="0" i="0" sz="1800" u="none" cap="none" strike="noStrike">
-              <a:solidFill>
-                <a:schemeClr val="dk1"/>
-              </a:solidFill>
-              <a:latin typeface="Calibri"/>
-              <a:ea typeface="Calibri"/>
-              <a:cs typeface="Calibri"/>
-              <a:sym typeface="Calibri"/>
-            </a:endParaRPr>
-          </a:p>
-        </p:txBody>
-      </p:sp>
-      <p:sp>
-        <p:nvSpPr>
-          <p:cNvPr id="585" name="Google Shape;585;p25"/>
-          <p:cNvSpPr/>
-          <p:nvPr/>
-        </p:nvSpPr>
-        <p:spPr>
-          <a:xfrm>
-            <a:off x="502920" y="530352"/>
-            <a:ext cx="228600" cy="228600"/>
-          </a:xfrm>
-          <a:prstGeom prst="ellipse">
-            <a:avLst/>
-          </a:prstGeom>
-          <a:solidFill>
-            <a:srgbClr val="8B5CF6"/>
-          </a:solidFill>
-          <a:ln>
-            <a:noFill/>
-          </a:ln>
-          <a:effectLst>
-            <a:outerShdw blurRad="40000" rotWithShape="0" dir="5400000" dist="23000">
-              <a:srgbClr val="000000">
-                <a:alpha val="34901"/>
-              </a:srgbClr>
-            </a:outerShdw>
-          </a:effectLst>
-        </p:spPr>
-        <p:txBody>
-          <a:bodyPr anchorCtr="0" anchor="ctr" bIns="45700" lIns="91425" spcFirstLastPara="1" rIns="91425" wrap="square" tIns="45700">
-            <a:noAutofit/>
-          </a:bodyPr>
-          <a:lstStyle/>
-          <a:p>
-            <a:pPr indent="0" lvl="0" marL="0" marR="0" rtl="0" algn="ctr">
-              <a:lnSpc>
-                <a:spcPct val="100000"/>
-              </a:lnSpc>
-              <a:spcBef>
-                <a:spcPts val="0"/>
-              </a:spcBef>
-              <a:spcAft>
-                <a:spcPts val="0"/>
-              </a:spcAft>
-              <a:buClr>
-                <a:srgbClr val="000000"/>
-              </a:buClr>
-              <a:buSzPts val="1800"/>
-              <a:buFont typeface="Arial"/>
-              <a:buNone/>
-            </a:pPr>
-            <a:r>
-              <a:t/>
-            </a:r>
-            <a:endParaRPr b="0" i="0" sz="1800" u="none" cap="none" strike="noStrike">
-              <a:solidFill>
-                <a:schemeClr val="dk1"/>
-              </a:solidFill>
-              <a:latin typeface="Calibri"/>
-              <a:ea typeface="Calibri"/>
-              <a:cs typeface="Calibri"/>
-              <a:sym typeface="Calibri"/>
-            </a:endParaRPr>
-          </a:p>
-        </p:txBody>
-      </p:sp>
-      <p:sp>
-        <p:nvSpPr>
-          <p:cNvPr id="586" name="Google Shape;586;p25"/>
-          <p:cNvSpPr txBox="1"/>
-          <p:nvPr/>
-        </p:nvSpPr>
-        <p:spPr>
-          <a:xfrm>
-            <a:off x="914400" y="384048"/>
-            <a:ext cx="10972800" cy="640080"/>
-          </a:xfrm>
-          <a:prstGeom prst="rect">
-            <a:avLst/>
-          </a:prstGeom>
-          <a:noFill/>
-          <a:ln>
-            <a:noFill/>
-          </a:ln>
-        </p:spPr>
-        <p:txBody>
-          <a:bodyPr anchorCtr="0" anchor="t" bIns="0" lIns="0" spcFirstLastPara="1" rIns="0" wrap="square" tIns="0">
-            <a:spAutoFit/>
-          </a:bodyPr>
-          <a:lstStyle/>
-          <a:p>
-            <a:pPr indent="0" lvl="0" marL="0" marR="0" rtl="0" algn="l">
-              <a:lnSpc>
-                <a:spcPct val="100000"/>
-              </a:lnSpc>
-              <a:spcBef>
-                <a:spcPts val="0"/>
-              </a:spcBef>
-              <a:spcAft>
-                <a:spcPts val="0"/>
-              </a:spcAft>
-              <a:buClr>
-                <a:srgbClr val="000000"/>
-              </a:buClr>
-              <a:buSzPts val="3000"/>
-              <a:buFont typeface="Arial"/>
-              <a:buNone/>
-            </a:pPr>
-            <a:r>
-              <a:rPr b="1" i="0" lang="en-US" sz="3000" u="none" cap="none" strike="noStrike">
-                <a:solidFill>
-                  <a:srgbClr val="1E293B"/>
-                </a:solidFill>
-                <a:latin typeface="Calibri"/>
-                <a:ea typeface="Calibri"/>
-                <a:cs typeface="Calibri"/>
-                <a:sym typeface="Calibri"/>
-              </a:rPr>
-              <a:t>Résultats  ·  MAE 11,2 % par capture</a:t>
-            </a:r>
-            <a:endParaRPr b="0" i="0" sz="1400" u="none" cap="none" strike="noStrike">
-              <a:solidFill>
-                <a:srgbClr val="000000"/>
-              </a:solidFill>
-              <a:latin typeface="Arial"/>
-              <a:ea typeface="Arial"/>
-              <a:cs typeface="Arial"/>
-              <a:sym typeface="Arial"/>
-            </a:endParaRPr>
-          </a:p>
-        </p:txBody>
-      </p:sp>
-      <p:sp>
-        <p:nvSpPr>
-          <p:cNvPr id="587" name="Google Shape;587;p25"/>
-          <p:cNvSpPr txBox="1"/>
-          <p:nvPr/>
-        </p:nvSpPr>
-        <p:spPr>
-          <a:xfrm>
-            <a:off x="10911535" y="6492240"/>
-            <a:ext cx="914400" cy="274320"/>
-          </a:xfrm>
-          <a:prstGeom prst="rect">
-            <a:avLst/>
-          </a:prstGeom>
-          <a:noFill/>
-          <a:ln>
-            <a:noFill/>
-          </a:ln>
-        </p:spPr>
-        <p:txBody>
-          <a:bodyPr anchorCtr="0" anchor="t" bIns="0" lIns="0" spcFirstLastPara="1" rIns="0" wrap="square" tIns="0">
-            <a:spAutoFit/>
-          </a:bodyPr>
-          <a:lstStyle/>
-          <a:p>
-            <a:pPr indent="0" lvl="0" marL="0" marR="0" rtl="0" algn="r">
-              <a:lnSpc>
-                <a:spcPct val="100000"/>
-              </a:lnSpc>
-              <a:spcBef>
-                <a:spcPts val="0"/>
-              </a:spcBef>
-              <a:spcAft>
-                <a:spcPts val="0"/>
-              </a:spcAft>
-              <a:buClr>
-                <a:srgbClr val="000000"/>
-              </a:buClr>
-              <a:buSzPts val="1000"/>
-              <a:buFont typeface="Arial"/>
-              <a:buNone/>
-            </a:pPr>
-            <a:r>
-              <a:rPr b="0" i="0" lang="en-US" sz="1000" u="none" cap="none" strike="noStrike">
-                <a:solidFill>
-                  <a:srgbClr val="64748B"/>
-                </a:solidFill>
-                <a:latin typeface="Calibri"/>
-                <a:ea typeface="Calibri"/>
-                <a:cs typeface="Calibri"/>
-                <a:sym typeface="Calibri"/>
-              </a:rPr>
-              <a:t>28 / 29</a:t>
-            </a:r>
-            <a:endParaRPr b="0" i="0" sz="1400" u="none" cap="none" strike="noStrike">
-              <a:solidFill>
-                <a:srgbClr val="000000"/>
-              </a:solidFill>
-              <a:latin typeface="Arial"/>
-              <a:ea typeface="Arial"/>
-              <a:cs typeface="Arial"/>
-              <a:sym typeface="Arial"/>
-            </a:endParaRPr>
-          </a:p>
-        </p:txBody>
-      </p:sp>
-      <p:sp>
-        <p:nvSpPr>
-          <p:cNvPr id="588" name="Google Shape;588;p25"/>
-          <p:cNvSpPr txBox="1"/>
-          <p:nvPr/>
-        </p:nvSpPr>
-        <p:spPr>
-          <a:xfrm>
-            <a:off x="502920" y="6492240"/>
-            <a:ext cx="8229600" cy="274320"/>
-          </a:xfrm>
-          <a:prstGeom prst="rect">
-            <a:avLst/>
-          </a:prstGeom>
-          <a:noFill/>
-          <a:ln>
-            <a:noFill/>
-          </a:ln>
-        </p:spPr>
-        <p:txBody>
-          <a:bodyPr anchorCtr="0" anchor="t" bIns="0" lIns="0" spcFirstLastPara="1" rIns="0" wrap="square" tIns="0">
-            <a:spAutoFit/>
-          </a:bodyPr>
-          <a:lstStyle/>
-          <a:p>
-            <a:pPr indent="0" lvl="0" marL="0" marR="0" rtl="0" algn="l">
-              <a:lnSpc>
-                <a:spcPct val="100000"/>
-              </a:lnSpc>
-              <a:spcBef>
-                <a:spcPts val="0"/>
-              </a:spcBef>
-              <a:spcAft>
-                <a:spcPts val="0"/>
-              </a:spcAft>
-              <a:buClr>
-                <a:srgbClr val="000000"/>
-              </a:buClr>
-              <a:buSzPts val="1000"/>
-              <a:buFont typeface="Arial"/>
-              <a:buNone/>
-            </a:pPr>
-            <a:r>
-              <a:rPr b="0" i="0" lang="en-US" sz="1000" u="none" cap="none" strike="noStrike">
-                <a:solidFill>
-                  <a:srgbClr val="64748B"/>
-                </a:solidFill>
-                <a:latin typeface="Calibri"/>
-                <a:ea typeface="Calibri"/>
-                <a:cs typeface="Calibri"/>
-                <a:sym typeface="Calibri"/>
-              </a:rPr>
-              <a:t>BTS CIEL 2026  ·  Soutenance U6  ·  Noa Orand</a:t>
-            </a:r>
-            <a:endParaRPr b="0" i="0" sz="1400" u="none" cap="none" strike="noStrike">
-              <a:solidFill>
-                <a:srgbClr val="000000"/>
-              </a:solidFill>
-              <a:latin typeface="Arial"/>
-              <a:ea typeface="Arial"/>
-              <a:cs typeface="Arial"/>
-              <a:sym typeface="Arial"/>
-            </a:endParaRPr>
-          </a:p>
-        </p:txBody>
-      </p:sp>
-      <p:sp>
-        <p:nvSpPr>
-          <p:cNvPr id="589" name="Google Shape;589;p25"/>
-          <p:cNvSpPr/>
-          <p:nvPr/>
-        </p:nvSpPr>
-        <p:spPr>
-          <a:xfrm>
-            <a:off x="640080" y="1737360"/>
-            <a:ext cx="5303520" cy="4114800"/>
-          </a:xfrm>
-          <a:prstGeom prst="roundRect">
-            <a:avLst>
-              <a:gd fmla="val 16667" name="adj"/>
-            </a:avLst>
-          </a:prstGeom>
-          <a:solidFill>
-            <a:srgbClr val="FFFFFF"/>
-          </a:solidFill>
-          <a:ln cap="flat" cmpd="sng" w="12700">
-            <a:solidFill>
-              <a:srgbClr val="8B5CF6"/>
-            </a:solidFill>
-            <a:prstDash val="solid"/>
-            <a:round/>
-            <a:headEnd len="sm" w="sm" type="none"/>
-            <a:tailEnd len="sm" w="sm" type="none"/>
-          </a:ln>
-          <a:effectLst>
-            <a:outerShdw blurRad="40000" rotWithShape="0" dir="5400000" dist="23000">
-              <a:srgbClr val="000000">
-                <a:alpha val="34901"/>
-              </a:srgbClr>
-            </a:outerShdw>
-          </a:effectLst>
-        </p:spPr>
-        <p:txBody>
-          <a:bodyPr anchorCtr="0" anchor="ctr" bIns="45700" lIns="91425" spcFirstLastPara="1" rIns="91425" wrap="square" tIns="45700">
-            <a:noAutofit/>
-          </a:bodyPr>
-          <a:lstStyle/>
-          <a:p>
-            <a:pPr indent="0" lvl="0" marL="0" marR="0" rtl="0" algn="ctr">
-              <a:lnSpc>
-                <a:spcPct val="100000"/>
-              </a:lnSpc>
-              <a:spcBef>
-                <a:spcPts val="0"/>
-              </a:spcBef>
-              <a:spcAft>
-                <a:spcPts val="0"/>
-              </a:spcAft>
-              <a:buClr>
-                <a:srgbClr val="000000"/>
-              </a:buClr>
-              <a:buSzPts val="1800"/>
-              <a:buFont typeface="Arial"/>
-              <a:buNone/>
-            </a:pPr>
-            <a:r>
-              <a:t/>
-            </a:r>
-            <a:endParaRPr b="0" i="0" sz="1800" u="none" cap="none" strike="noStrike">
-              <a:solidFill>
-                <a:schemeClr val="dk1"/>
-              </a:solidFill>
-              <a:latin typeface="Calibri"/>
-              <a:ea typeface="Calibri"/>
-              <a:cs typeface="Calibri"/>
-              <a:sym typeface="Calibri"/>
-            </a:endParaRPr>
-          </a:p>
-        </p:txBody>
-      </p:sp>
-      <p:sp>
-        <p:nvSpPr>
-          <p:cNvPr id="590" name="Google Shape;590;p25"/>
-          <p:cNvSpPr txBox="1"/>
-          <p:nvPr/>
-        </p:nvSpPr>
-        <p:spPr>
-          <a:xfrm>
-            <a:off x="640080" y="1920240"/>
-            <a:ext cx="5303520" cy="457200"/>
-          </a:xfrm>
-          <a:prstGeom prst="rect">
-            <a:avLst/>
-          </a:prstGeom>
-          <a:noFill/>
-          <a:ln>
-            <a:noFill/>
-          </a:ln>
-        </p:spPr>
-        <p:txBody>
-          <a:bodyPr anchorCtr="0" anchor="t" bIns="0" lIns="0" spcFirstLastPara="1" rIns="0" wrap="square" tIns="0">
-            <a:spAutoFit/>
-          </a:bodyPr>
-          <a:lstStyle/>
-          <a:p>
-            <a:pPr indent="0" lvl="0" marL="0" marR="0" rtl="0" algn="ctr">
-              <a:lnSpc>
-                <a:spcPct val="100000"/>
-              </a:lnSpc>
-              <a:spcBef>
-                <a:spcPts val="0"/>
-              </a:spcBef>
-              <a:spcAft>
-                <a:spcPts val="0"/>
-              </a:spcAft>
-              <a:buClr>
-                <a:srgbClr val="000000"/>
-              </a:buClr>
-              <a:buSzPts val="1500"/>
-              <a:buFont typeface="Arial"/>
-              <a:buNone/>
-            </a:pPr>
-            <a:r>
-              <a:rPr b="1" i="0" lang="en-US" sz="1500" u="none" cap="none" strike="noStrike">
-                <a:solidFill>
-                  <a:srgbClr val="8B5CF6"/>
-                </a:solidFill>
-                <a:latin typeface="Calibri"/>
-                <a:ea typeface="Calibri"/>
-                <a:cs typeface="Calibri"/>
-                <a:sym typeface="Calibri"/>
-              </a:rPr>
-              <a:t>Erreur absolue moyenne</a:t>
-            </a:r>
-            <a:endParaRPr b="0" i="0" sz="1400" u="none" cap="none" strike="noStrike">
-              <a:solidFill>
-                <a:srgbClr val="000000"/>
-              </a:solidFill>
-              <a:latin typeface="Arial"/>
-              <a:ea typeface="Arial"/>
-              <a:cs typeface="Arial"/>
-              <a:sym typeface="Arial"/>
-            </a:endParaRPr>
-          </a:p>
-        </p:txBody>
-      </p:sp>
-      <p:sp>
-        <p:nvSpPr>
-          <p:cNvPr id="591" name="Google Shape;591;p25"/>
-          <p:cNvSpPr txBox="1"/>
-          <p:nvPr/>
-        </p:nvSpPr>
-        <p:spPr>
-          <a:xfrm>
-            <a:off x="640080" y="2468880"/>
-            <a:ext cx="5303520" cy="1828800"/>
-          </a:xfrm>
-          <a:prstGeom prst="rect">
-            <a:avLst/>
-          </a:prstGeom>
-          <a:noFill/>
-          <a:ln>
-            <a:noFill/>
-          </a:ln>
-        </p:spPr>
-        <p:txBody>
-          <a:bodyPr anchorCtr="0" anchor="t" bIns="0" lIns="0" spcFirstLastPara="1" rIns="0" wrap="square" tIns="0">
-            <a:spAutoFit/>
-          </a:bodyPr>
-          <a:lstStyle/>
-          <a:p>
-            <a:pPr indent="0" lvl="0" marL="0" marR="0" rtl="0" algn="ctr">
-              <a:lnSpc>
-                <a:spcPct val="100000"/>
-              </a:lnSpc>
-              <a:spcBef>
-                <a:spcPts val="0"/>
-              </a:spcBef>
-              <a:spcAft>
-                <a:spcPts val="0"/>
-              </a:spcAft>
-              <a:buClr>
-                <a:srgbClr val="000000"/>
-              </a:buClr>
-              <a:buSzPts val="11000"/>
-              <a:buFont typeface="Arial"/>
-              <a:buNone/>
-            </a:pPr>
-            <a:r>
-              <a:rPr b="1" i="0" lang="en-US" sz="11000" u="none" cap="none" strike="noStrike">
-                <a:solidFill>
-                  <a:srgbClr val="8B5CF6"/>
-                </a:solidFill>
-                <a:latin typeface="Calibri"/>
-                <a:ea typeface="Calibri"/>
-                <a:cs typeface="Calibri"/>
-                <a:sym typeface="Calibri"/>
-              </a:rPr>
-              <a:t>11,2 %</a:t>
-            </a:r>
-            <a:endParaRPr b="0" i="0" sz="1400" u="none" cap="none" strike="noStrike">
-              <a:solidFill>
-                <a:srgbClr val="000000"/>
-              </a:solidFill>
-              <a:latin typeface="Arial"/>
-              <a:ea typeface="Arial"/>
-              <a:cs typeface="Arial"/>
-              <a:sym typeface="Arial"/>
-            </a:endParaRPr>
-          </a:p>
-        </p:txBody>
-      </p:sp>
-      <p:sp>
-        <p:nvSpPr>
-          <p:cNvPr id="592" name="Google Shape;592;p25"/>
-          <p:cNvSpPr txBox="1"/>
-          <p:nvPr/>
-        </p:nvSpPr>
-        <p:spPr>
-          <a:xfrm>
-            <a:off x="640080" y="4572000"/>
-            <a:ext cx="5303520" cy="457200"/>
-          </a:xfrm>
-          <a:prstGeom prst="rect">
-            <a:avLst/>
-          </a:prstGeom>
-          <a:noFill/>
-          <a:ln>
-            <a:noFill/>
-          </a:ln>
-        </p:spPr>
-        <p:txBody>
-          <a:bodyPr anchorCtr="0" anchor="t" bIns="0" lIns="0" spcFirstLastPara="1" rIns="0" wrap="square" tIns="0">
-            <a:spAutoFit/>
-          </a:bodyPr>
-          <a:lstStyle/>
-          <a:p>
-            <a:pPr indent="0" lvl="0" marL="0" marR="0" rtl="0" algn="ctr">
-              <a:lnSpc>
-                <a:spcPct val="100000"/>
-              </a:lnSpc>
-              <a:spcBef>
-                <a:spcPts val="0"/>
-              </a:spcBef>
-              <a:spcAft>
-                <a:spcPts val="0"/>
-              </a:spcAft>
-              <a:buClr>
-                <a:srgbClr val="000000"/>
-              </a:buClr>
-              <a:buSzPts val="1800"/>
-              <a:buFont typeface="Arial"/>
-              <a:buNone/>
-            </a:pPr>
-            <a:r>
-              <a:rPr b="0" i="1" lang="en-US" sz="1800" u="none" cap="none" strike="noStrike">
-                <a:solidFill>
-                  <a:srgbClr val="334055"/>
-                </a:solidFill>
-                <a:latin typeface="Calibri"/>
-                <a:ea typeface="Calibri"/>
-                <a:cs typeface="Calibri"/>
-                <a:sym typeface="Calibri"/>
-              </a:rPr>
-              <a:t>par capture</a:t>
-            </a:r>
-            <a:endParaRPr b="0" i="0" sz="1400" u="none" cap="none" strike="noStrike">
-              <a:solidFill>
-                <a:srgbClr val="000000"/>
-              </a:solidFill>
-              <a:latin typeface="Arial"/>
-              <a:ea typeface="Arial"/>
-              <a:cs typeface="Arial"/>
-              <a:sym typeface="Arial"/>
-            </a:endParaRPr>
-          </a:p>
-        </p:txBody>
-      </p:sp>
-      <p:sp>
-        <p:nvSpPr>
-          <p:cNvPr id="593" name="Google Shape;593;p25"/>
-          <p:cNvSpPr txBox="1"/>
-          <p:nvPr/>
-        </p:nvSpPr>
-        <p:spPr>
-          <a:xfrm>
-            <a:off x="640080" y="5120640"/>
-            <a:ext cx="5303520" cy="365760"/>
-          </a:xfrm>
-          <a:prstGeom prst="rect">
-            <a:avLst/>
-          </a:prstGeom>
-          <a:noFill/>
-          <a:ln>
-            <a:noFill/>
-          </a:ln>
-        </p:spPr>
-        <p:txBody>
-          <a:bodyPr anchorCtr="0" anchor="t" bIns="0" lIns="0" spcFirstLastPara="1" rIns="0" wrap="square" tIns="0">
-            <a:spAutoFit/>
-          </a:bodyPr>
-          <a:lstStyle/>
-          <a:p>
-            <a:pPr indent="0" lvl="0" marL="0" marR="0" rtl="0" algn="ctr">
-              <a:lnSpc>
-                <a:spcPct val="100000"/>
-              </a:lnSpc>
-              <a:spcBef>
-                <a:spcPts val="0"/>
-              </a:spcBef>
-              <a:spcAft>
-                <a:spcPts val="0"/>
-              </a:spcAft>
-              <a:buClr>
-                <a:srgbClr val="000000"/>
-              </a:buClr>
-              <a:buSzPts val="1200"/>
-              <a:buFont typeface="Arial"/>
-              <a:buNone/>
-            </a:pPr>
-            <a:r>
-              <a:rPr b="0" i="1" lang="en-US" sz="1200" u="none" cap="none" strike="noStrike">
-                <a:solidFill>
-                  <a:srgbClr val="64748B"/>
-                </a:solidFill>
-                <a:latin typeface="Calibri"/>
-                <a:ea typeface="Calibri"/>
-                <a:cs typeface="Calibri"/>
-                <a:sym typeface="Calibri"/>
-              </a:rPr>
-              <a:t>Métrique métier — pourcentage de tension</a:t>
-            </a:r>
-            <a:endParaRPr b="0" i="0" sz="1400" u="none" cap="none" strike="noStrike">
-              <a:solidFill>
-                <a:srgbClr val="000000"/>
-              </a:solidFill>
-              <a:latin typeface="Arial"/>
-              <a:ea typeface="Arial"/>
-              <a:cs typeface="Arial"/>
-              <a:sym typeface="Arial"/>
-            </a:endParaRPr>
-          </a:p>
-        </p:txBody>
-      </p:sp>
-      <p:sp>
-        <p:nvSpPr>
-          <p:cNvPr id="594" name="Google Shape;594;p25"/>
-          <p:cNvSpPr/>
-          <p:nvPr/>
-        </p:nvSpPr>
-        <p:spPr>
-          <a:xfrm>
-            <a:off x="6263640" y="1737360"/>
-            <a:ext cx="5486400" cy="4114800"/>
-          </a:xfrm>
-          <a:prstGeom prst="roundRect">
-            <a:avLst>
-              <a:gd fmla="val 16667" name="adj"/>
-            </a:avLst>
-          </a:prstGeom>
-          <a:solidFill>
-            <a:srgbClr val="FFFFFF"/>
-          </a:solidFill>
-          <a:ln cap="flat" cmpd="sng" w="12700">
-            <a:solidFill>
-              <a:srgbClr val="22D3EE"/>
-            </a:solidFill>
-            <a:prstDash val="solid"/>
-            <a:round/>
-            <a:headEnd len="sm" w="sm" type="none"/>
-            <a:tailEnd len="sm" w="sm" type="none"/>
-          </a:ln>
-          <a:effectLst>
-            <a:outerShdw blurRad="40000" rotWithShape="0" dir="5400000" dist="23000">
-              <a:srgbClr val="000000">
-                <a:alpha val="34901"/>
-              </a:srgbClr>
-            </a:outerShdw>
-          </a:effectLst>
-        </p:spPr>
-        <p:txBody>
-          <a:bodyPr anchorCtr="0" anchor="ctr" bIns="45700" lIns="91425" spcFirstLastPara="1" rIns="91425" wrap="square" tIns="45700">
-            <a:noAutofit/>
-          </a:bodyPr>
-          <a:lstStyle/>
-          <a:p>
-            <a:pPr indent="0" lvl="0" marL="0" marR="0" rtl="0" algn="ctr">
-              <a:lnSpc>
-                <a:spcPct val="100000"/>
-              </a:lnSpc>
-              <a:spcBef>
-                <a:spcPts val="0"/>
-              </a:spcBef>
-              <a:spcAft>
-                <a:spcPts val="0"/>
-              </a:spcAft>
-              <a:buClr>
-                <a:srgbClr val="000000"/>
-              </a:buClr>
-              <a:buSzPts val="1800"/>
-              <a:buFont typeface="Arial"/>
-              <a:buNone/>
-            </a:pPr>
-            <a:r>
-              <a:t/>
-            </a:r>
-            <a:endParaRPr b="0" i="0" sz="1800" u="none" cap="none" strike="noStrike">
-              <a:solidFill>
-                <a:schemeClr val="dk1"/>
-              </a:solidFill>
-              <a:latin typeface="Calibri"/>
-              <a:ea typeface="Calibri"/>
-              <a:cs typeface="Calibri"/>
-              <a:sym typeface="Calibri"/>
-            </a:endParaRPr>
-          </a:p>
-        </p:txBody>
-      </p:sp>
-      <p:sp>
-        <p:nvSpPr>
-          <p:cNvPr id="595" name="Google Shape;595;p25"/>
-          <p:cNvSpPr txBox="1"/>
-          <p:nvPr/>
-        </p:nvSpPr>
-        <p:spPr>
-          <a:xfrm>
-            <a:off x="6446520" y="1920240"/>
-            <a:ext cx="5120640" cy="457200"/>
-          </a:xfrm>
-          <a:prstGeom prst="rect">
-            <a:avLst/>
-          </a:prstGeom>
-          <a:noFill/>
-          <a:ln>
-            <a:noFill/>
-          </a:ln>
-        </p:spPr>
-        <p:txBody>
-          <a:bodyPr anchorCtr="0" anchor="t" bIns="0" lIns="0" spcFirstLastPara="1" rIns="0" wrap="square" tIns="0">
-            <a:spAutoFit/>
-          </a:bodyPr>
-          <a:lstStyle/>
-          <a:p>
-            <a:pPr indent="0" lvl="0" marL="0" marR="0" rtl="0" algn="l">
-              <a:lnSpc>
-                <a:spcPct val="100000"/>
-              </a:lnSpc>
-              <a:spcBef>
-                <a:spcPts val="0"/>
-              </a:spcBef>
-              <a:spcAft>
-                <a:spcPts val="0"/>
-              </a:spcAft>
-              <a:buClr>
-                <a:srgbClr val="000000"/>
-              </a:buClr>
-              <a:buSzPts val="1500"/>
-              <a:buFont typeface="Arial"/>
-              <a:buNone/>
-            </a:pPr>
-            <a:r>
-              <a:rPr b="1" i="0" lang="en-US" sz="1500" u="none" cap="none" strike="noStrike">
-                <a:solidFill>
-                  <a:srgbClr val="22D3EE"/>
-                </a:solidFill>
-                <a:latin typeface="Calibri"/>
-                <a:ea typeface="Calibri"/>
-                <a:cs typeface="Calibri"/>
-                <a:sym typeface="Calibri"/>
-              </a:rPr>
-              <a:t>Comparaison à une baseline naïve</a:t>
-            </a:r>
-            <a:endParaRPr b="0" i="0" sz="1400" u="none" cap="none" strike="noStrike">
-              <a:solidFill>
-                <a:srgbClr val="000000"/>
-              </a:solidFill>
-              <a:latin typeface="Arial"/>
-              <a:ea typeface="Arial"/>
-              <a:cs typeface="Arial"/>
-              <a:sym typeface="Arial"/>
-            </a:endParaRPr>
-          </a:p>
-        </p:txBody>
-      </p:sp>
-      <p:sp>
-        <p:nvSpPr>
-          <p:cNvPr id="596" name="Google Shape;596;p25"/>
-          <p:cNvSpPr txBox="1"/>
-          <p:nvPr/>
-        </p:nvSpPr>
-        <p:spPr>
-          <a:xfrm>
-            <a:off x="6446520" y="2606040"/>
-            <a:ext cx="5120640" cy="457200"/>
-          </a:xfrm>
-          <a:prstGeom prst="rect">
-            <a:avLst/>
-          </a:prstGeom>
-          <a:noFill/>
-          <a:ln>
-            <a:noFill/>
-          </a:ln>
-        </p:spPr>
-        <p:txBody>
-          <a:bodyPr anchorCtr="0" anchor="t" bIns="0" lIns="0" spcFirstLastPara="1" rIns="0" wrap="square" tIns="0">
-            <a:spAutoFit/>
-          </a:bodyPr>
-          <a:lstStyle/>
-          <a:p>
-            <a:pPr indent="0" lvl="0" marL="0" marR="0" rtl="0" algn="l">
-              <a:lnSpc>
-                <a:spcPct val="100000"/>
-              </a:lnSpc>
-              <a:spcBef>
-                <a:spcPts val="0"/>
-              </a:spcBef>
-              <a:spcAft>
-                <a:spcPts val="0"/>
-              </a:spcAft>
-              <a:buClr>
-                <a:srgbClr val="000000"/>
-              </a:buClr>
-              <a:buSzPts val="1600"/>
-              <a:buFont typeface="Arial"/>
-              <a:buNone/>
-            </a:pPr>
-            <a:r>
-              <a:rPr b="0" i="0" lang="en-US" sz="1600" u="none" cap="none" strike="noStrike">
-                <a:solidFill>
-                  <a:srgbClr val="334055"/>
-                </a:solidFill>
-                <a:latin typeface="Calibri"/>
-                <a:ea typeface="Calibri"/>
-                <a:cs typeface="Calibri"/>
-                <a:sym typeface="Calibri"/>
-              </a:rPr>
-              <a:t>Baseline (prédire la moyenne) : ≈ 27 %</a:t>
-            </a:r>
-            <a:endParaRPr b="0" i="0" sz="1400" u="none" cap="none" strike="noStrike">
-              <a:solidFill>
-                <a:srgbClr val="000000"/>
-              </a:solidFill>
-              <a:latin typeface="Arial"/>
-              <a:ea typeface="Arial"/>
-              <a:cs typeface="Arial"/>
-              <a:sym typeface="Arial"/>
-            </a:endParaRPr>
-          </a:p>
-        </p:txBody>
-      </p:sp>
-      <p:sp>
-        <p:nvSpPr>
-          <p:cNvPr id="597" name="Google Shape;597;p25"/>
-          <p:cNvSpPr txBox="1"/>
-          <p:nvPr/>
-        </p:nvSpPr>
-        <p:spPr>
-          <a:xfrm>
-            <a:off x="6446520" y="3063240"/>
-            <a:ext cx="5120640" cy="457200"/>
-          </a:xfrm>
-          <a:prstGeom prst="rect">
-            <a:avLst/>
-          </a:prstGeom>
-          <a:noFill/>
-          <a:ln>
-            <a:noFill/>
-          </a:ln>
-        </p:spPr>
-        <p:txBody>
-          <a:bodyPr anchorCtr="0" anchor="t" bIns="0" lIns="0" spcFirstLastPara="1" rIns="0" wrap="square" tIns="0">
-            <a:spAutoFit/>
-          </a:bodyPr>
-          <a:lstStyle/>
-          <a:p>
-            <a:pPr indent="0" lvl="0" marL="0" marR="0" rtl="0" algn="l">
-              <a:lnSpc>
-                <a:spcPct val="100000"/>
-              </a:lnSpc>
-              <a:spcBef>
-                <a:spcPts val="0"/>
-              </a:spcBef>
-              <a:spcAft>
-                <a:spcPts val="0"/>
-              </a:spcAft>
-              <a:buClr>
-                <a:srgbClr val="000000"/>
-              </a:buClr>
-              <a:buSzPts val="1600"/>
-              <a:buFont typeface="Arial"/>
-              <a:buNone/>
-            </a:pPr>
-            <a:r>
-              <a:rPr b="1" i="0" lang="en-US" sz="1600" u="none" cap="none" strike="noStrike">
-                <a:solidFill>
-                  <a:srgbClr val="8B5CF6"/>
-                </a:solidFill>
-                <a:latin typeface="Calibri"/>
-                <a:ea typeface="Calibri"/>
-                <a:cs typeface="Calibri"/>
-                <a:sym typeface="Calibri"/>
-              </a:rPr>
-              <a:t>Modèle double branche : 11,2 %</a:t>
-            </a:r>
-            <a:endParaRPr b="0" i="0" sz="1400" u="none" cap="none" strike="noStrike">
-              <a:solidFill>
-                <a:srgbClr val="000000"/>
-              </a:solidFill>
-              <a:latin typeface="Arial"/>
-              <a:ea typeface="Arial"/>
-              <a:cs typeface="Arial"/>
-              <a:sym typeface="Arial"/>
-            </a:endParaRPr>
-          </a:p>
-        </p:txBody>
-      </p:sp>
-      <p:sp>
-        <p:nvSpPr>
-          <p:cNvPr id="598" name="Google Shape;598;p25"/>
-          <p:cNvSpPr txBox="1"/>
-          <p:nvPr/>
-        </p:nvSpPr>
-        <p:spPr>
-          <a:xfrm>
-            <a:off x="6446520" y="3611880"/>
-            <a:ext cx="5120640" cy="457200"/>
-          </a:xfrm>
-          <a:prstGeom prst="rect">
-            <a:avLst/>
-          </a:prstGeom>
-          <a:noFill/>
-          <a:ln>
-            <a:noFill/>
-          </a:ln>
-        </p:spPr>
-        <p:txBody>
-          <a:bodyPr anchorCtr="0" anchor="t" bIns="0" lIns="0" spcFirstLastPara="1" rIns="0" wrap="square" tIns="0">
-            <a:spAutoFit/>
-          </a:bodyPr>
-          <a:lstStyle/>
-          <a:p>
-            <a:pPr indent="0" lvl="0" marL="0" marR="0" rtl="0" algn="l">
-              <a:lnSpc>
-                <a:spcPct val="100000"/>
-              </a:lnSpc>
-              <a:spcBef>
-                <a:spcPts val="0"/>
-              </a:spcBef>
-              <a:spcAft>
-                <a:spcPts val="0"/>
-              </a:spcAft>
-              <a:buClr>
-                <a:srgbClr val="000000"/>
-              </a:buClr>
-              <a:buSzPts val="2200"/>
-              <a:buFont typeface="Arial"/>
-              <a:buNone/>
-            </a:pPr>
-            <a:r>
-              <a:rPr b="1" i="0" lang="en-US" sz="2200" u="none" cap="none" strike="noStrike">
-                <a:solidFill>
-                  <a:srgbClr val="E879F9"/>
-                </a:solidFill>
-                <a:latin typeface="Calibri"/>
-                <a:ea typeface="Calibri"/>
-                <a:cs typeface="Calibri"/>
-                <a:sym typeface="Calibri"/>
-              </a:rPr>
-              <a:t>→ erreur divisée par ≈ 2,5</a:t>
-            </a:r>
-            <a:endParaRPr b="0" i="0" sz="1400" u="none" cap="none" strike="noStrike">
-              <a:solidFill>
-                <a:srgbClr val="000000"/>
-              </a:solidFill>
-              <a:latin typeface="Arial"/>
-              <a:ea typeface="Arial"/>
-              <a:cs typeface="Arial"/>
-              <a:sym typeface="Arial"/>
-            </a:endParaRPr>
-          </a:p>
-        </p:txBody>
-      </p:sp>
-      <p:sp>
-        <p:nvSpPr>
-          <p:cNvPr id="599" name="Google Shape;599;p25"/>
-          <p:cNvSpPr txBox="1"/>
-          <p:nvPr/>
-        </p:nvSpPr>
-        <p:spPr>
-          <a:xfrm>
-            <a:off x="6446520" y="4297680"/>
-            <a:ext cx="5120640" cy="1463040"/>
-          </a:xfrm>
-          <a:prstGeom prst="rect">
-            <a:avLst/>
-          </a:prstGeom>
-          <a:noFill/>
-          <a:ln>
-            <a:noFill/>
-          </a:ln>
-        </p:spPr>
-        <p:txBody>
-          <a:bodyPr anchorCtr="0" anchor="t" bIns="0" lIns="0" spcFirstLastPara="1" rIns="0" wrap="square" tIns="0">
-            <a:spAutoFit/>
-          </a:bodyPr>
-          <a:lstStyle/>
-          <a:p>
-            <a:pPr indent="0" lvl="0" marL="0" marR="0" rtl="0" algn="l">
-              <a:lnSpc>
-                <a:spcPct val="135000"/>
-              </a:lnSpc>
-              <a:spcBef>
-                <a:spcPts val="0"/>
-              </a:spcBef>
-              <a:spcAft>
-                <a:spcPts val="0"/>
-              </a:spcAft>
-              <a:buClr>
-                <a:srgbClr val="000000"/>
-              </a:buClr>
-              <a:buSzPts val="1300"/>
-              <a:buFont typeface="Arial"/>
-              <a:buNone/>
-            </a:pPr>
-            <a:r>
-              <a:rPr b="1" i="0" lang="en-US" sz="1300" u="none" cap="none" strike="noStrike">
-                <a:solidFill>
-                  <a:srgbClr val="8B5CF6"/>
-                </a:solidFill>
-                <a:latin typeface="Calibri"/>
-                <a:ea typeface="Calibri"/>
-                <a:cs typeface="Calibri"/>
-                <a:sym typeface="Calibri"/>
-              </a:rPr>
-              <a:t>● </a:t>
-            </a:r>
-            <a:r>
-              <a:rPr b="0" i="0" lang="en-US" sz="1300" u="none" cap="none" strike="noStrike">
-                <a:solidFill>
-                  <a:srgbClr val="334055"/>
-                </a:solidFill>
-                <a:latin typeface="Calibri"/>
-                <a:ea typeface="Calibri"/>
-                <a:cs typeface="Calibri"/>
-                <a:sym typeface="Calibri"/>
-              </a:rPr>
-              <a:t>Preuve de concept fonctionnelle</a:t>
-            </a:r>
-            <a:endParaRPr b="0" i="0" sz="1400" u="none" cap="none" strike="noStrike">
-              <a:solidFill>
-                <a:srgbClr val="000000"/>
-              </a:solidFill>
-              <a:latin typeface="Arial"/>
-              <a:ea typeface="Arial"/>
-              <a:cs typeface="Arial"/>
-              <a:sym typeface="Arial"/>
-            </a:endParaRPr>
-          </a:p>
-          <a:p>
-            <a:pPr indent="0" lvl="0" marL="0" marR="0" rtl="0" algn="l">
-              <a:lnSpc>
-                <a:spcPct val="135000"/>
-              </a:lnSpc>
-              <a:spcBef>
-                <a:spcPts val="0"/>
-              </a:spcBef>
-              <a:spcAft>
-                <a:spcPts val="0"/>
-              </a:spcAft>
-              <a:buClr>
-                <a:srgbClr val="000000"/>
-              </a:buClr>
-              <a:buSzPts val="1300"/>
-              <a:buFont typeface="Arial"/>
-              <a:buNone/>
-            </a:pPr>
-            <a:r>
-              <a:rPr b="1" i="0" lang="en-US" sz="1300" u="none" cap="none" strike="noStrike">
-                <a:solidFill>
-                  <a:srgbClr val="8B5CF6"/>
-                </a:solidFill>
-                <a:latin typeface="Calibri"/>
-                <a:ea typeface="Calibri"/>
-                <a:cs typeface="Calibri"/>
-                <a:sym typeface="Calibri"/>
-              </a:rPr>
-              <a:t>● </a:t>
-            </a:r>
-            <a:r>
-              <a:rPr b="0" i="0" lang="en-US" sz="1300" u="none" cap="none" strike="noStrike">
-                <a:solidFill>
-                  <a:srgbClr val="334055"/>
-                </a:solidFill>
-                <a:latin typeface="Calibri"/>
-                <a:ea typeface="Calibri"/>
-                <a:cs typeface="Calibri"/>
-                <a:sym typeface="Calibri"/>
-              </a:rPr>
-              <a:t>Marge d'amélioration : campagne complète + meilleure qualité vibration</a:t>
-            </a:r>
-            <a:endParaRPr b="0" i="0" sz="1400" u="none" cap="none" strike="noStrike">
-              <a:solidFill>
-                <a:srgbClr val="000000"/>
-              </a:solidFill>
-              <a:latin typeface="Arial"/>
-              <a:ea typeface="Arial"/>
-              <a:cs typeface="Arial"/>
-              <a:sym typeface="Arial"/>
-            </a:endParaRPr>
-          </a:p>
-        </p:txBody>
-      </p:sp>
-    </p:spTree>
-  </p:cSld>
-  <p:clrMapOvr>
-    <a:masterClrMapping/>
-  </p:clrMapOvr>
-</p:sld>
-</file>
-
-<file path=ppt/slides/slide29.xml><?xml version="1.0" encoding="utf-8"?>
-<p:sld xmlns:a="http://schemas.openxmlformats.org/drawingml/2006/main" xmlns:r="http://schemas.openxmlformats.org/officeDocument/2006/relationships" xmlns:mc="http://schemas.openxmlformats.org/markup-compatibility/2006" xmlns:mv="urn:schemas-microsoft-com:mac:vml" xmlns:p="http://schemas.openxmlformats.org/presentationml/2006/main" xmlns:c="http://schemas.openxmlformats.org/drawingml/2006/chart" xmlns:dgm="http://schemas.openxmlformats.org/drawingml/2006/diagram" xmlns:o="urn:schemas-microsoft-com:office:office" xmlns:v="urn:schemas-microsoft-com:vml" xmlns:pvml="urn:schemas-microsoft-com:office:powerpoint" xmlns:com="http://schemas.openxmlformats.org/drawingml/2006/compatibility" xmlns:p14="http://schemas.microsoft.com/office/powerpoint/2010/main" xmlns:p15="http://schemas.microsoft.com/office/powerpoint/2012/main" xmlns:ahyp="http://schemas.microsoft.com/office/drawing/2018/hyperlinkcolor">
-  <p:cSld>
-    <p:spTree>
-      <p:nvGrpSpPr>
-        <p:cNvPr id="604" name="Shape 604"/>
-        <p:cNvGrpSpPr/>
-        <p:nvPr/>
-      </p:nvGrpSpPr>
-      <p:grpSpPr>
-        <a:xfrm>
-          <a:off x="0" y="0"/>
-          <a:ext cx="0" cy="0"/>
-          <a:chOff x="0" y="0"/>
-          <a:chExt cx="0" cy="0"/>
-        </a:xfrm>
-      </p:grpSpPr>
-      <p:pic>
-        <p:nvPicPr>
-          <p:cNvPr descr="grad_bg.jpg" id="605" name="Google Shape;605;p26"/>
-          <p:cNvPicPr preferRelativeResize="0"/>
-          <p:nvPr/>
-        </p:nvPicPr>
-        <p:blipFill rotWithShape="1">
-          <a:blip r:embed="rId3">
-            <a:alphaModFix/>
-          </a:blip>
-          <a:srcRect b="0" l="0" r="0" t="0"/>
-          <a:stretch/>
-        </p:blipFill>
-        <p:spPr>
-          <a:xfrm>
-            <a:off x="0" y="0"/>
-            <a:ext cx="12191695" cy="6858000"/>
-          </a:xfrm>
-          <a:prstGeom prst="rect">
-            <a:avLst/>
-          </a:prstGeom>
-          <a:noFill/>
-          <a:ln>
-            <a:noFill/>
-          </a:ln>
-        </p:spPr>
-      </p:pic>
-      <p:sp>
-        <p:nvSpPr>
-          <p:cNvPr id="606" name="Google Shape;606;p26"/>
-          <p:cNvSpPr txBox="1"/>
-          <p:nvPr/>
-        </p:nvSpPr>
-        <p:spPr>
-          <a:xfrm>
-            <a:off x="457200" y="640080"/>
-            <a:ext cx="11247120" cy="731520"/>
-          </a:xfrm>
-          <a:prstGeom prst="rect">
-            <a:avLst/>
-          </a:prstGeom>
-          <a:noFill/>
-          <a:ln>
-            <a:noFill/>
-          </a:ln>
-        </p:spPr>
-        <p:txBody>
-          <a:bodyPr anchorCtr="0" anchor="t" bIns="0" lIns="0" spcFirstLastPara="1" rIns="0" wrap="square" tIns="0">
-            <a:spAutoFit/>
-          </a:bodyPr>
-          <a:lstStyle/>
-          <a:p>
-            <a:pPr indent="0" lvl="0" marL="0" marR="0" rtl="0" algn="ctr">
-              <a:lnSpc>
-                <a:spcPct val="100000"/>
-              </a:lnSpc>
-              <a:spcBef>
-                <a:spcPts val="0"/>
-              </a:spcBef>
-              <a:spcAft>
-                <a:spcPts val="0"/>
-              </a:spcAft>
-              <a:buClr>
-                <a:srgbClr val="000000"/>
-              </a:buClr>
-              <a:buSzPts val="4000"/>
-              <a:buFont typeface="Arial"/>
-              <a:buNone/>
-            </a:pPr>
-            <a:r>
-              <a:rPr b="1" i="0" lang="en-US" sz="4000" u="none" cap="none" strike="noStrike">
-                <a:solidFill>
-                  <a:srgbClr val="FFFFFF"/>
-                </a:solidFill>
-                <a:latin typeface="Calibri"/>
-                <a:ea typeface="Calibri"/>
-                <a:cs typeface="Calibri"/>
-                <a:sym typeface="Calibri"/>
-              </a:rPr>
-              <a:t>Conclusion et perspectives</a:t>
-            </a:r>
-            <a:endParaRPr b="0" i="0" sz="1400" u="none" cap="none" strike="noStrike">
-              <a:solidFill>
-                <a:srgbClr val="000000"/>
-              </a:solidFill>
-              <a:latin typeface="Arial"/>
-              <a:ea typeface="Arial"/>
-              <a:cs typeface="Arial"/>
-              <a:sym typeface="Arial"/>
-            </a:endParaRPr>
-          </a:p>
-        </p:txBody>
-      </p:sp>
-      <p:sp>
-        <p:nvSpPr>
-          <p:cNvPr id="607" name="Google Shape;607;p26"/>
-          <p:cNvSpPr/>
-          <p:nvPr/>
-        </p:nvSpPr>
-        <p:spPr>
-          <a:xfrm>
-            <a:off x="640080" y="1828800"/>
-            <a:ext cx="5394960" cy="2103120"/>
-          </a:xfrm>
-          <a:prstGeom prst="roundRect">
-            <a:avLst>
-              <a:gd fmla="val 16667" name="adj"/>
-            </a:avLst>
-          </a:prstGeom>
-          <a:solidFill>
-            <a:srgbClr val="2A145E"/>
-          </a:solidFill>
-          <a:ln cap="flat" cmpd="sng" w="12700">
-            <a:solidFill>
-              <a:srgbClr val="22D3EE"/>
-            </a:solidFill>
-            <a:prstDash val="solid"/>
-            <a:round/>
-            <a:headEnd len="sm" w="sm" type="none"/>
-            <a:tailEnd len="sm" w="sm" type="none"/>
-          </a:ln>
-          <a:effectLst>
-            <a:outerShdw blurRad="40000" rotWithShape="0" dir="5400000" dist="23000">
-              <a:srgbClr val="000000">
-                <a:alpha val="34901"/>
-              </a:srgbClr>
-            </a:outerShdw>
-          </a:effectLst>
-        </p:spPr>
-        <p:txBody>
-          <a:bodyPr anchorCtr="0" anchor="ctr" bIns="45700" lIns="91425" spcFirstLastPara="1" rIns="91425" wrap="square" tIns="45700">
-            <a:noAutofit/>
-          </a:bodyPr>
-          <a:lstStyle/>
-          <a:p>
-            <a:pPr indent="0" lvl="0" marL="0" marR="0" rtl="0" algn="ctr">
-              <a:lnSpc>
-                <a:spcPct val="100000"/>
-              </a:lnSpc>
-              <a:spcBef>
-                <a:spcPts val="0"/>
-              </a:spcBef>
-              <a:spcAft>
-                <a:spcPts val="0"/>
-              </a:spcAft>
-              <a:buClr>
-                <a:srgbClr val="000000"/>
-              </a:buClr>
-              <a:buSzPts val="1800"/>
-              <a:buFont typeface="Arial"/>
-              <a:buNone/>
-            </a:pPr>
-            <a:r>
-              <a:t/>
-            </a:r>
-            <a:endParaRPr b="0" i="0" sz="1800" u="none" cap="none" strike="noStrike">
-              <a:solidFill>
-                <a:schemeClr val="dk1"/>
-              </a:solidFill>
-              <a:latin typeface="Calibri"/>
-              <a:ea typeface="Calibri"/>
-              <a:cs typeface="Calibri"/>
-              <a:sym typeface="Calibri"/>
-            </a:endParaRPr>
-          </a:p>
-        </p:txBody>
-      </p:sp>
-      <p:sp>
-        <p:nvSpPr>
-          <p:cNvPr id="608" name="Google Shape;608;p26"/>
-          <p:cNvSpPr txBox="1"/>
-          <p:nvPr/>
-        </p:nvSpPr>
-        <p:spPr>
-          <a:xfrm>
-            <a:off x="868680" y="1965960"/>
-            <a:ext cx="5029200" cy="365760"/>
-          </a:xfrm>
-          <a:prstGeom prst="rect">
-            <a:avLst/>
-          </a:prstGeom>
-          <a:noFill/>
-          <a:ln>
-            <a:noFill/>
-          </a:ln>
-        </p:spPr>
-        <p:txBody>
-          <a:bodyPr anchorCtr="0" anchor="t" bIns="0" lIns="0" spcFirstLastPara="1" rIns="0" wrap="square" tIns="0">
-            <a:spAutoFit/>
-          </a:bodyPr>
-          <a:lstStyle/>
-          <a:p>
-            <a:pPr indent="0" lvl="0" marL="0" marR="0" rtl="0" algn="l">
-              <a:lnSpc>
-                <a:spcPct val="100000"/>
-              </a:lnSpc>
-              <a:spcBef>
-                <a:spcPts val="0"/>
-              </a:spcBef>
-              <a:spcAft>
-                <a:spcPts val="0"/>
-              </a:spcAft>
-              <a:buClr>
-                <a:srgbClr val="000000"/>
-              </a:buClr>
-              <a:buSzPts val="1500"/>
-              <a:buFont typeface="Arial"/>
-              <a:buNone/>
-            </a:pPr>
-            <a:r>
-              <a:rPr b="1" i="0" lang="en-US" sz="1500" u="none" cap="none" strike="noStrike">
-                <a:solidFill>
-                  <a:srgbClr val="22D3EE"/>
-                </a:solidFill>
-                <a:latin typeface="Calibri"/>
-                <a:ea typeface="Calibri"/>
-                <a:cs typeface="Calibri"/>
-                <a:sym typeface="Calibri"/>
-              </a:rPr>
-              <a:t>Bilan technique</a:t>
-            </a:r>
-            <a:endParaRPr b="0" i="0" sz="1400" u="none" cap="none" strike="noStrike">
-              <a:solidFill>
-                <a:srgbClr val="000000"/>
-              </a:solidFill>
-              <a:latin typeface="Arial"/>
-              <a:ea typeface="Arial"/>
-              <a:cs typeface="Arial"/>
-              <a:sym typeface="Arial"/>
-            </a:endParaRPr>
-          </a:p>
-        </p:txBody>
-      </p:sp>
-      <p:sp>
-        <p:nvSpPr>
-          <p:cNvPr id="609" name="Google Shape;609;p26"/>
-          <p:cNvSpPr txBox="1"/>
-          <p:nvPr/>
-        </p:nvSpPr>
-        <p:spPr>
-          <a:xfrm>
-            <a:off x="868680" y="2377440"/>
-            <a:ext cx="5029200" cy="1554480"/>
-          </a:xfrm>
-          <a:prstGeom prst="rect">
-            <a:avLst/>
-          </a:prstGeom>
-          <a:noFill/>
-          <a:ln>
-            <a:noFill/>
-          </a:ln>
-        </p:spPr>
-        <p:txBody>
-          <a:bodyPr anchorCtr="0" anchor="t" bIns="0" lIns="0" spcFirstLastPara="1" rIns="0" wrap="square" tIns="0">
-            <a:spAutoFit/>
-          </a:bodyPr>
-          <a:lstStyle/>
-          <a:p>
-            <a:pPr indent="0" lvl="0" marL="0" marR="0" rtl="0" algn="l">
-              <a:lnSpc>
-                <a:spcPct val="135000"/>
-              </a:lnSpc>
-              <a:spcBef>
-                <a:spcPts val="0"/>
-              </a:spcBef>
-              <a:spcAft>
-                <a:spcPts val="0"/>
-              </a:spcAft>
-              <a:buClr>
-                <a:srgbClr val="000000"/>
-              </a:buClr>
-              <a:buSzPts val="1300"/>
-              <a:buFont typeface="Arial"/>
-              <a:buNone/>
-            </a:pPr>
-            <a:r>
-              <a:rPr b="1" i="0" lang="en-US" sz="1300" u="none" cap="none" strike="noStrike">
-                <a:solidFill>
-                  <a:srgbClr val="22D3EE"/>
-                </a:solidFill>
-                <a:latin typeface="Calibri"/>
-                <a:ea typeface="Calibri"/>
-                <a:cs typeface="Calibri"/>
-                <a:sym typeface="Calibri"/>
-              </a:rPr>
-              <a:t>● </a:t>
-            </a:r>
-            <a:r>
-              <a:rPr b="0" i="0" lang="en-US" sz="1300" u="none" cap="none" strike="noStrike">
-                <a:solidFill>
-                  <a:srgbClr val="FFFFFF"/>
-                </a:solidFill>
-                <a:latin typeface="Calibri"/>
-                <a:ea typeface="Calibri"/>
-                <a:cs typeface="Calibri"/>
-                <a:sym typeface="Calibri"/>
-              </a:rPr>
-              <a:t>Chaîne complète fonctionnelle de bout en bout</a:t>
-            </a:r>
-            <a:endParaRPr b="0" i="0" sz="1400" u="none" cap="none" strike="noStrike">
-              <a:solidFill>
-                <a:srgbClr val="000000"/>
-              </a:solidFill>
-              <a:latin typeface="Arial"/>
-              <a:ea typeface="Arial"/>
-              <a:cs typeface="Arial"/>
-              <a:sym typeface="Arial"/>
-            </a:endParaRPr>
-          </a:p>
-          <a:p>
-            <a:pPr indent="0" lvl="0" marL="0" marR="0" rtl="0" algn="l">
-              <a:lnSpc>
-                <a:spcPct val="135000"/>
-              </a:lnSpc>
-              <a:spcBef>
-                <a:spcPts val="0"/>
-              </a:spcBef>
-              <a:spcAft>
-                <a:spcPts val="0"/>
-              </a:spcAft>
-              <a:buClr>
-                <a:srgbClr val="000000"/>
-              </a:buClr>
-              <a:buSzPts val="1300"/>
-              <a:buFont typeface="Arial"/>
-              <a:buNone/>
-            </a:pPr>
-            <a:r>
-              <a:rPr b="1" i="0" lang="en-US" sz="1300" u="none" cap="none" strike="noStrike">
-                <a:solidFill>
-                  <a:srgbClr val="22D3EE"/>
-                </a:solidFill>
-                <a:latin typeface="Calibri"/>
-                <a:ea typeface="Calibri"/>
-                <a:cs typeface="Calibri"/>
-                <a:sym typeface="Calibri"/>
-              </a:rPr>
-              <a:t>● </a:t>
-            </a:r>
-            <a:r>
-              <a:rPr b="0" i="0" lang="en-US" sz="1300" u="none" cap="none" strike="noStrike">
-                <a:solidFill>
-                  <a:srgbClr val="FFFFFF"/>
-                </a:solidFill>
-                <a:latin typeface="Calibri"/>
-                <a:ea typeface="Calibri"/>
-                <a:cs typeface="Calibri"/>
-                <a:sym typeface="Calibri"/>
-              </a:rPr>
-              <a:t>Modèle IA défendable (MAE 11,2 %)</a:t>
-            </a:r>
-            <a:endParaRPr b="0" i="0" sz="1400" u="none" cap="none" strike="noStrike">
-              <a:solidFill>
-                <a:srgbClr val="000000"/>
-              </a:solidFill>
-              <a:latin typeface="Arial"/>
-              <a:ea typeface="Arial"/>
-              <a:cs typeface="Arial"/>
-              <a:sym typeface="Arial"/>
-            </a:endParaRPr>
-          </a:p>
-          <a:p>
-            <a:pPr indent="0" lvl="0" marL="0" marR="0" rtl="0" algn="l">
-              <a:lnSpc>
-                <a:spcPct val="135000"/>
-              </a:lnSpc>
-              <a:spcBef>
-                <a:spcPts val="0"/>
-              </a:spcBef>
-              <a:spcAft>
-                <a:spcPts val="0"/>
-              </a:spcAft>
-              <a:buClr>
-                <a:srgbClr val="000000"/>
-              </a:buClr>
-              <a:buSzPts val="1300"/>
-              <a:buFont typeface="Arial"/>
-              <a:buNone/>
-            </a:pPr>
-            <a:r>
-              <a:rPr b="1" i="0" lang="en-US" sz="1300" u="none" cap="none" strike="noStrike">
-                <a:solidFill>
-                  <a:srgbClr val="22D3EE"/>
-                </a:solidFill>
-                <a:latin typeface="Calibri"/>
-                <a:ea typeface="Calibri"/>
-                <a:cs typeface="Calibri"/>
-                <a:sym typeface="Calibri"/>
-              </a:rPr>
-              <a:t>● </a:t>
-            </a:r>
-            <a:r>
-              <a:rPr b="0" i="0" lang="en-US" sz="1300" u="none" cap="none" strike="noStrike">
-                <a:solidFill>
-                  <a:srgbClr val="FFFFFF"/>
-                </a:solidFill>
-                <a:latin typeface="Calibri"/>
-                <a:ea typeface="Calibri"/>
-                <a:cs typeface="Calibri"/>
-                <a:sym typeface="Calibri"/>
-              </a:rPr>
-              <a:t>Décisions d'ingénierie documentées</a:t>
-            </a:r>
-            <a:endParaRPr b="0" i="0" sz="1400" u="none" cap="none" strike="noStrike">
-              <a:solidFill>
-                <a:srgbClr val="000000"/>
-              </a:solidFill>
-              <a:latin typeface="Arial"/>
-              <a:ea typeface="Arial"/>
-              <a:cs typeface="Arial"/>
-              <a:sym typeface="Arial"/>
-            </a:endParaRPr>
-          </a:p>
-        </p:txBody>
-      </p:sp>
-      <p:sp>
-        <p:nvSpPr>
-          <p:cNvPr id="610" name="Google Shape;610;p26"/>
-          <p:cNvSpPr/>
-          <p:nvPr/>
-        </p:nvSpPr>
-        <p:spPr>
-          <a:xfrm>
-            <a:off x="6126480" y="1828800"/>
-            <a:ext cx="5394960" cy="2103120"/>
-          </a:xfrm>
-          <a:prstGeom prst="roundRect">
-            <a:avLst>
-              <a:gd fmla="val 16667" name="adj"/>
-            </a:avLst>
-          </a:prstGeom>
-          <a:solidFill>
-            <a:srgbClr val="2A145E"/>
-          </a:solidFill>
-          <a:ln cap="flat" cmpd="sng" w="12700">
-            <a:solidFill>
-              <a:srgbClr val="E879F9"/>
-            </a:solidFill>
-            <a:prstDash val="solid"/>
-            <a:round/>
-            <a:headEnd len="sm" w="sm" type="none"/>
-            <a:tailEnd len="sm" w="sm" type="none"/>
-          </a:ln>
-          <a:effectLst>
-            <a:outerShdw blurRad="40000" rotWithShape="0" dir="5400000" dist="23000">
-              <a:srgbClr val="000000">
-                <a:alpha val="34901"/>
-              </a:srgbClr>
-            </a:outerShdw>
-          </a:effectLst>
-        </p:spPr>
-        <p:txBody>
-          <a:bodyPr anchorCtr="0" anchor="ctr" bIns="45700" lIns="91425" spcFirstLastPara="1" rIns="91425" wrap="square" tIns="45700">
-            <a:noAutofit/>
-          </a:bodyPr>
-          <a:lstStyle/>
-          <a:p>
-            <a:pPr indent="0" lvl="0" marL="0" marR="0" rtl="0" algn="ctr">
-              <a:lnSpc>
-                <a:spcPct val="100000"/>
-              </a:lnSpc>
-              <a:spcBef>
-                <a:spcPts val="0"/>
-              </a:spcBef>
-              <a:spcAft>
-                <a:spcPts val="0"/>
-              </a:spcAft>
-              <a:buClr>
-                <a:srgbClr val="000000"/>
-              </a:buClr>
-              <a:buSzPts val="1800"/>
-              <a:buFont typeface="Arial"/>
-              <a:buNone/>
-            </a:pPr>
-            <a:r>
-              <a:t/>
-            </a:r>
-            <a:endParaRPr b="0" i="0" sz="1800" u="none" cap="none" strike="noStrike">
-              <a:solidFill>
-                <a:schemeClr val="dk1"/>
-              </a:solidFill>
-              <a:latin typeface="Calibri"/>
-              <a:ea typeface="Calibri"/>
-              <a:cs typeface="Calibri"/>
-              <a:sym typeface="Calibri"/>
-            </a:endParaRPr>
-          </a:p>
-        </p:txBody>
-      </p:sp>
-      <p:sp>
-        <p:nvSpPr>
-          <p:cNvPr id="611" name="Google Shape;611;p26"/>
-          <p:cNvSpPr txBox="1"/>
-          <p:nvPr/>
-        </p:nvSpPr>
-        <p:spPr>
-          <a:xfrm>
-            <a:off x="6355080" y="1965960"/>
-            <a:ext cx="5029200" cy="365760"/>
-          </a:xfrm>
-          <a:prstGeom prst="rect">
-            <a:avLst/>
-          </a:prstGeom>
-          <a:noFill/>
-          <a:ln>
-            <a:noFill/>
-          </a:ln>
-        </p:spPr>
-        <p:txBody>
-          <a:bodyPr anchorCtr="0" anchor="t" bIns="0" lIns="0" spcFirstLastPara="1" rIns="0" wrap="square" tIns="0">
-            <a:spAutoFit/>
-          </a:bodyPr>
-          <a:lstStyle/>
-          <a:p>
-            <a:pPr indent="0" lvl="0" marL="0" marR="0" rtl="0" algn="l">
-              <a:lnSpc>
-                <a:spcPct val="100000"/>
-              </a:lnSpc>
-              <a:spcBef>
-                <a:spcPts val="0"/>
-              </a:spcBef>
-              <a:spcAft>
-                <a:spcPts val="0"/>
-              </a:spcAft>
-              <a:buClr>
-                <a:srgbClr val="000000"/>
-              </a:buClr>
-              <a:buSzPts val="1500"/>
-              <a:buFont typeface="Arial"/>
-              <a:buNone/>
-            </a:pPr>
-            <a:r>
-              <a:rPr b="1" i="0" lang="en-US" sz="1500" u="none" cap="none" strike="noStrike">
-                <a:solidFill>
-                  <a:srgbClr val="E879F9"/>
-                </a:solidFill>
-                <a:latin typeface="Calibri"/>
-                <a:ea typeface="Calibri"/>
-                <a:cs typeface="Calibri"/>
-                <a:sym typeface="Calibri"/>
-              </a:rPr>
-              <a:t>Perspectives</a:t>
-            </a:r>
-            <a:endParaRPr b="0" i="0" sz="1400" u="none" cap="none" strike="noStrike">
-              <a:solidFill>
-                <a:srgbClr val="000000"/>
-              </a:solidFill>
-              <a:latin typeface="Arial"/>
-              <a:ea typeface="Arial"/>
-              <a:cs typeface="Arial"/>
-              <a:sym typeface="Arial"/>
-            </a:endParaRPr>
-          </a:p>
-        </p:txBody>
-      </p:sp>
-      <p:sp>
-        <p:nvSpPr>
-          <p:cNvPr id="612" name="Google Shape;612;p26"/>
-          <p:cNvSpPr txBox="1"/>
-          <p:nvPr/>
-        </p:nvSpPr>
-        <p:spPr>
-          <a:xfrm>
-            <a:off x="6355080" y="2377440"/>
-            <a:ext cx="5029200" cy="1554480"/>
-          </a:xfrm>
-          <a:prstGeom prst="rect">
-            <a:avLst/>
-          </a:prstGeom>
-          <a:noFill/>
-          <a:ln>
-            <a:noFill/>
-          </a:ln>
-        </p:spPr>
-        <p:txBody>
-          <a:bodyPr anchorCtr="0" anchor="t" bIns="0" lIns="0" spcFirstLastPara="1" rIns="0" wrap="square" tIns="0">
-            <a:spAutoFit/>
-          </a:bodyPr>
-          <a:lstStyle/>
-          <a:p>
-            <a:pPr indent="0" lvl="0" marL="0" marR="0" rtl="0" algn="l">
-              <a:lnSpc>
-                <a:spcPct val="135000"/>
-              </a:lnSpc>
-              <a:spcBef>
-                <a:spcPts val="0"/>
-              </a:spcBef>
-              <a:spcAft>
-                <a:spcPts val="0"/>
-              </a:spcAft>
-              <a:buClr>
-                <a:srgbClr val="000000"/>
-              </a:buClr>
-              <a:buSzPts val="1300"/>
-              <a:buFont typeface="Arial"/>
-              <a:buNone/>
-            </a:pPr>
-            <a:r>
-              <a:rPr b="1" i="0" lang="en-US" sz="1300" u="none" cap="none" strike="noStrike">
-                <a:solidFill>
-                  <a:srgbClr val="E879F9"/>
-                </a:solidFill>
-                <a:latin typeface="Calibri"/>
-                <a:ea typeface="Calibri"/>
-                <a:cs typeface="Calibri"/>
-                <a:sym typeface="Calibri"/>
-              </a:rPr>
-              <a:t>● </a:t>
-            </a:r>
-            <a:r>
-              <a:rPr b="0" i="0" lang="en-US" sz="1300" u="none" cap="none" strike="noStrike">
-                <a:solidFill>
-                  <a:srgbClr val="FFFFFF"/>
-                </a:solidFill>
-                <a:latin typeface="Calibri"/>
-                <a:ea typeface="Calibri"/>
-                <a:cs typeface="Calibri"/>
-                <a:sym typeface="Calibri"/>
-              </a:rPr>
-              <a:t>Compléter la campagne 110 captures</a:t>
-            </a:r>
-            <a:endParaRPr b="0" i="0" sz="1400" u="none" cap="none" strike="noStrike">
-              <a:solidFill>
-                <a:srgbClr val="000000"/>
-              </a:solidFill>
-              <a:latin typeface="Arial"/>
-              <a:ea typeface="Arial"/>
-              <a:cs typeface="Arial"/>
-              <a:sym typeface="Arial"/>
-            </a:endParaRPr>
-          </a:p>
-          <a:p>
-            <a:pPr indent="0" lvl="0" marL="0" marR="0" rtl="0" algn="l">
-              <a:lnSpc>
-                <a:spcPct val="135000"/>
-              </a:lnSpc>
-              <a:spcBef>
-                <a:spcPts val="0"/>
-              </a:spcBef>
-              <a:spcAft>
-                <a:spcPts val="0"/>
-              </a:spcAft>
-              <a:buClr>
-                <a:srgbClr val="000000"/>
-              </a:buClr>
-              <a:buSzPts val="1300"/>
-              <a:buFont typeface="Arial"/>
-              <a:buNone/>
-            </a:pPr>
-            <a:r>
-              <a:rPr b="1" i="0" lang="en-US" sz="1300" u="none" cap="none" strike="noStrike">
-                <a:solidFill>
-                  <a:srgbClr val="E879F9"/>
-                </a:solidFill>
-                <a:latin typeface="Calibri"/>
-                <a:ea typeface="Calibri"/>
-                <a:cs typeface="Calibri"/>
-                <a:sym typeface="Calibri"/>
-              </a:rPr>
-              <a:t>● </a:t>
-            </a:r>
-            <a:r>
-              <a:rPr b="0" i="0" lang="en-US" sz="1300" u="none" cap="none" strike="noStrike">
-                <a:solidFill>
-                  <a:srgbClr val="FFFFFF"/>
-                </a:solidFill>
-                <a:latin typeface="Calibri"/>
-                <a:ea typeface="Calibri"/>
-                <a:cs typeface="Calibri"/>
-                <a:sym typeface="Calibri"/>
-              </a:rPr>
-              <a:t>Ajouter capteur courant → mesure directe puissance</a:t>
-            </a:r>
-            <a:endParaRPr b="0" i="0" sz="1400" u="none" cap="none" strike="noStrike">
-              <a:solidFill>
-                <a:srgbClr val="000000"/>
-              </a:solidFill>
-              <a:latin typeface="Arial"/>
-              <a:ea typeface="Arial"/>
-              <a:cs typeface="Arial"/>
-              <a:sym typeface="Arial"/>
-            </a:endParaRPr>
-          </a:p>
-          <a:p>
-            <a:pPr indent="0" lvl="0" marL="0" marR="0" rtl="0" algn="l">
-              <a:lnSpc>
-                <a:spcPct val="135000"/>
-              </a:lnSpc>
-              <a:spcBef>
-                <a:spcPts val="0"/>
-              </a:spcBef>
-              <a:spcAft>
-                <a:spcPts val="0"/>
-              </a:spcAft>
-              <a:buClr>
-                <a:srgbClr val="000000"/>
-              </a:buClr>
-              <a:buSzPts val="1300"/>
-              <a:buFont typeface="Arial"/>
-              <a:buNone/>
-            </a:pPr>
-            <a:r>
-              <a:rPr b="1" i="0" lang="en-US" sz="1300" u="none" cap="none" strike="noStrike">
-                <a:solidFill>
-                  <a:srgbClr val="E879F9"/>
-                </a:solidFill>
-                <a:latin typeface="Calibri"/>
-                <a:ea typeface="Calibri"/>
-                <a:cs typeface="Calibri"/>
-                <a:sym typeface="Calibri"/>
-              </a:rPr>
-              <a:t>● </a:t>
-            </a:r>
-            <a:r>
-              <a:rPr b="0" i="0" lang="en-US" sz="1300" u="none" cap="none" strike="noStrike">
-                <a:solidFill>
-                  <a:srgbClr val="FFFFFF"/>
-                </a:solidFill>
-                <a:latin typeface="Calibri"/>
-                <a:ea typeface="Calibri"/>
-                <a:cs typeface="Calibri"/>
-                <a:sym typeface="Calibri"/>
-              </a:rPr>
-              <a:t>Comparer mono-modalité vs double branche</a:t>
-            </a:r>
-            <a:endParaRPr b="0" i="0" sz="1400" u="none" cap="none" strike="noStrike">
-              <a:solidFill>
-                <a:srgbClr val="000000"/>
-              </a:solidFill>
-              <a:latin typeface="Arial"/>
-              <a:ea typeface="Arial"/>
-              <a:cs typeface="Arial"/>
-              <a:sym typeface="Arial"/>
-            </a:endParaRPr>
-          </a:p>
-        </p:txBody>
-      </p:sp>
-      <p:sp>
-        <p:nvSpPr>
-          <p:cNvPr id="613" name="Google Shape;613;p26"/>
-          <p:cNvSpPr txBox="1"/>
-          <p:nvPr/>
-        </p:nvSpPr>
-        <p:spPr>
-          <a:xfrm>
-            <a:off x="457200" y="4389120"/>
-            <a:ext cx="11247120" cy="731520"/>
-          </a:xfrm>
-          <a:prstGeom prst="rect">
-            <a:avLst/>
-          </a:prstGeom>
-          <a:noFill/>
-          <a:ln>
-            <a:noFill/>
-          </a:ln>
-        </p:spPr>
-        <p:txBody>
-          <a:bodyPr anchorCtr="0" anchor="t" bIns="0" lIns="0" spcFirstLastPara="1" rIns="0" wrap="square" tIns="0">
-            <a:spAutoFit/>
-          </a:bodyPr>
-          <a:lstStyle/>
-          <a:p>
-            <a:pPr indent="0" lvl="0" marL="0" marR="0" rtl="0" algn="ctr">
-              <a:lnSpc>
-                <a:spcPct val="100000"/>
-              </a:lnSpc>
-              <a:spcBef>
-                <a:spcPts val="0"/>
-              </a:spcBef>
-              <a:spcAft>
-                <a:spcPts val="0"/>
-              </a:spcAft>
-              <a:buClr>
-                <a:srgbClr val="000000"/>
-              </a:buClr>
-              <a:buSzPts val="3600"/>
-              <a:buFont typeface="Arial"/>
-              <a:buNone/>
-            </a:pPr>
-            <a:r>
-              <a:rPr b="1" i="0" lang="en-US" sz="3600" u="none" cap="none" strike="noStrike">
-                <a:solidFill>
-                  <a:srgbClr val="FFFFFF"/>
-                </a:solidFill>
-                <a:latin typeface="Calibri"/>
-                <a:ea typeface="Calibri"/>
-                <a:cs typeface="Calibri"/>
-                <a:sym typeface="Calibri"/>
-              </a:rPr>
-              <a:t>Merci pour votre attention</a:t>
-            </a:r>
-            <a:endParaRPr b="0" i="0" sz="1400" u="none" cap="none" strike="noStrike">
-              <a:solidFill>
-                <a:srgbClr val="000000"/>
-              </a:solidFill>
-              <a:latin typeface="Arial"/>
-              <a:ea typeface="Arial"/>
-              <a:cs typeface="Arial"/>
-              <a:sym typeface="Arial"/>
-            </a:endParaRPr>
-          </a:p>
-        </p:txBody>
-      </p:sp>
-      <p:sp>
-        <p:nvSpPr>
-          <p:cNvPr id="614" name="Google Shape;614;p26"/>
-          <p:cNvSpPr txBox="1"/>
-          <p:nvPr/>
-        </p:nvSpPr>
-        <p:spPr>
-          <a:xfrm>
-            <a:off x="457200" y="5120640"/>
-            <a:ext cx="11247120" cy="548640"/>
-          </a:xfrm>
-          <a:prstGeom prst="rect">
-            <a:avLst/>
-          </a:prstGeom>
-          <a:noFill/>
-          <a:ln>
-            <a:noFill/>
-          </a:ln>
-        </p:spPr>
-        <p:txBody>
-          <a:bodyPr anchorCtr="0" anchor="t" bIns="0" lIns="0" spcFirstLastPara="1" rIns="0" wrap="square" tIns="0">
-            <a:spAutoFit/>
-          </a:bodyPr>
-          <a:lstStyle/>
-          <a:p>
-            <a:pPr indent="0" lvl="0" marL="0" marR="0" rtl="0" algn="ctr">
-              <a:lnSpc>
-                <a:spcPct val="100000"/>
-              </a:lnSpc>
-              <a:spcBef>
-                <a:spcPts val="0"/>
-              </a:spcBef>
-              <a:spcAft>
-                <a:spcPts val="0"/>
-              </a:spcAft>
-              <a:buClr>
-                <a:srgbClr val="000000"/>
-              </a:buClr>
-              <a:buSzPts val="2200"/>
-              <a:buFont typeface="Arial"/>
-              <a:buNone/>
-            </a:pPr>
-            <a:r>
-              <a:rPr b="0" i="1" lang="en-US" sz="2200" u="none" cap="none" strike="noStrike">
-                <a:solidFill>
-                  <a:srgbClr val="C4B5FD"/>
-                </a:solidFill>
-                <a:latin typeface="Calibri"/>
-                <a:ea typeface="Calibri"/>
-                <a:cs typeface="Calibri"/>
-                <a:sym typeface="Calibri"/>
-              </a:rPr>
-              <a:t>Place aux questions</a:t>
-            </a:r>
-            <a:endParaRPr b="0" i="0" sz="1400" u="none" cap="none" strike="noStrike">
-              <a:solidFill>
-                <a:srgbClr val="000000"/>
-              </a:solidFill>
-              <a:latin typeface="Arial"/>
-              <a:ea typeface="Arial"/>
-              <a:cs typeface="Arial"/>
-              <a:sym typeface="Arial"/>
-            </a:endParaRPr>
-          </a:p>
-        </p:txBody>
-      </p:sp>
-      <p:sp>
-        <p:nvSpPr>
-          <p:cNvPr id="615" name="Google Shape;615;p26"/>
-          <p:cNvSpPr/>
-          <p:nvPr/>
-        </p:nvSpPr>
-        <p:spPr>
-          <a:xfrm>
-            <a:off x="5730087" y="6035040"/>
-            <a:ext cx="109728" cy="109728"/>
-          </a:xfrm>
-          <a:prstGeom prst="ellipse">
-            <a:avLst/>
-          </a:prstGeom>
-          <a:solidFill>
-            <a:srgbClr val="22D3EE"/>
-          </a:solidFill>
-          <a:ln>
-            <a:noFill/>
-          </a:ln>
-          <a:effectLst>
-            <a:outerShdw blurRad="40000" rotWithShape="0" dir="5400000" dist="23000">
-              <a:srgbClr val="000000">
-                <a:alpha val="34901"/>
-              </a:srgbClr>
-            </a:outerShdw>
-          </a:effectLst>
-        </p:spPr>
-        <p:txBody>
-          <a:bodyPr anchorCtr="0" anchor="ctr" bIns="45700" lIns="91425" spcFirstLastPara="1" rIns="91425" wrap="square" tIns="45700">
-            <a:noAutofit/>
-          </a:bodyPr>
-          <a:lstStyle/>
-          <a:p>
-            <a:pPr indent="0" lvl="0" marL="0" marR="0" rtl="0" algn="ctr">
-              <a:lnSpc>
-                <a:spcPct val="100000"/>
-              </a:lnSpc>
-              <a:spcBef>
-                <a:spcPts val="0"/>
-              </a:spcBef>
-              <a:spcAft>
-                <a:spcPts val="0"/>
-              </a:spcAft>
-              <a:buClr>
-                <a:srgbClr val="000000"/>
-              </a:buClr>
-              <a:buSzPts val="1800"/>
-              <a:buFont typeface="Arial"/>
-              <a:buNone/>
-            </a:pPr>
-            <a:r>
-              <a:t/>
-            </a:r>
-            <a:endParaRPr b="0" i="0" sz="1800" u="none" cap="none" strike="noStrike">
-              <a:solidFill>
-                <a:schemeClr val="dk1"/>
-              </a:solidFill>
-              <a:latin typeface="Calibri"/>
-              <a:ea typeface="Calibri"/>
-              <a:cs typeface="Calibri"/>
-              <a:sym typeface="Calibri"/>
-            </a:endParaRPr>
-          </a:p>
-        </p:txBody>
-      </p:sp>
-      <p:sp>
-        <p:nvSpPr>
-          <p:cNvPr id="616" name="Google Shape;616;p26"/>
-          <p:cNvSpPr/>
-          <p:nvPr/>
-        </p:nvSpPr>
-        <p:spPr>
-          <a:xfrm>
-            <a:off x="6040983" y="6035040"/>
-            <a:ext cx="109728" cy="109728"/>
-          </a:xfrm>
-          <a:prstGeom prst="ellipse">
-            <a:avLst/>
-          </a:prstGeom>
-          <a:solidFill>
-            <a:srgbClr val="8B5CF6"/>
-          </a:solidFill>
-          <a:ln>
-            <a:noFill/>
-          </a:ln>
-          <a:effectLst>
-            <a:outerShdw blurRad="40000" rotWithShape="0" dir="5400000" dist="23000">
-              <a:srgbClr val="000000">
-                <a:alpha val="34901"/>
-              </a:srgbClr>
-            </a:outerShdw>
-          </a:effectLst>
-        </p:spPr>
-        <p:txBody>
-          <a:bodyPr anchorCtr="0" anchor="ctr" bIns="45700" lIns="91425" spcFirstLastPara="1" rIns="91425" wrap="square" tIns="45700">
-            <a:noAutofit/>
-          </a:bodyPr>
-          <a:lstStyle/>
-          <a:p>
-            <a:pPr indent="0" lvl="0" marL="0" marR="0" rtl="0" algn="ctr">
-              <a:lnSpc>
-                <a:spcPct val="100000"/>
-              </a:lnSpc>
-              <a:spcBef>
-                <a:spcPts val="0"/>
-              </a:spcBef>
-              <a:spcAft>
-                <a:spcPts val="0"/>
-              </a:spcAft>
-              <a:buClr>
-                <a:srgbClr val="000000"/>
-              </a:buClr>
-              <a:buSzPts val="1800"/>
-              <a:buFont typeface="Arial"/>
-              <a:buNone/>
-            </a:pPr>
-            <a:r>
-              <a:t/>
-            </a:r>
-            <a:endParaRPr b="0" i="0" sz="1800" u="none" cap="none" strike="noStrike">
-              <a:solidFill>
-                <a:schemeClr val="dk1"/>
-              </a:solidFill>
-              <a:latin typeface="Calibri"/>
-              <a:ea typeface="Calibri"/>
-              <a:cs typeface="Calibri"/>
-              <a:sym typeface="Calibri"/>
-            </a:endParaRPr>
-          </a:p>
-        </p:txBody>
-      </p:sp>
-      <p:sp>
-        <p:nvSpPr>
-          <p:cNvPr id="617" name="Google Shape;617;p26"/>
-          <p:cNvSpPr/>
-          <p:nvPr/>
-        </p:nvSpPr>
-        <p:spPr>
-          <a:xfrm>
-            <a:off x="6351879" y="6035040"/>
-            <a:ext cx="109728" cy="109728"/>
-          </a:xfrm>
-          <a:prstGeom prst="ellipse">
-            <a:avLst/>
-          </a:prstGeom>
-          <a:solidFill>
-            <a:srgbClr val="E879F9"/>
-          </a:solidFill>
-          <a:ln>
-            <a:noFill/>
-          </a:ln>
-          <a:effectLst>
-            <a:outerShdw blurRad="40000" rotWithShape="0" dir="5400000" dist="23000">
-              <a:srgbClr val="000000">
-                <a:alpha val="34901"/>
-              </a:srgbClr>
-            </a:outerShdw>
-          </a:effectLst>
-        </p:spPr>
-        <p:txBody>
-          <a:bodyPr anchorCtr="0" anchor="ctr" bIns="45700" lIns="91425" spcFirstLastPara="1" rIns="91425" wrap="square" tIns="45700">
-            <a:noAutofit/>
-          </a:bodyPr>
-          <a:lstStyle/>
-          <a:p>
-            <a:pPr indent="0" lvl="0" marL="0" marR="0" rtl="0" algn="ctr">
-              <a:lnSpc>
-                <a:spcPct val="100000"/>
-              </a:lnSpc>
-              <a:spcBef>
-                <a:spcPts val="0"/>
-              </a:spcBef>
-              <a:spcAft>
-                <a:spcPts val="0"/>
-              </a:spcAft>
-              <a:buClr>
-                <a:srgbClr val="000000"/>
-              </a:buClr>
-              <a:buSzPts val="1800"/>
-              <a:buFont typeface="Arial"/>
-              <a:buNone/>
-            </a:pPr>
-            <a:r>
-              <a:t/>
-            </a:r>
-            <a:endParaRPr b="0" i="0" sz="1800" u="none" cap="none" strike="noStrike">
-              <a:solidFill>
-                <a:schemeClr val="dk1"/>
-              </a:solidFill>
-              <a:latin typeface="Calibri"/>
-              <a:ea typeface="Calibri"/>
-              <a:cs typeface="Calibri"/>
-              <a:sym typeface="Calibri"/>
             </a:endParaRPr>
           </a:p>
         </p:txBody>
@@ -43209,6 +42717,2252 @@
 </p:sld>
 </file>
 
+<file path=ppt/slides/slide30.xml><?xml version="1.0" encoding="utf-8"?>
+<p:sld xmlns:a="http://schemas.openxmlformats.org/drawingml/2006/main" xmlns:r="http://schemas.openxmlformats.org/officeDocument/2006/relationships" xmlns:mc="http://schemas.openxmlformats.org/markup-compatibility/2006" xmlns:mv="urn:schemas-microsoft-com:mac:vml" xmlns:p="http://schemas.openxmlformats.org/presentationml/2006/main" xmlns:c="http://schemas.openxmlformats.org/drawingml/2006/chart" xmlns:dgm="http://schemas.openxmlformats.org/drawingml/2006/diagram" xmlns:o="urn:schemas-microsoft-com:office:office" xmlns:v="urn:schemas-microsoft-com:vml" xmlns:pvml="urn:schemas-microsoft-com:office:powerpoint" xmlns:com="http://schemas.openxmlformats.org/drawingml/2006/compatibility" xmlns:p14="http://schemas.microsoft.com/office/powerpoint/2010/main" xmlns:p15="http://schemas.microsoft.com/office/powerpoint/2012/main" xmlns:ahyp="http://schemas.microsoft.com/office/drawing/2018/hyperlinkcolor">
+  <p:cSld>
+    <p:spTree>
+      <p:nvGrpSpPr>
+        <p:cNvPr id="583" name="Shape 583"/>
+        <p:cNvGrpSpPr/>
+        <p:nvPr/>
+      </p:nvGrpSpPr>
+      <p:grpSpPr>
+        <a:xfrm>
+          <a:off x="0" y="0"/>
+          <a:ext cx="0" cy="0"/>
+          <a:chOff x="0" y="0"/>
+          <a:chExt cx="0" cy="0"/>
+        </a:xfrm>
+      </p:grpSpPr>
+      <p:sp>
+        <p:nvSpPr>
+          <p:cNvPr id="584" name="Google Shape;584;p25"/>
+          <p:cNvSpPr/>
+          <p:nvPr/>
+        </p:nvSpPr>
+        <p:spPr>
+          <a:xfrm>
+            <a:off x="0" y="0"/>
+            <a:ext cx="12191695" cy="6858000"/>
+          </a:xfrm>
+          <a:prstGeom prst="rect">
+            <a:avLst/>
+          </a:prstGeom>
+          <a:solidFill>
+            <a:srgbClr val="FAFAFC"/>
+          </a:solidFill>
+          <a:ln>
+            <a:noFill/>
+          </a:ln>
+        </p:spPr>
+        <p:txBody>
+          <a:bodyPr anchorCtr="0" anchor="ctr" bIns="45700" lIns="91425" spcFirstLastPara="1" rIns="91425" wrap="square" tIns="45700">
+            <a:noAutofit/>
+          </a:bodyPr>
+          <a:lstStyle/>
+          <a:p>
+            <a:pPr indent="0" lvl="0" marL="0" marR="0" rtl="0" algn="ctr">
+              <a:lnSpc>
+                <a:spcPct val="100000"/>
+              </a:lnSpc>
+              <a:spcBef>
+                <a:spcPts val="0"/>
+              </a:spcBef>
+              <a:spcAft>
+                <a:spcPts val="0"/>
+              </a:spcAft>
+              <a:buClr>
+                <a:srgbClr val="000000"/>
+              </a:buClr>
+              <a:buSzPts val="1800"/>
+              <a:buFont typeface="Arial"/>
+              <a:buNone/>
+            </a:pPr>
+            <a:r>
+              <a:t/>
+            </a:r>
+            <a:endParaRPr b="0" i="0" sz="1800" u="none" cap="none" strike="noStrike">
+              <a:solidFill>
+                <a:schemeClr val="dk1"/>
+              </a:solidFill>
+              <a:latin typeface="Calibri"/>
+              <a:ea typeface="Calibri"/>
+              <a:cs typeface="Calibri"/>
+              <a:sym typeface="Calibri"/>
+            </a:endParaRPr>
+          </a:p>
+        </p:txBody>
+      </p:sp>
+      <p:sp>
+        <p:nvSpPr>
+          <p:cNvPr id="585" name="Google Shape;585;p25"/>
+          <p:cNvSpPr/>
+          <p:nvPr/>
+        </p:nvSpPr>
+        <p:spPr>
+          <a:xfrm>
+            <a:off x="502920" y="530352"/>
+            <a:ext cx="228600" cy="228600"/>
+          </a:xfrm>
+          <a:prstGeom prst="ellipse">
+            <a:avLst/>
+          </a:prstGeom>
+          <a:solidFill>
+            <a:srgbClr val="8B5CF6"/>
+          </a:solidFill>
+          <a:ln>
+            <a:noFill/>
+          </a:ln>
+          <a:effectLst>
+            <a:outerShdw blurRad="40000" rotWithShape="0" dir="5400000" dist="23000">
+              <a:srgbClr val="000000">
+                <a:alpha val="34901"/>
+              </a:srgbClr>
+            </a:outerShdw>
+          </a:effectLst>
+        </p:spPr>
+        <p:txBody>
+          <a:bodyPr anchorCtr="0" anchor="ctr" bIns="45700" lIns="91425" spcFirstLastPara="1" rIns="91425" wrap="square" tIns="45700">
+            <a:noAutofit/>
+          </a:bodyPr>
+          <a:lstStyle/>
+          <a:p>
+            <a:pPr indent="0" lvl="0" marL="0" marR="0" rtl="0" algn="ctr">
+              <a:lnSpc>
+                <a:spcPct val="100000"/>
+              </a:lnSpc>
+              <a:spcBef>
+                <a:spcPts val="0"/>
+              </a:spcBef>
+              <a:spcAft>
+                <a:spcPts val="0"/>
+              </a:spcAft>
+              <a:buClr>
+                <a:srgbClr val="000000"/>
+              </a:buClr>
+              <a:buSzPts val="1800"/>
+              <a:buFont typeface="Arial"/>
+              <a:buNone/>
+            </a:pPr>
+            <a:r>
+              <a:t/>
+            </a:r>
+            <a:endParaRPr b="0" i="0" sz="1800" u="none" cap="none" strike="noStrike">
+              <a:solidFill>
+                <a:schemeClr val="dk1"/>
+              </a:solidFill>
+              <a:latin typeface="Calibri"/>
+              <a:ea typeface="Calibri"/>
+              <a:cs typeface="Calibri"/>
+              <a:sym typeface="Calibri"/>
+            </a:endParaRPr>
+          </a:p>
+        </p:txBody>
+      </p:sp>
+      <p:sp>
+        <p:nvSpPr>
+          <p:cNvPr id="586" name="Google Shape;586;p25"/>
+          <p:cNvSpPr txBox="1"/>
+          <p:nvPr/>
+        </p:nvSpPr>
+        <p:spPr>
+          <a:xfrm>
+            <a:off x="914400" y="384048"/>
+            <a:ext cx="10972800" cy="640080"/>
+          </a:xfrm>
+          <a:prstGeom prst="rect">
+            <a:avLst/>
+          </a:prstGeom>
+          <a:noFill/>
+          <a:ln>
+            <a:noFill/>
+          </a:ln>
+        </p:spPr>
+        <p:txBody>
+          <a:bodyPr anchorCtr="0" anchor="t" bIns="0" lIns="0" spcFirstLastPara="1" rIns="0" wrap="square" tIns="0">
+            <a:spAutoFit/>
+          </a:bodyPr>
+          <a:lstStyle/>
+          <a:p>
+            <a:pPr indent="0" lvl="0" marL="0" marR="0" rtl="0" algn="l">
+              <a:lnSpc>
+                <a:spcPct val="100000"/>
+              </a:lnSpc>
+              <a:spcBef>
+                <a:spcPts val="0"/>
+              </a:spcBef>
+              <a:spcAft>
+                <a:spcPts val="0"/>
+              </a:spcAft>
+              <a:buClr>
+                <a:srgbClr val="000000"/>
+              </a:buClr>
+              <a:buSzPts val="3000"/>
+              <a:buFont typeface="Arial"/>
+              <a:buNone/>
+            </a:pPr>
+            <a:r>
+              <a:rPr b="1" i="0" lang="en-US" sz="3000" u="none" cap="none" strike="noStrike">
+                <a:solidFill>
+                  <a:srgbClr val="1E293B"/>
+                </a:solidFill>
+                <a:latin typeface="Calibri"/>
+                <a:ea typeface="Calibri"/>
+                <a:cs typeface="Calibri"/>
+                <a:sym typeface="Calibri"/>
+              </a:rPr>
+              <a:t>Résultats  ·  MAE 11,2 % par capture</a:t>
+            </a:r>
+            <a:endParaRPr b="0" i="0" sz="1400" u="none" cap="none" strike="noStrike">
+              <a:solidFill>
+                <a:srgbClr val="000000"/>
+              </a:solidFill>
+              <a:latin typeface="Arial"/>
+              <a:ea typeface="Arial"/>
+              <a:cs typeface="Arial"/>
+              <a:sym typeface="Arial"/>
+            </a:endParaRPr>
+          </a:p>
+        </p:txBody>
+      </p:sp>
+      <p:sp>
+        <p:nvSpPr>
+          <p:cNvPr id="587" name="Google Shape;587;p25"/>
+          <p:cNvSpPr txBox="1"/>
+          <p:nvPr/>
+        </p:nvSpPr>
+        <p:spPr>
+          <a:xfrm>
+            <a:off x="10911535" y="6492240"/>
+            <a:ext cx="914400" cy="274320"/>
+          </a:xfrm>
+          <a:prstGeom prst="rect">
+            <a:avLst/>
+          </a:prstGeom>
+          <a:noFill/>
+          <a:ln>
+            <a:noFill/>
+          </a:ln>
+        </p:spPr>
+        <p:txBody>
+          <a:bodyPr anchorCtr="0" anchor="t" bIns="0" lIns="0" spcFirstLastPara="1" rIns="0" wrap="square" tIns="0">
+            <a:spAutoFit/>
+          </a:bodyPr>
+          <a:lstStyle/>
+          <a:p>
+            <a:pPr indent="0" lvl="0" marL="0" marR="0" rtl="0" algn="r">
+              <a:lnSpc>
+                <a:spcPct val="100000"/>
+              </a:lnSpc>
+              <a:spcBef>
+                <a:spcPts val="0"/>
+              </a:spcBef>
+              <a:spcAft>
+                <a:spcPts val="0"/>
+              </a:spcAft>
+              <a:buClr>
+                <a:srgbClr val="000000"/>
+              </a:buClr>
+              <a:buSzPts val="1000"/>
+              <a:buFont typeface="Arial"/>
+              <a:buNone/>
+            </a:pPr>
+            <a:r>
+              <a:rPr b="0" i="0" lang="en-US" sz="1000" u="none" cap="none" strike="noStrike">
+                <a:solidFill>
+                  <a:srgbClr val="64748B"/>
+                </a:solidFill>
+                <a:latin typeface="Calibri"/>
+                <a:ea typeface="Calibri"/>
+                <a:cs typeface="Calibri"/>
+                <a:sym typeface="Calibri"/>
+              </a:rPr>
+              <a:t>30 / 31</a:t>
+            </a:r>
+            <a:endParaRPr b="0" i="0" sz="1400" u="none" cap="none" strike="noStrike">
+              <a:solidFill>
+                <a:srgbClr val="000000"/>
+              </a:solidFill>
+              <a:latin typeface="Arial"/>
+              <a:ea typeface="Arial"/>
+              <a:cs typeface="Arial"/>
+              <a:sym typeface="Arial"/>
+            </a:endParaRPr>
+          </a:p>
+        </p:txBody>
+      </p:sp>
+      <p:sp>
+        <p:nvSpPr>
+          <p:cNvPr id="588" name="Google Shape;588;p25"/>
+          <p:cNvSpPr txBox="1"/>
+          <p:nvPr/>
+        </p:nvSpPr>
+        <p:spPr>
+          <a:xfrm>
+            <a:off x="502920" y="6492240"/>
+            <a:ext cx="8229600" cy="274320"/>
+          </a:xfrm>
+          <a:prstGeom prst="rect">
+            <a:avLst/>
+          </a:prstGeom>
+          <a:noFill/>
+          <a:ln>
+            <a:noFill/>
+          </a:ln>
+        </p:spPr>
+        <p:txBody>
+          <a:bodyPr anchorCtr="0" anchor="t" bIns="0" lIns="0" spcFirstLastPara="1" rIns="0" wrap="square" tIns="0">
+            <a:spAutoFit/>
+          </a:bodyPr>
+          <a:lstStyle/>
+          <a:p>
+            <a:pPr indent="0" lvl="0" marL="0" marR="0" rtl="0" algn="l">
+              <a:lnSpc>
+                <a:spcPct val="100000"/>
+              </a:lnSpc>
+              <a:spcBef>
+                <a:spcPts val="0"/>
+              </a:spcBef>
+              <a:spcAft>
+                <a:spcPts val="0"/>
+              </a:spcAft>
+              <a:buClr>
+                <a:srgbClr val="000000"/>
+              </a:buClr>
+              <a:buSzPts val="1000"/>
+              <a:buFont typeface="Arial"/>
+              <a:buNone/>
+            </a:pPr>
+            <a:r>
+              <a:rPr b="0" i="0" lang="en-US" sz="1000" u="none" cap="none" strike="noStrike">
+                <a:solidFill>
+                  <a:srgbClr val="64748B"/>
+                </a:solidFill>
+                <a:latin typeface="Calibri"/>
+                <a:ea typeface="Calibri"/>
+                <a:cs typeface="Calibri"/>
+                <a:sym typeface="Calibri"/>
+              </a:rPr>
+              <a:t>BTS CIEL 2026  ·  Soutenance U6  ·  Noa Orand</a:t>
+            </a:r>
+            <a:endParaRPr b="0" i="0" sz="1400" u="none" cap="none" strike="noStrike">
+              <a:solidFill>
+                <a:srgbClr val="000000"/>
+              </a:solidFill>
+              <a:latin typeface="Arial"/>
+              <a:ea typeface="Arial"/>
+              <a:cs typeface="Arial"/>
+              <a:sym typeface="Arial"/>
+            </a:endParaRPr>
+          </a:p>
+        </p:txBody>
+      </p:sp>
+      <p:sp>
+        <p:nvSpPr>
+          <p:cNvPr id="589" name="Google Shape;589;p25"/>
+          <p:cNvSpPr/>
+          <p:nvPr/>
+        </p:nvSpPr>
+        <p:spPr>
+          <a:xfrm>
+            <a:off x="640080" y="1737360"/>
+            <a:ext cx="5303520" cy="4114800"/>
+          </a:xfrm>
+          <a:prstGeom prst="roundRect">
+            <a:avLst>
+              <a:gd fmla="val 16667" name="adj"/>
+            </a:avLst>
+          </a:prstGeom>
+          <a:solidFill>
+            <a:srgbClr val="FFFFFF"/>
+          </a:solidFill>
+          <a:ln cap="flat" cmpd="sng" w="12700">
+            <a:solidFill>
+              <a:srgbClr val="8B5CF6"/>
+            </a:solidFill>
+            <a:prstDash val="solid"/>
+            <a:round/>
+            <a:headEnd len="sm" w="sm" type="none"/>
+            <a:tailEnd len="sm" w="sm" type="none"/>
+          </a:ln>
+          <a:effectLst>
+            <a:outerShdw blurRad="40000" rotWithShape="0" dir="5400000" dist="23000">
+              <a:srgbClr val="000000">
+                <a:alpha val="34901"/>
+              </a:srgbClr>
+            </a:outerShdw>
+          </a:effectLst>
+        </p:spPr>
+        <p:txBody>
+          <a:bodyPr anchorCtr="0" anchor="ctr" bIns="45700" lIns="91425" spcFirstLastPara="1" rIns="91425" wrap="square" tIns="45700">
+            <a:noAutofit/>
+          </a:bodyPr>
+          <a:lstStyle/>
+          <a:p>
+            <a:pPr indent="0" lvl="0" marL="0" marR="0" rtl="0" algn="ctr">
+              <a:lnSpc>
+                <a:spcPct val="100000"/>
+              </a:lnSpc>
+              <a:spcBef>
+                <a:spcPts val="0"/>
+              </a:spcBef>
+              <a:spcAft>
+                <a:spcPts val="0"/>
+              </a:spcAft>
+              <a:buClr>
+                <a:srgbClr val="000000"/>
+              </a:buClr>
+              <a:buSzPts val="1800"/>
+              <a:buFont typeface="Arial"/>
+              <a:buNone/>
+            </a:pPr>
+            <a:r>
+              <a:t/>
+            </a:r>
+            <a:endParaRPr b="0" i="0" sz="1800" u="none" cap="none" strike="noStrike">
+              <a:solidFill>
+                <a:schemeClr val="dk1"/>
+              </a:solidFill>
+              <a:latin typeface="Calibri"/>
+              <a:ea typeface="Calibri"/>
+              <a:cs typeface="Calibri"/>
+              <a:sym typeface="Calibri"/>
+            </a:endParaRPr>
+          </a:p>
+        </p:txBody>
+      </p:sp>
+      <p:sp>
+        <p:nvSpPr>
+          <p:cNvPr id="590" name="Google Shape;590;p25"/>
+          <p:cNvSpPr txBox="1"/>
+          <p:nvPr/>
+        </p:nvSpPr>
+        <p:spPr>
+          <a:xfrm>
+            <a:off x="640080" y="1920240"/>
+            <a:ext cx="5303520" cy="457200"/>
+          </a:xfrm>
+          <a:prstGeom prst="rect">
+            <a:avLst/>
+          </a:prstGeom>
+          <a:noFill/>
+          <a:ln>
+            <a:noFill/>
+          </a:ln>
+        </p:spPr>
+        <p:txBody>
+          <a:bodyPr anchorCtr="0" anchor="t" bIns="0" lIns="0" spcFirstLastPara="1" rIns="0" wrap="square" tIns="0">
+            <a:spAutoFit/>
+          </a:bodyPr>
+          <a:lstStyle/>
+          <a:p>
+            <a:pPr indent="0" lvl="0" marL="0" marR="0" rtl="0" algn="ctr">
+              <a:lnSpc>
+                <a:spcPct val="100000"/>
+              </a:lnSpc>
+              <a:spcBef>
+                <a:spcPts val="0"/>
+              </a:spcBef>
+              <a:spcAft>
+                <a:spcPts val="0"/>
+              </a:spcAft>
+              <a:buClr>
+                <a:srgbClr val="000000"/>
+              </a:buClr>
+              <a:buSzPts val="1500"/>
+              <a:buFont typeface="Arial"/>
+              <a:buNone/>
+            </a:pPr>
+            <a:r>
+              <a:rPr b="1" i="0" lang="en-US" sz="1500" u="none" cap="none" strike="noStrike">
+                <a:solidFill>
+                  <a:srgbClr val="8B5CF6"/>
+                </a:solidFill>
+                <a:latin typeface="Calibri"/>
+                <a:ea typeface="Calibri"/>
+                <a:cs typeface="Calibri"/>
+                <a:sym typeface="Calibri"/>
+              </a:rPr>
+              <a:t>Erreur absolue moyenne</a:t>
+            </a:r>
+            <a:endParaRPr b="0" i="0" sz="1400" u="none" cap="none" strike="noStrike">
+              <a:solidFill>
+                <a:srgbClr val="000000"/>
+              </a:solidFill>
+              <a:latin typeface="Arial"/>
+              <a:ea typeface="Arial"/>
+              <a:cs typeface="Arial"/>
+              <a:sym typeface="Arial"/>
+            </a:endParaRPr>
+          </a:p>
+        </p:txBody>
+      </p:sp>
+      <p:sp>
+        <p:nvSpPr>
+          <p:cNvPr id="591" name="Google Shape;591;p25"/>
+          <p:cNvSpPr txBox="1"/>
+          <p:nvPr/>
+        </p:nvSpPr>
+        <p:spPr>
+          <a:xfrm>
+            <a:off x="640080" y="2468880"/>
+            <a:ext cx="5303520" cy="1828800"/>
+          </a:xfrm>
+          <a:prstGeom prst="rect">
+            <a:avLst/>
+          </a:prstGeom>
+          <a:noFill/>
+          <a:ln>
+            <a:noFill/>
+          </a:ln>
+        </p:spPr>
+        <p:txBody>
+          <a:bodyPr anchorCtr="0" anchor="t" bIns="0" lIns="0" spcFirstLastPara="1" rIns="0" wrap="square" tIns="0">
+            <a:spAutoFit/>
+          </a:bodyPr>
+          <a:lstStyle/>
+          <a:p>
+            <a:pPr indent="0" lvl="0" marL="0" marR="0" rtl="0" algn="ctr">
+              <a:lnSpc>
+                <a:spcPct val="100000"/>
+              </a:lnSpc>
+              <a:spcBef>
+                <a:spcPts val="0"/>
+              </a:spcBef>
+              <a:spcAft>
+                <a:spcPts val="0"/>
+              </a:spcAft>
+              <a:buClr>
+                <a:srgbClr val="000000"/>
+              </a:buClr>
+              <a:buSzPts val="11000"/>
+              <a:buFont typeface="Arial"/>
+              <a:buNone/>
+            </a:pPr>
+            <a:r>
+              <a:rPr b="1" i="0" lang="en-US" sz="11000" u="none" cap="none" strike="noStrike">
+                <a:solidFill>
+                  <a:srgbClr val="8B5CF6"/>
+                </a:solidFill>
+                <a:latin typeface="Calibri"/>
+                <a:ea typeface="Calibri"/>
+                <a:cs typeface="Calibri"/>
+                <a:sym typeface="Calibri"/>
+              </a:rPr>
+              <a:t>11,2 %</a:t>
+            </a:r>
+            <a:endParaRPr b="0" i="0" sz="1400" u="none" cap="none" strike="noStrike">
+              <a:solidFill>
+                <a:srgbClr val="000000"/>
+              </a:solidFill>
+              <a:latin typeface="Arial"/>
+              <a:ea typeface="Arial"/>
+              <a:cs typeface="Arial"/>
+              <a:sym typeface="Arial"/>
+            </a:endParaRPr>
+          </a:p>
+        </p:txBody>
+      </p:sp>
+      <p:sp>
+        <p:nvSpPr>
+          <p:cNvPr id="592" name="Google Shape;592;p25"/>
+          <p:cNvSpPr txBox="1"/>
+          <p:nvPr/>
+        </p:nvSpPr>
+        <p:spPr>
+          <a:xfrm>
+            <a:off x="640080" y="4572000"/>
+            <a:ext cx="5303520" cy="457200"/>
+          </a:xfrm>
+          <a:prstGeom prst="rect">
+            <a:avLst/>
+          </a:prstGeom>
+          <a:noFill/>
+          <a:ln>
+            <a:noFill/>
+          </a:ln>
+        </p:spPr>
+        <p:txBody>
+          <a:bodyPr anchorCtr="0" anchor="t" bIns="0" lIns="0" spcFirstLastPara="1" rIns="0" wrap="square" tIns="0">
+            <a:spAutoFit/>
+          </a:bodyPr>
+          <a:lstStyle/>
+          <a:p>
+            <a:pPr indent="0" lvl="0" marL="0" marR="0" rtl="0" algn="ctr">
+              <a:lnSpc>
+                <a:spcPct val="100000"/>
+              </a:lnSpc>
+              <a:spcBef>
+                <a:spcPts val="0"/>
+              </a:spcBef>
+              <a:spcAft>
+                <a:spcPts val="0"/>
+              </a:spcAft>
+              <a:buClr>
+                <a:srgbClr val="000000"/>
+              </a:buClr>
+              <a:buSzPts val="1800"/>
+              <a:buFont typeface="Arial"/>
+              <a:buNone/>
+            </a:pPr>
+            <a:r>
+              <a:rPr b="0" i="1" lang="en-US" sz="1800" u="none" cap="none" strike="noStrike">
+                <a:solidFill>
+                  <a:srgbClr val="334055"/>
+                </a:solidFill>
+                <a:latin typeface="Calibri"/>
+                <a:ea typeface="Calibri"/>
+                <a:cs typeface="Calibri"/>
+                <a:sym typeface="Calibri"/>
+              </a:rPr>
+              <a:t>par capture</a:t>
+            </a:r>
+            <a:endParaRPr b="0" i="0" sz="1400" u="none" cap="none" strike="noStrike">
+              <a:solidFill>
+                <a:srgbClr val="000000"/>
+              </a:solidFill>
+              <a:latin typeface="Arial"/>
+              <a:ea typeface="Arial"/>
+              <a:cs typeface="Arial"/>
+              <a:sym typeface="Arial"/>
+            </a:endParaRPr>
+          </a:p>
+        </p:txBody>
+      </p:sp>
+      <p:sp>
+        <p:nvSpPr>
+          <p:cNvPr id="593" name="Google Shape;593;p25"/>
+          <p:cNvSpPr txBox="1"/>
+          <p:nvPr/>
+        </p:nvSpPr>
+        <p:spPr>
+          <a:xfrm>
+            <a:off x="640080" y="5120640"/>
+            <a:ext cx="5303520" cy="365760"/>
+          </a:xfrm>
+          <a:prstGeom prst="rect">
+            <a:avLst/>
+          </a:prstGeom>
+          <a:noFill/>
+          <a:ln>
+            <a:noFill/>
+          </a:ln>
+        </p:spPr>
+        <p:txBody>
+          <a:bodyPr anchorCtr="0" anchor="t" bIns="0" lIns="0" spcFirstLastPara="1" rIns="0" wrap="square" tIns="0">
+            <a:spAutoFit/>
+          </a:bodyPr>
+          <a:lstStyle/>
+          <a:p>
+            <a:pPr indent="0" lvl="0" marL="0" marR="0" rtl="0" algn="ctr">
+              <a:lnSpc>
+                <a:spcPct val="100000"/>
+              </a:lnSpc>
+              <a:spcBef>
+                <a:spcPts val="0"/>
+              </a:spcBef>
+              <a:spcAft>
+                <a:spcPts val="0"/>
+              </a:spcAft>
+              <a:buClr>
+                <a:srgbClr val="000000"/>
+              </a:buClr>
+              <a:buSzPts val="1200"/>
+              <a:buFont typeface="Arial"/>
+              <a:buNone/>
+            </a:pPr>
+            <a:r>
+              <a:rPr b="0" i="1" lang="en-US" sz="1200" u="none" cap="none" strike="noStrike">
+                <a:solidFill>
+                  <a:srgbClr val="64748B"/>
+                </a:solidFill>
+                <a:latin typeface="Calibri"/>
+                <a:ea typeface="Calibri"/>
+                <a:cs typeface="Calibri"/>
+                <a:sym typeface="Calibri"/>
+              </a:rPr>
+              <a:t>Métrique métier — pourcentage de tension</a:t>
+            </a:r>
+            <a:endParaRPr b="0" i="0" sz="1400" u="none" cap="none" strike="noStrike">
+              <a:solidFill>
+                <a:srgbClr val="000000"/>
+              </a:solidFill>
+              <a:latin typeface="Arial"/>
+              <a:ea typeface="Arial"/>
+              <a:cs typeface="Arial"/>
+              <a:sym typeface="Arial"/>
+            </a:endParaRPr>
+          </a:p>
+        </p:txBody>
+      </p:sp>
+      <p:sp>
+        <p:nvSpPr>
+          <p:cNvPr id="594" name="Google Shape;594;p25"/>
+          <p:cNvSpPr/>
+          <p:nvPr/>
+        </p:nvSpPr>
+        <p:spPr>
+          <a:xfrm>
+            <a:off x="6263640" y="1737360"/>
+            <a:ext cx="5486400" cy="4114800"/>
+          </a:xfrm>
+          <a:prstGeom prst="roundRect">
+            <a:avLst>
+              <a:gd fmla="val 16667" name="adj"/>
+            </a:avLst>
+          </a:prstGeom>
+          <a:solidFill>
+            <a:srgbClr val="FFFFFF"/>
+          </a:solidFill>
+          <a:ln cap="flat" cmpd="sng" w="12700">
+            <a:solidFill>
+              <a:srgbClr val="22D3EE"/>
+            </a:solidFill>
+            <a:prstDash val="solid"/>
+            <a:round/>
+            <a:headEnd len="sm" w="sm" type="none"/>
+            <a:tailEnd len="sm" w="sm" type="none"/>
+          </a:ln>
+          <a:effectLst>
+            <a:outerShdw blurRad="40000" rotWithShape="0" dir="5400000" dist="23000">
+              <a:srgbClr val="000000">
+                <a:alpha val="34901"/>
+              </a:srgbClr>
+            </a:outerShdw>
+          </a:effectLst>
+        </p:spPr>
+        <p:txBody>
+          <a:bodyPr anchorCtr="0" anchor="ctr" bIns="45700" lIns="91425" spcFirstLastPara="1" rIns="91425" wrap="square" tIns="45700">
+            <a:noAutofit/>
+          </a:bodyPr>
+          <a:lstStyle/>
+          <a:p>
+            <a:pPr indent="0" lvl="0" marL="0" marR="0" rtl="0" algn="ctr">
+              <a:lnSpc>
+                <a:spcPct val="100000"/>
+              </a:lnSpc>
+              <a:spcBef>
+                <a:spcPts val="0"/>
+              </a:spcBef>
+              <a:spcAft>
+                <a:spcPts val="0"/>
+              </a:spcAft>
+              <a:buClr>
+                <a:srgbClr val="000000"/>
+              </a:buClr>
+              <a:buSzPts val="1800"/>
+              <a:buFont typeface="Arial"/>
+              <a:buNone/>
+            </a:pPr>
+            <a:r>
+              <a:t/>
+            </a:r>
+            <a:endParaRPr b="0" i="0" sz="1800" u="none" cap="none" strike="noStrike">
+              <a:solidFill>
+                <a:schemeClr val="dk1"/>
+              </a:solidFill>
+              <a:latin typeface="Calibri"/>
+              <a:ea typeface="Calibri"/>
+              <a:cs typeface="Calibri"/>
+              <a:sym typeface="Calibri"/>
+            </a:endParaRPr>
+          </a:p>
+        </p:txBody>
+      </p:sp>
+      <p:sp>
+        <p:nvSpPr>
+          <p:cNvPr id="595" name="Google Shape;595;p25"/>
+          <p:cNvSpPr txBox="1"/>
+          <p:nvPr/>
+        </p:nvSpPr>
+        <p:spPr>
+          <a:xfrm>
+            <a:off x="6446520" y="1920240"/>
+            <a:ext cx="5120640" cy="457200"/>
+          </a:xfrm>
+          <a:prstGeom prst="rect">
+            <a:avLst/>
+          </a:prstGeom>
+          <a:noFill/>
+          <a:ln>
+            <a:noFill/>
+          </a:ln>
+        </p:spPr>
+        <p:txBody>
+          <a:bodyPr anchorCtr="0" anchor="t" bIns="0" lIns="0" spcFirstLastPara="1" rIns="0" wrap="square" tIns="0">
+            <a:spAutoFit/>
+          </a:bodyPr>
+          <a:lstStyle/>
+          <a:p>
+            <a:pPr indent="0" lvl="0" marL="0" marR="0" rtl="0" algn="l">
+              <a:lnSpc>
+                <a:spcPct val="100000"/>
+              </a:lnSpc>
+              <a:spcBef>
+                <a:spcPts val="0"/>
+              </a:spcBef>
+              <a:spcAft>
+                <a:spcPts val="0"/>
+              </a:spcAft>
+              <a:buClr>
+                <a:srgbClr val="000000"/>
+              </a:buClr>
+              <a:buSzPts val="1500"/>
+              <a:buFont typeface="Arial"/>
+              <a:buNone/>
+            </a:pPr>
+            <a:r>
+              <a:rPr b="1" i="0" lang="en-US" sz="1500" u="none" cap="none" strike="noStrike">
+                <a:solidFill>
+                  <a:srgbClr val="22D3EE"/>
+                </a:solidFill>
+                <a:latin typeface="Calibri"/>
+                <a:ea typeface="Calibri"/>
+                <a:cs typeface="Calibri"/>
+                <a:sym typeface="Calibri"/>
+              </a:rPr>
+              <a:t>Comparaison à une baseline naïve</a:t>
+            </a:r>
+            <a:endParaRPr b="0" i="0" sz="1400" u="none" cap="none" strike="noStrike">
+              <a:solidFill>
+                <a:srgbClr val="000000"/>
+              </a:solidFill>
+              <a:latin typeface="Arial"/>
+              <a:ea typeface="Arial"/>
+              <a:cs typeface="Arial"/>
+              <a:sym typeface="Arial"/>
+            </a:endParaRPr>
+          </a:p>
+        </p:txBody>
+      </p:sp>
+      <p:sp>
+        <p:nvSpPr>
+          <p:cNvPr id="596" name="Google Shape;596;p25"/>
+          <p:cNvSpPr txBox="1"/>
+          <p:nvPr/>
+        </p:nvSpPr>
+        <p:spPr>
+          <a:xfrm>
+            <a:off x="6446520" y="2606040"/>
+            <a:ext cx="5120640" cy="457200"/>
+          </a:xfrm>
+          <a:prstGeom prst="rect">
+            <a:avLst/>
+          </a:prstGeom>
+          <a:noFill/>
+          <a:ln>
+            <a:noFill/>
+          </a:ln>
+        </p:spPr>
+        <p:txBody>
+          <a:bodyPr anchorCtr="0" anchor="t" bIns="0" lIns="0" spcFirstLastPara="1" rIns="0" wrap="square" tIns="0">
+            <a:spAutoFit/>
+          </a:bodyPr>
+          <a:lstStyle/>
+          <a:p>
+            <a:pPr indent="0" lvl="0" marL="0" marR="0" rtl="0" algn="l">
+              <a:lnSpc>
+                <a:spcPct val="100000"/>
+              </a:lnSpc>
+              <a:spcBef>
+                <a:spcPts val="0"/>
+              </a:spcBef>
+              <a:spcAft>
+                <a:spcPts val="0"/>
+              </a:spcAft>
+              <a:buClr>
+                <a:srgbClr val="000000"/>
+              </a:buClr>
+              <a:buSzPts val="1600"/>
+              <a:buFont typeface="Arial"/>
+              <a:buNone/>
+            </a:pPr>
+            <a:r>
+              <a:rPr b="0" i="0" lang="en-US" sz="1600" u="none" cap="none" strike="noStrike">
+                <a:solidFill>
+                  <a:srgbClr val="334055"/>
+                </a:solidFill>
+                <a:latin typeface="Calibri"/>
+                <a:ea typeface="Calibri"/>
+                <a:cs typeface="Calibri"/>
+                <a:sym typeface="Calibri"/>
+              </a:rPr>
+              <a:t>Baseline (prédire la moyenne) : ≈ 27 %</a:t>
+            </a:r>
+            <a:endParaRPr b="0" i="0" sz="1400" u="none" cap="none" strike="noStrike">
+              <a:solidFill>
+                <a:srgbClr val="000000"/>
+              </a:solidFill>
+              <a:latin typeface="Arial"/>
+              <a:ea typeface="Arial"/>
+              <a:cs typeface="Arial"/>
+              <a:sym typeface="Arial"/>
+            </a:endParaRPr>
+          </a:p>
+        </p:txBody>
+      </p:sp>
+      <p:sp>
+        <p:nvSpPr>
+          <p:cNvPr id="597" name="Google Shape;597;p25"/>
+          <p:cNvSpPr txBox="1"/>
+          <p:nvPr/>
+        </p:nvSpPr>
+        <p:spPr>
+          <a:xfrm>
+            <a:off x="6446520" y="3063240"/>
+            <a:ext cx="5120640" cy="457200"/>
+          </a:xfrm>
+          <a:prstGeom prst="rect">
+            <a:avLst/>
+          </a:prstGeom>
+          <a:noFill/>
+          <a:ln>
+            <a:noFill/>
+          </a:ln>
+        </p:spPr>
+        <p:txBody>
+          <a:bodyPr anchorCtr="0" anchor="t" bIns="0" lIns="0" spcFirstLastPara="1" rIns="0" wrap="square" tIns="0">
+            <a:spAutoFit/>
+          </a:bodyPr>
+          <a:lstStyle/>
+          <a:p>
+            <a:pPr indent="0" lvl="0" marL="0" marR="0" rtl="0" algn="l">
+              <a:lnSpc>
+                <a:spcPct val="100000"/>
+              </a:lnSpc>
+              <a:spcBef>
+                <a:spcPts val="0"/>
+              </a:spcBef>
+              <a:spcAft>
+                <a:spcPts val="0"/>
+              </a:spcAft>
+              <a:buClr>
+                <a:srgbClr val="000000"/>
+              </a:buClr>
+              <a:buSzPts val="1600"/>
+              <a:buFont typeface="Arial"/>
+              <a:buNone/>
+            </a:pPr>
+            <a:r>
+              <a:rPr b="1" i="0" lang="en-US" sz="1600" u="none" cap="none" strike="noStrike">
+                <a:solidFill>
+                  <a:srgbClr val="8B5CF6"/>
+                </a:solidFill>
+                <a:latin typeface="Calibri"/>
+                <a:ea typeface="Calibri"/>
+                <a:cs typeface="Calibri"/>
+                <a:sym typeface="Calibri"/>
+              </a:rPr>
+              <a:t>Modèle double branche : 11,2 %</a:t>
+            </a:r>
+            <a:endParaRPr b="0" i="0" sz="1400" u="none" cap="none" strike="noStrike">
+              <a:solidFill>
+                <a:srgbClr val="000000"/>
+              </a:solidFill>
+              <a:latin typeface="Arial"/>
+              <a:ea typeface="Arial"/>
+              <a:cs typeface="Arial"/>
+              <a:sym typeface="Arial"/>
+            </a:endParaRPr>
+          </a:p>
+        </p:txBody>
+      </p:sp>
+      <p:sp>
+        <p:nvSpPr>
+          <p:cNvPr id="598" name="Google Shape;598;p25"/>
+          <p:cNvSpPr txBox="1"/>
+          <p:nvPr/>
+        </p:nvSpPr>
+        <p:spPr>
+          <a:xfrm>
+            <a:off x="6446520" y="3611880"/>
+            <a:ext cx="5120640" cy="457200"/>
+          </a:xfrm>
+          <a:prstGeom prst="rect">
+            <a:avLst/>
+          </a:prstGeom>
+          <a:noFill/>
+          <a:ln>
+            <a:noFill/>
+          </a:ln>
+        </p:spPr>
+        <p:txBody>
+          <a:bodyPr anchorCtr="0" anchor="t" bIns="0" lIns="0" spcFirstLastPara="1" rIns="0" wrap="square" tIns="0">
+            <a:spAutoFit/>
+          </a:bodyPr>
+          <a:lstStyle/>
+          <a:p>
+            <a:pPr indent="0" lvl="0" marL="0" marR="0" rtl="0" algn="l">
+              <a:lnSpc>
+                <a:spcPct val="100000"/>
+              </a:lnSpc>
+              <a:spcBef>
+                <a:spcPts val="0"/>
+              </a:spcBef>
+              <a:spcAft>
+                <a:spcPts val="0"/>
+              </a:spcAft>
+              <a:buClr>
+                <a:srgbClr val="000000"/>
+              </a:buClr>
+              <a:buSzPts val="2200"/>
+              <a:buFont typeface="Arial"/>
+              <a:buNone/>
+            </a:pPr>
+            <a:r>
+              <a:rPr b="1" i="0" lang="en-US" sz="2200" u="none" cap="none" strike="noStrike">
+                <a:solidFill>
+                  <a:srgbClr val="E879F9"/>
+                </a:solidFill>
+                <a:latin typeface="Calibri"/>
+                <a:ea typeface="Calibri"/>
+                <a:cs typeface="Calibri"/>
+                <a:sym typeface="Calibri"/>
+              </a:rPr>
+              <a:t>→ erreur divisée par ≈ 2,5</a:t>
+            </a:r>
+            <a:endParaRPr b="0" i="0" sz="1400" u="none" cap="none" strike="noStrike">
+              <a:solidFill>
+                <a:srgbClr val="000000"/>
+              </a:solidFill>
+              <a:latin typeface="Arial"/>
+              <a:ea typeface="Arial"/>
+              <a:cs typeface="Arial"/>
+              <a:sym typeface="Arial"/>
+            </a:endParaRPr>
+          </a:p>
+        </p:txBody>
+      </p:sp>
+      <p:sp>
+        <p:nvSpPr>
+          <p:cNvPr id="599" name="Google Shape;599;p25"/>
+          <p:cNvSpPr txBox="1"/>
+          <p:nvPr/>
+        </p:nvSpPr>
+        <p:spPr>
+          <a:xfrm>
+            <a:off x="6446520" y="4297680"/>
+            <a:ext cx="5120640" cy="1463040"/>
+          </a:xfrm>
+          <a:prstGeom prst="rect">
+            <a:avLst/>
+          </a:prstGeom>
+          <a:noFill/>
+          <a:ln>
+            <a:noFill/>
+          </a:ln>
+        </p:spPr>
+        <p:txBody>
+          <a:bodyPr anchorCtr="0" anchor="t" bIns="0" lIns="0" spcFirstLastPara="1" rIns="0" wrap="square" tIns="0">
+            <a:spAutoFit/>
+          </a:bodyPr>
+          <a:lstStyle/>
+          <a:p>
+            <a:pPr indent="0" lvl="0" marL="0" marR="0" rtl="0" algn="l">
+              <a:lnSpc>
+                <a:spcPct val="135000"/>
+              </a:lnSpc>
+              <a:spcBef>
+                <a:spcPts val="0"/>
+              </a:spcBef>
+              <a:spcAft>
+                <a:spcPts val="0"/>
+              </a:spcAft>
+              <a:buClr>
+                <a:srgbClr val="000000"/>
+              </a:buClr>
+              <a:buSzPts val="1300"/>
+              <a:buFont typeface="Arial"/>
+              <a:buNone/>
+            </a:pPr>
+            <a:r>
+              <a:rPr b="1" i="0" lang="en-US" sz="1300" u="none" cap="none" strike="noStrike">
+                <a:solidFill>
+                  <a:srgbClr val="8B5CF6"/>
+                </a:solidFill>
+                <a:latin typeface="Calibri"/>
+                <a:ea typeface="Calibri"/>
+                <a:cs typeface="Calibri"/>
+                <a:sym typeface="Calibri"/>
+              </a:rPr>
+              <a:t>● </a:t>
+            </a:r>
+            <a:r>
+              <a:rPr b="0" i="0" lang="en-US" sz="1300" u="none" cap="none" strike="noStrike">
+                <a:solidFill>
+                  <a:srgbClr val="334055"/>
+                </a:solidFill>
+                <a:latin typeface="Calibri"/>
+                <a:ea typeface="Calibri"/>
+                <a:cs typeface="Calibri"/>
+                <a:sym typeface="Calibri"/>
+              </a:rPr>
+              <a:t>Preuve de concept fonctionnelle</a:t>
+            </a:r>
+            <a:endParaRPr b="0" i="0" sz="1400" u="none" cap="none" strike="noStrike">
+              <a:solidFill>
+                <a:srgbClr val="000000"/>
+              </a:solidFill>
+              <a:latin typeface="Arial"/>
+              <a:ea typeface="Arial"/>
+              <a:cs typeface="Arial"/>
+              <a:sym typeface="Arial"/>
+            </a:endParaRPr>
+          </a:p>
+          <a:p>
+            <a:pPr indent="0" lvl="0" marL="0" marR="0" rtl="0" algn="l">
+              <a:lnSpc>
+                <a:spcPct val="135000"/>
+              </a:lnSpc>
+              <a:spcBef>
+                <a:spcPts val="0"/>
+              </a:spcBef>
+              <a:spcAft>
+                <a:spcPts val="0"/>
+              </a:spcAft>
+              <a:buClr>
+                <a:srgbClr val="000000"/>
+              </a:buClr>
+              <a:buSzPts val="1300"/>
+              <a:buFont typeface="Arial"/>
+              <a:buNone/>
+            </a:pPr>
+            <a:r>
+              <a:rPr b="1" i="0" lang="en-US" sz="1300" u="none" cap="none" strike="noStrike">
+                <a:solidFill>
+                  <a:srgbClr val="8B5CF6"/>
+                </a:solidFill>
+                <a:latin typeface="Calibri"/>
+                <a:ea typeface="Calibri"/>
+                <a:cs typeface="Calibri"/>
+                <a:sym typeface="Calibri"/>
+              </a:rPr>
+              <a:t>● </a:t>
+            </a:r>
+            <a:r>
+              <a:rPr b="0" i="0" lang="en-US" sz="1300" u="none" cap="none" strike="noStrike">
+                <a:solidFill>
+                  <a:srgbClr val="334055"/>
+                </a:solidFill>
+                <a:latin typeface="Calibri"/>
+                <a:ea typeface="Calibri"/>
+                <a:cs typeface="Calibri"/>
+                <a:sym typeface="Calibri"/>
+              </a:rPr>
+              <a:t>Marge d'amélioration : campagne complète + meilleure qualité vibration</a:t>
+            </a:r>
+            <a:endParaRPr b="0" i="0" sz="1400" u="none" cap="none" strike="noStrike">
+              <a:solidFill>
+                <a:srgbClr val="000000"/>
+              </a:solidFill>
+              <a:latin typeface="Arial"/>
+              <a:ea typeface="Arial"/>
+              <a:cs typeface="Arial"/>
+              <a:sym typeface="Arial"/>
+            </a:endParaRPr>
+          </a:p>
+        </p:txBody>
+      </p:sp>
+    </p:spTree>
+  </p:cSld>
+  <p:clrMapOvr>
+    <a:masterClrMapping/>
+  </p:clrMapOvr>
+</p:sld>
+</file>
+
+<file path=ppt/slides/slide31.xml><?xml version="1.0" encoding="utf-8"?>
+<p:sld xmlns:a="http://schemas.openxmlformats.org/drawingml/2006/main" xmlns:r="http://schemas.openxmlformats.org/officeDocument/2006/relationships" xmlns:mc="http://schemas.openxmlformats.org/markup-compatibility/2006" xmlns:mv="urn:schemas-microsoft-com:mac:vml" xmlns:p="http://schemas.openxmlformats.org/presentationml/2006/main" xmlns:c="http://schemas.openxmlformats.org/drawingml/2006/chart" xmlns:dgm="http://schemas.openxmlformats.org/drawingml/2006/diagram" xmlns:o="urn:schemas-microsoft-com:office:office" xmlns:v="urn:schemas-microsoft-com:vml" xmlns:pvml="urn:schemas-microsoft-com:office:powerpoint" xmlns:com="http://schemas.openxmlformats.org/drawingml/2006/compatibility" xmlns:p14="http://schemas.microsoft.com/office/powerpoint/2010/main" xmlns:p15="http://schemas.microsoft.com/office/powerpoint/2012/main" xmlns:ahyp="http://schemas.microsoft.com/office/drawing/2018/hyperlinkcolor">
+  <p:cSld>
+    <p:spTree>
+      <p:nvGrpSpPr>
+        <p:cNvPr id="604" name="Shape 604"/>
+        <p:cNvGrpSpPr/>
+        <p:nvPr/>
+      </p:nvGrpSpPr>
+      <p:grpSpPr>
+        <a:xfrm>
+          <a:off x="0" y="0"/>
+          <a:ext cx="0" cy="0"/>
+          <a:chOff x="0" y="0"/>
+          <a:chExt cx="0" cy="0"/>
+        </a:xfrm>
+      </p:grpSpPr>
+      <p:pic>
+        <p:nvPicPr>
+          <p:cNvPr descr="grad_bg.jpg" id="605" name="Google Shape;605;p26"/>
+          <p:cNvPicPr preferRelativeResize="0"/>
+          <p:nvPr/>
+        </p:nvPicPr>
+        <p:blipFill rotWithShape="1">
+          <a:blip r:embed="rId3">
+            <a:alphaModFix/>
+          </a:blip>
+          <a:srcRect b="0" l="0" r="0" t="0"/>
+          <a:stretch/>
+        </p:blipFill>
+        <p:spPr>
+          <a:xfrm>
+            <a:off x="0" y="0"/>
+            <a:ext cx="12191695" cy="6858000"/>
+          </a:xfrm>
+          <a:prstGeom prst="rect">
+            <a:avLst/>
+          </a:prstGeom>
+          <a:noFill/>
+          <a:ln>
+            <a:noFill/>
+          </a:ln>
+        </p:spPr>
+      </p:pic>
+      <p:sp>
+        <p:nvSpPr>
+          <p:cNvPr id="606" name="Google Shape;606;p26"/>
+          <p:cNvSpPr txBox="1"/>
+          <p:nvPr/>
+        </p:nvSpPr>
+        <p:spPr>
+          <a:xfrm>
+            <a:off x="457200" y="640080"/>
+            <a:ext cx="11247120" cy="731520"/>
+          </a:xfrm>
+          <a:prstGeom prst="rect">
+            <a:avLst/>
+          </a:prstGeom>
+          <a:noFill/>
+          <a:ln>
+            <a:noFill/>
+          </a:ln>
+        </p:spPr>
+        <p:txBody>
+          <a:bodyPr anchorCtr="0" anchor="t" bIns="0" lIns="0" spcFirstLastPara="1" rIns="0" wrap="square" tIns="0">
+            <a:spAutoFit/>
+          </a:bodyPr>
+          <a:lstStyle/>
+          <a:p>
+            <a:pPr indent="0" lvl="0" marL="0" marR="0" rtl="0" algn="ctr">
+              <a:lnSpc>
+                <a:spcPct val="100000"/>
+              </a:lnSpc>
+              <a:spcBef>
+                <a:spcPts val="0"/>
+              </a:spcBef>
+              <a:spcAft>
+                <a:spcPts val="0"/>
+              </a:spcAft>
+              <a:buClr>
+                <a:srgbClr val="000000"/>
+              </a:buClr>
+              <a:buSzPts val="4000"/>
+              <a:buFont typeface="Arial"/>
+              <a:buNone/>
+            </a:pPr>
+            <a:r>
+              <a:rPr b="1" i="0" lang="en-US" sz="4000" u="none" cap="none" strike="noStrike">
+                <a:solidFill>
+                  <a:srgbClr val="FFFFFF"/>
+                </a:solidFill>
+                <a:latin typeface="Calibri"/>
+                <a:ea typeface="Calibri"/>
+                <a:cs typeface="Calibri"/>
+                <a:sym typeface="Calibri"/>
+              </a:rPr>
+              <a:t>Conclusion et perspectives</a:t>
+            </a:r>
+            <a:endParaRPr b="0" i="0" sz="1400" u="none" cap="none" strike="noStrike">
+              <a:solidFill>
+                <a:srgbClr val="000000"/>
+              </a:solidFill>
+              <a:latin typeface="Arial"/>
+              <a:ea typeface="Arial"/>
+              <a:cs typeface="Arial"/>
+              <a:sym typeface="Arial"/>
+            </a:endParaRPr>
+          </a:p>
+        </p:txBody>
+      </p:sp>
+      <p:sp>
+        <p:nvSpPr>
+          <p:cNvPr id="607" name="Google Shape;607;p26"/>
+          <p:cNvSpPr/>
+          <p:nvPr/>
+        </p:nvSpPr>
+        <p:spPr>
+          <a:xfrm>
+            <a:off x="640080" y="1828800"/>
+            <a:ext cx="5394960" cy="2103120"/>
+          </a:xfrm>
+          <a:prstGeom prst="roundRect">
+            <a:avLst>
+              <a:gd fmla="val 16667" name="adj"/>
+            </a:avLst>
+          </a:prstGeom>
+          <a:solidFill>
+            <a:srgbClr val="2A145E"/>
+          </a:solidFill>
+          <a:ln cap="flat" cmpd="sng" w="12700">
+            <a:solidFill>
+              <a:srgbClr val="22D3EE"/>
+            </a:solidFill>
+            <a:prstDash val="solid"/>
+            <a:round/>
+            <a:headEnd len="sm" w="sm" type="none"/>
+            <a:tailEnd len="sm" w="sm" type="none"/>
+          </a:ln>
+          <a:effectLst>
+            <a:outerShdw blurRad="40000" rotWithShape="0" dir="5400000" dist="23000">
+              <a:srgbClr val="000000">
+                <a:alpha val="34901"/>
+              </a:srgbClr>
+            </a:outerShdw>
+          </a:effectLst>
+        </p:spPr>
+        <p:txBody>
+          <a:bodyPr anchorCtr="0" anchor="ctr" bIns="45700" lIns="91425" spcFirstLastPara="1" rIns="91425" wrap="square" tIns="45700">
+            <a:noAutofit/>
+          </a:bodyPr>
+          <a:lstStyle/>
+          <a:p>
+            <a:pPr indent="0" lvl="0" marL="0" marR="0" rtl="0" algn="ctr">
+              <a:lnSpc>
+                <a:spcPct val="100000"/>
+              </a:lnSpc>
+              <a:spcBef>
+                <a:spcPts val="0"/>
+              </a:spcBef>
+              <a:spcAft>
+                <a:spcPts val="0"/>
+              </a:spcAft>
+              <a:buClr>
+                <a:srgbClr val="000000"/>
+              </a:buClr>
+              <a:buSzPts val="1800"/>
+              <a:buFont typeface="Arial"/>
+              <a:buNone/>
+            </a:pPr>
+            <a:r>
+              <a:t/>
+            </a:r>
+            <a:endParaRPr b="0" i="0" sz="1800" u="none" cap="none" strike="noStrike">
+              <a:solidFill>
+                <a:schemeClr val="dk1"/>
+              </a:solidFill>
+              <a:latin typeface="Calibri"/>
+              <a:ea typeface="Calibri"/>
+              <a:cs typeface="Calibri"/>
+              <a:sym typeface="Calibri"/>
+            </a:endParaRPr>
+          </a:p>
+        </p:txBody>
+      </p:sp>
+      <p:sp>
+        <p:nvSpPr>
+          <p:cNvPr id="608" name="Google Shape;608;p26"/>
+          <p:cNvSpPr txBox="1"/>
+          <p:nvPr/>
+        </p:nvSpPr>
+        <p:spPr>
+          <a:xfrm>
+            <a:off x="868680" y="1965960"/>
+            <a:ext cx="5029200" cy="365760"/>
+          </a:xfrm>
+          <a:prstGeom prst="rect">
+            <a:avLst/>
+          </a:prstGeom>
+          <a:noFill/>
+          <a:ln>
+            <a:noFill/>
+          </a:ln>
+        </p:spPr>
+        <p:txBody>
+          <a:bodyPr anchorCtr="0" anchor="t" bIns="0" lIns="0" spcFirstLastPara="1" rIns="0" wrap="square" tIns="0">
+            <a:spAutoFit/>
+          </a:bodyPr>
+          <a:lstStyle/>
+          <a:p>
+            <a:pPr indent="0" lvl="0" marL="0" marR="0" rtl="0" algn="l">
+              <a:lnSpc>
+                <a:spcPct val="100000"/>
+              </a:lnSpc>
+              <a:spcBef>
+                <a:spcPts val="0"/>
+              </a:spcBef>
+              <a:spcAft>
+                <a:spcPts val="0"/>
+              </a:spcAft>
+              <a:buClr>
+                <a:srgbClr val="000000"/>
+              </a:buClr>
+              <a:buSzPts val="1500"/>
+              <a:buFont typeface="Arial"/>
+              <a:buNone/>
+            </a:pPr>
+            <a:r>
+              <a:rPr b="1" i="0" lang="en-US" sz="1500" u="none" cap="none" strike="noStrike">
+                <a:solidFill>
+                  <a:srgbClr val="22D3EE"/>
+                </a:solidFill>
+                <a:latin typeface="Calibri"/>
+                <a:ea typeface="Calibri"/>
+                <a:cs typeface="Calibri"/>
+                <a:sym typeface="Calibri"/>
+              </a:rPr>
+              <a:t>Bilan technique</a:t>
+            </a:r>
+            <a:endParaRPr b="0" i="0" sz="1400" u="none" cap="none" strike="noStrike">
+              <a:solidFill>
+                <a:srgbClr val="000000"/>
+              </a:solidFill>
+              <a:latin typeface="Arial"/>
+              <a:ea typeface="Arial"/>
+              <a:cs typeface="Arial"/>
+              <a:sym typeface="Arial"/>
+            </a:endParaRPr>
+          </a:p>
+        </p:txBody>
+      </p:sp>
+      <p:sp>
+        <p:nvSpPr>
+          <p:cNvPr id="609" name="Google Shape;609;p26"/>
+          <p:cNvSpPr txBox="1"/>
+          <p:nvPr/>
+        </p:nvSpPr>
+        <p:spPr>
+          <a:xfrm>
+            <a:off x="868680" y="2377440"/>
+            <a:ext cx="5029200" cy="1554480"/>
+          </a:xfrm>
+          <a:prstGeom prst="rect">
+            <a:avLst/>
+          </a:prstGeom>
+          <a:noFill/>
+          <a:ln>
+            <a:noFill/>
+          </a:ln>
+        </p:spPr>
+        <p:txBody>
+          <a:bodyPr anchorCtr="0" anchor="t" bIns="0" lIns="0" spcFirstLastPara="1" rIns="0" wrap="square" tIns="0">
+            <a:spAutoFit/>
+          </a:bodyPr>
+          <a:lstStyle/>
+          <a:p>
+            <a:pPr indent="0" lvl="0" marL="0" marR="0" rtl="0" algn="l">
+              <a:lnSpc>
+                <a:spcPct val="135000"/>
+              </a:lnSpc>
+              <a:spcBef>
+                <a:spcPts val="0"/>
+              </a:spcBef>
+              <a:spcAft>
+                <a:spcPts val="0"/>
+              </a:spcAft>
+              <a:buClr>
+                <a:srgbClr val="000000"/>
+              </a:buClr>
+              <a:buSzPts val="1300"/>
+              <a:buFont typeface="Arial"/>
+              <a:buNone/>
+            </a:pPr>
+            <a:r>
+              <a:rPr b="1" i="0" lang="en-US" sz="1300" u="none" cap="none" strike="noStrike">
+                <a:solidFill>
+                  <a:srgbClr val="22D3EE"/>
+                </a:solidFill>
+                <a:latin typeface="Calibri"/>
+                <a:ea typeface="Calibri"/>
+                <a:cs typeface="Calibri"/>
+                <a:sym typeface="Calibri"/>
+              </a:rPr>
+              <a:t>● </a:t>
+            </a:r>
+            <a:r>
+              <a:rPr b="0" i="0" lang="en-US" sz="1300" u="none" cap="none" strike="noStrike">
+                <a:solidFill>
+                  <a:srgbClr val="FFFFFF"/>
+                </a:solidFill>
+                <a:latin typeface="Calibri"/>
+                <a:ea typeface="Calibri"/>
+                <a:cs typeface="Calibri"/>
+                <a:sym typeface="Calibri"/>
+              </a:rPr>
+              <a:t>Chaîne complète fonctionnelle de bout en bout</a:t>
+            </a:r>
+            <a:endParaRPr b="0" i="0" sz="1400" u="none" cap="none" strike="noStrike">
+              <a:solidFill>
+                <a:srgbClr val="000000"/>
+              </a:solidFill>
+              <a:latin typeface="Arial"/>
+              <a:ea typeface="Arial"/>
+              <a:cs typeface="Arial"/>
+              <a:sym typeface="Arial"/>
+            </a:endParaRPr>
+          </a:p>
+          <a:p>
+            <a:pPr indent="0" lvl="0" marL="0" marR="0" rtl="0" algn="l">
+              <a:lnSpc>
+                <a:spcPct val="135000"/>
+              </a:lnSpc>
+              <a:spcBef>
+                <a:spcPts val="0"/>
+              </a:spcBef>
+              <a:spcAft>
+                <a:spcPts val="0"/>
+              </a:spcAft>
+              <a:buClr>
+                <a:srgbClr val="000000"/>
+              </a:buClr>
+              <a:buSzPts val="1300"/>
+              <a:buFont typeface="Arial"/>
+              <a:buNone/>
+            </a:pPr>
+            <a:r>
+              <a:rPr b="1" i="0" lang="en-US" sz="1300" u="none" cap="none" strike="noStrike">
+                <a:solidFill>
+                  <a:srgbClr val="22D3EE"/>
+                </a:solidFill>
+                <a:latin typeface="Calibri"/>
+                <a:ea typeface="Calibri"/>
+                <a:cs typeface="Calibri"/>
+                <a:sym typeface="Calibri"/>
+              </a:rPr>
+              <a:t>● </a:t>
+            </a:r>
+            <a:r>
+              <a:rPr b="0" i="0" lang="en-US" sz="1300" u="none" cap="none" strike="noStrike">
+                <a:solidFill>
+                  <a:srgbClr val="FFFFFF"/>
+                </a:solidFill>
+                <a:latin typeface="Calibri"/>
+                <a:ea typeface="Calibri"/>
+                <a:cs typeface="Calibri"/>
+                <a:sym typeface="Calibri"/>
+              </a:rPr>
+              <a:t>Modèle IA défendable (MAE 11,2 %)</a:t>
+            </a:r>
+            <a:endParaRPr b="0" i="0" sz="1400" u="none" cap="none" strike="noStrike">
+              <a:solidFill>
+                <a:srgbClr val="000000"/>
+              </a:solidFill>
+              <a:latin typeface="Arial"/>
+              <a:ea typeface="Arial"/>
+              <a:cs typeface="Arial"/>
+              <a:sym typeface="Arial"/>
+            </a:endParaRPr>
+          </a:p>
+          <a:p>
+            <a:pPr indent="0" lvl="0" marL="0" marR="0" rtl="0" algn="l">
+              <a:lnSpc>
+                <a:spcPct val="135000"/>
+              </a:lnSpc>
+              <a:spcBef>
+                <a:spcPts val="0"/>
+              </a:spcBef>
+              <a:spcAft>
+                <a:spcPts val="0"/>
+              </a:spcAft>
+              <a:buClr>
+                <a:srgbClr val="000000"/>
+              </a:buClr>
+              <a:buSzPts val="1300"/>
+              <a:buFont typeface="Arial"/>
+              <a:buNone/>
+            </a:pPr>
+            <a:r>
+              <a:rPr b="1" i="0" lang="en-US" sz="1300" u="none" cap="none" strike="noStrike">
+                <a:solidFill>
+                  <a:srgbClr val="22D3EE"/>
+                </a:solidFill>
+                <a:latin typeface="Calibri"/>
+                <a:ea typeface="Calibri"/>
+                <a:cs typeface="Calibri"/>
+                <a:sym typeface="Calibri"/>
+              </a:rPr>
+              <a:t>● </a:t>
+            </a:r>
+            <a:r>
+              <a:rPr b="0" i="0" lang="en-US" sz="1300" u="none" cap="none" strike="noStrike">
+                <a:solidFill>
+                  <a:srgbClr val="FFFFFF"/>
+                </a:solidFill>
+                <a:latin typeface="Calibri"/>
+                <a:ea typeface="Calibri"/>
+                <a:cs typeface="Calibri"/>
+                <a:sym typeface="Calibri"/>
+              </a:rPr>
+              <a:t>Décisions d'ingénierie documentées</a:t>
+            </a:r>
+            <a:endParaRPr b="0" i="0" sz="1400" u="none" cap="none" strike="noStrike">
+              <a:solidFill>
+                <a:srgbClr val="000000"/>
+              </a:solidFill>
+              <a:latin typeface="Arial"/>
+              <a:ea typeface="Arial"/>
+              <a:cs typeface="Arial"/>
+              <a:sym typeface="Arial"/>
+            </a:endParaRPr>
+          </a:p>
+        </p:txBody>
+      </p:sp>
+      <p:sp>
+        <p:nvSpPr>
+          <p:cNvPr id="610" name="Google Shape;610;p26"/>
+          <p:cNvSpPr/>
+          <p:nvPr/>
+        </p:nvSpPr>
+        <p:spPr>
+          <a:xfrm>
+            <a:off x="6126480" y="1828800"/>
+            <a:ext cx="5394960" cy="2103120"/>
+          </a:xfrm>
+          <a:prstGeom prst="roundRect">
+            <a:avLst>
+              <a:gd fmla="val 16667" name="adj"/>
+            </a:avLst>
+          </a:prstGeom>
+          <a:solidFill>
+            <a:srgbClr val="2A145E"/>
+          </a:solidFill>
+          <a:ln cap="flat" cmpd="sng" w="12700">
+            <a:solidFill>
+              <a:srgbClr val="E879F9"/>
+            </a:solidFill>
+            <a:prstDash val="solid"/>
+            <a:round/>
+            <a:headEnd len="sm" w="sm" type="none"/>
+            <a:tailEnd len="sm" w="sm" type="none"/>
+          </a:ln>
+          <a:effectLst>
+            <a:outerShdw blurRad="40000" rotWithShape="0" dir="5400000" dist="23000">
+              <a:srgbClr val="000000">
+                <a:alpha val="34901"/>
+              </a:srgbClr>
+            </a:outerShdw>
+          </a:effectLst>
+        </p:spPr>
+        <p:txBody>
+          <a:bodyPr anchorCtr="0" anchor="ctr" bIns="45700" lIns="91425" spcFirstLastPara="1" rIns="91425" wrap="square" tIns="45700">
+            <a:noAutofit/>
+          </a:bodyPr>
+          <a:lstStyle/>
+          <a:p>
+            <a:pPr indent="0" lvl="0" marL="0" marR="0" rtl="0" algn="ctr">
+              <a:lnSpc>
+                <a:spcPct val="100000"/>
+              </a:lnSpc>
+              <a:spcBef>
+                <a:spcPts val="0"/>
+              </a:spcBef>
+              <a:spcAft>
+                <a:spcPts val="0"/>
+              </a:spcAft>
+              <a:buClr>
+                <a:srgbClr val="000000"/>
+              </a:buClr>
+              <a:buSzPts val="1800"/>
+              <a:buFont typeface="Arial"/>
+              <a:buNone/>
+            </a:pPr>
+            <a:r>
+              <a:t/>
+            </a:r>
+            <a:endParaRPr b="0" i="0" sz="1800" u="none" cap="none" strike="noStrike">
+              <a:solidFill>
+                <a:schemeClr val="dk1"/>
+              </a:solidFill>
+              <a:latin typeface="Calibri"/>
+              <a:ea typeface="Calibri"/>
+              <a:cs typeface="Calibri"/>
+              <a:sym typeface="Calibri"/>
+            </a:endParaRPr>
+          </a:p>
+        </p:txBody>
+      </p:sp>
+      <p:sp>
+        <p:nvSpPr>
+          <p:cNvPr id="611" name="Google Shape;611;p26"/>
+          <p:cNvSpPr txBox="1"/>
+          <p:nvPr/>
+        </p:nvSpPr>
+        <p:spPr>
+          <a:xfrm>
+            <a:off x="6355080" y="1965960"/>
+            <a:ext cx="5029200" cy="365760"/>
+          </a:xfrm>
+          <a:prstGeom prst="rect">
+            <a:avLst/>
+          </a:prstGeom>
+          <a:noFill/>
+          <a:ln>
+            <a:noFill/>
+          </a:ln>
+        </p:spPr>
+        <p:txBody>
+          <a:bodyPr anchorCtr="0" anchor="t" bIns="0" lIns="0" spcFirstLastPara="1" rIns="0" wrap="square" tIns="0">
+            <a:spAutoFit/>
+          </a:bodyPr>
+          <a:lstStyle/>
+          <a:p>
+            <a:pPr indent="0" lvl="0" marL="0" marR="0" rtl="0" algn="l">
+              <a:lnSpc>
+                <a:spcPct val="100000"/>
+              </a:lnSpc>
+              <a:spcBef>
+                <a:spcPts val="0"/>
+              </a:spcBef>
+              <a:spcAft>
+                <a:spcPts val="0"/>
+              </a:spcAft>
+              <a:buClr>
+                <a:srgbClr val="000000"/>
+              </a:buClr>
+              <a:buSzPts val="1500"/>
+              <a:buFont typeface="Arial"/>
+              <a:buNone/>
+            </a:pPr>
+            <a:r>
+              <a:rPr b="1" i="0" lang="en-US" sz="1500" u="none" cap="none" strike="noStrike">
+                <a:solidFill>
+                  <a:srgbClr val="E879F9"/>
+                </a:solidFill>
+                <a:latin typeface="Calibri"/>
+                <a:ea typeface="Calibri"/>
+                <a:cs typeface="Calibri"/>
+                <a:sym typeface="Calibri"/>
+              </a:rPr>
+              <a:t>Perspectives</a:t>
+            </a:r>
+            <a:endParaRPr b="0" i="0" sz="1400" u="none" cap="none" strike="noStrike">
+              <a:solidFill>
+                <a:srgbClr val="000000"/>
+              </a:solidFill>
+              <a:latin typeface="Arial"/>
+              <a:ea typeface="Arial"/>
+              <a:cs typeface="Arial"/>
+              <a:sym typeface="Arial"/>
+            </a:endParaRPr>
+          </a:p>
+        </p:txBody>
+      </p:sp>
+      <p:sp>
+        <p:nvSpPr>
+          <p:cNvPr id="612" name="Google Shape;612;p26"/>
+          <p:cNvSpPr txBox="1"/>
+          <p:nvPr/>
+        </p:nvSpPr>
+        <p:spPr>
+          <a:xfrm>
+            <a:off x="6355080" y="2377440"/>
+            <a:ext cx="5029200" cy="1554480"/>
+          </a:xfrm>
+          <a:prstGeom prst="rect">
+            <a:avLst/>
+          </a:prstGeom>
+          <a:noFill/>
+          <a:ln>
+            <a:noFill/>
+          </a:ln>
+        </p:spPr>
+        <p:txBody>
+          <a:bodyPr anchorCtr="0" anchor="t" bIns="0" lIns="0" spcFirstLastPara="1" rIns="0" wrap="square" tIns="0">
+            <a:spAutoFit/>
+          </a:bodyPr>
+          <a:lstStyle/>
+          <a:p>
+            <a:pPr indent="0" lvl="0" marL="0" marR="0" rtl="0" algn="l">
+              <a:lnSpc>
+                <a:spcPct val="135000"/>
+              </a:lnSpc>
+              <a:spcBef>
+                <a:spcPts val="0"/>
+              </a:spcBef>
+              <a:spcAft>
+                <a:spcPts val="0"/>
+              </a:spcAft>
+              <a:buClr>
+                <a:srgbClr val="000000"/>
+              </a:buClr>
+              <a:buSzPts val="1300"/>
+              <a:buFont typeface="Arial"/>
+              <a:buNone/>
+            </a:pPr>
+            <a:r>
+              <a:rPr b="1" i="0" lang="en-US" sz="1300" u="none" cap="none" strike="noStrike">
+                <a:solidFill>
+                  <a:srgbClr val="E879F9"/>
+                </a:solidFill>
+                <a:latin typeface="Calibri"/>
+                <a:ea typeface="Calibri"/>
+                <a:cs typeface="Calibri"/>
+                <a:sym typeface="Calibri"/>
+              </a:rPr>
+              <a:t>● </a:t>
+            </a:r>
+            <a:r>
+              <a:rPr b="0" i="0" lang="en-US" sz="1300" u="none" cap="none" strike="noStrike">
+                <a:solidFill>
+                  <a:srgbClr val="FFFFFF"/>
+                </a:solidFill>
+                <a:latin typeface="Calibri"/>
+                <a:ea typeface="Calibri"/>
+                <a:cs typeface="Calibri"/>
+                <a:sym typeface="Calibri"/>
+              </a:rPr>
+              <a:t>Compléter la campagne 110 captures</a:t>
+            </a:r>
+            <a:endParaRPr b="0" i="0" sz="1400" u="none" cap="none" strike="noStrike">
+              <a:solidFill>
+                <a:srgbClr val="000000"/>
+              </a:solidFill>
+              <a:latin typeface="Arial"/>
+              <a:ea typeface="Arial"/>
+              <a:cs typeface="Arial"/>
+              <a:sym typeface="Arial"/>
+            </a:endParaRPr>
+          </a:p>
+          <a:p>
+            <a:pPr indent="0" lvl="0" marL="0" marR="0" rtl="0" algn="l">
+              <a:lnSpc>
+                <a:spcPct val="135000"/>
+              </a:lnSpc>
+              <a:spcBef>
+                <a:spcPts val="0"/>
+              </a:spcBef>
+              <a:spcAft>
+                <a:spcPts val="0"/>
+              </a:spcAft>
+              <a:buClr>
+                <a:srgbClr val="000000"/>
+              </a:buClr>
+              <a:buSzPts val="1300"/>
+              <a:buFont typeface="Arial"/>
+              <a:buNone/>
+            </a:pPr>
+            <a:r>
+              <a:rPr b="1" i="0" lang="en-US" sz="1300" u="none" cap="none" strike="noStrike">
+                <a:solidFill>
+                  <a:srgbClr val="E879F9"/>
+                </a:solidFill>
+                <a:latin typeface="Calibri"/>
+                <a:ea typeface="Calibri"/>
+                <a:cs typeface="Calibri"/>
+                <a:sym typeface="Calibri"/>
+              </a:rPr>
+              <a:t>● </a:t>
+            </a:r>
+            <a:r>
+              <a:rPr b="0" i="0" lang="en-US" sz="1300" u="none" cap="none" strike="noStrike">
+                <a:solidFill>
+                  <a:srgbClr val="FFFFFF"/>
+                </a:solidFill>
+                <a:latin typeface="Calibri"/>
+                <a:ea typeface="Calibri"/>
+                <a:cs typeface="Calibri"/>
+                <a:sym typeface="Calibri"/>
+              </a:rPr>
+              <a:t>Ajouter capteur courant → mesure directe puissance</a:t>
+            </a:r>
+            <a:endParaRPr b="0" i="0" sz="1400" u="none" cap="none" strike="noStrike">
+              <a:solidFill>
+                <a:srgbClr val="000000"/>
+              </a:solidFill>
+              <a:latin typeface="Arial"/>
+              <a:ea typeface="Arial"/>
+              <a:cs typeface="Arial"/>
+              <a:sym typeface="Arial"/>
+            </a:endParaRPr>
+          </a:p>
+          <a:p>
+            <a:pPr indent="0" lvl="0" marL="0" marR="0" rtl="0" algn="l">
+              <a:lnSpc>
+                <a:spcPct val="135000"/>
+              </a:lnSpc>
+              <a:spcBef>
+                <a:spcPts val="0"/>
+              </a:spcBef>
+              <a:spcAft>
+                <a:spcPts val="0"/>
+              </a:spcAft>
+              <a:buClr>
+                <a:srgbClr val="000000"/>
+              </a:buClr>
+              <a:buSzPts val="1300"/>
+              <a:buFont typeface="Arial"/>
+              <a:buNone/>
+            </a:pPr>
+            <a:r>
+              <a:rPr b="1" i="0" lang="en-US" sz="1300" u="none" cap="none" strike="noStrike">
+                <a:solidFill>
+                  <a:srgbClr val="E879F9"/>
+                </a:solidFill>
+                <a:latin typeface="Calibri"/>
+                <a:ea typeface="Calibri"/>
+                <a:cs typeface="Calibri"/>
+                <a:sym typeface="Calibri"/>
+              </a:rPr>
+              <a:t>● </a:t>
+            </a:r>
+            <a:r>
+              <a:rPr b="0" i="0" lang="en-US" sz="1300" u="none" cap="none" strike="noStrike">
+                <a:solidFill>
+                  <a:srgbClr val="FFFFFF"/>
+                </a:solidFill>
+                <a:latin typeface="Calibri"/>
+                <a:ea typeface="Calibri"/>
+                <a:cs typeface="Calibri"/>
+                <a:sym typeface="Calibri"/>
+              </a:rPr>
+              <a:t>Comparer mono-modalité vs double branche</a:t>
+            </a:r>
+            <a:endParaRPr b="0" i="0" sz="1400" u="none" cap="none" strike="noStrike">
+              <a:solidFill>
+                <a:srgbClr val="000000"/>
+              </a:solidFill>
+              <a:latin typeface="Arial"/>
+              <a:ea typeface="Arial"/>
+              <a:cs typeface="Arial"/>
+              <a:sym typeface="Arial"/>
+            </a:endParaRPr>
+          </a:p>
+        </p:txBody>
+      </p:sp>
+      <p:sp>
+        <p:nvSpPr>
+          <p:cNvPr id="613" name="Google Shape;613;p26"/>
+          <p:cNvSpPr txBox="1"/>
+          <p:nvPr/>
+        </p:nvSpPr>
+        <p:spPr>
+          <a:xfrm>
+            <a:off x="457200" y="4389120"/>
+            <a:ext cx="11247120" cy="731520"/>
+          </a:xfrm>
+          <a:prstGeom prst="rect">
+            <a:avLst/>
+          </a:prstGeom>
+          <a:noFill/>
+          <a:ln>
+            <a:noFill/>
+          </a:ln>
+        </p:spPr>
+        <p:txBody>
+          <a:bodyPr anchorCtr="0" anchor="t" bIns="0" lIns="0" spcFirstLastPara="1" rIns="0" wrap="square" tIns="0">
+            <a:spAutoFit/>
+          </a:bodyPr>
+          <a:lstStyle/>
+          <a:p>
+            <a:pPr indent="0" lvl="0" marL="0" marR="0" rtl="0" algn="ctr">
+              <a:lnSpc>
+                <a:spcPct val="100000"/>
+              </a:lnSpc>
+              <a:spcBef>
+                <a:spcPts val="0"/>
+              </a:spcBef>
+              <a:spcAft>
+                <a:spcPts val="0"/>
+              </a:spcAft>
+              <a:buClr>
+                <a:srgbClr val="000000"/>
+              </a:buClr>
+              <a:buSzPts val="3600"/>
+              <a:buFont typeface="Arial"/>
+              <a:buNone/>
+            </a:pPr>
+            <a:r>
+              <a:rPr b="1" i="0" lang="en-US" sz="3600" u="none" cap="none" strike="noStrike">
+                <a:solidFill>
+                  <a:srgbClr val="FFFFFF"/>
+                </a:solidFill>
+                <a:latin typeface="Calibri"/>
+                <a:ea typeface="Calibri"/>
+                <a:cs typeface="Calibri"/>
+                <a:sym typeface="Calibri"/>
+              </a:rPr>
+              <a:t>Merci pour votre attention</a:t>
+            </a:r>
+            <a:endParaRPr b="0" i="0" sz="1400" u="none" cap="none" strike="noStrike">
+              <a:solidFill>
+                <a:srgbClr val="000000"/>
+              </a:solidFill>
+              <a:latin typeface="Arial"/>
+              <a:ea typeface="Arial"/>
+              <a:cs typeface="Arial"/>
+              <a:sym typeface="Arial"/>
+            </a:endParaRPr>
+          </a:p>
+        </p:txBody>
+      </p:sp>
+      <p:sp>
+        <p:nvSpPr>
+          <p:cNvPr id="614" name="Google Shape;614;p26"/>
+          <p:cNvSpPr txBox="1"/>
+          <p:nvPr/>
+        </p:nvSpPr>
+        <p:spPr>
+          <a:xfrm>
+            <a:off x="457200" y="5120640"/>
+            <a:ext cx="11247120" cy="548640"/>
+          </a:xfrm>
+          <a:prstGeom prst="rect">
+            <a:avLst/>
+          </a:prstGeom>
+          <a:noFill/>
+          <a:ln>
+            <a:noFill/>
+          </a:ln>
+        </p:spPr>
+        <p:txBody>
+          <a:bodyPr anchorCtr="0" anchor="t" bIns="0" lIns="0" spcFirstLastPara="1" rIns="0" wrap="square" tIns="0">
+            <a:spAutoFit/>
+          </a:bodyPr>
+          <a:lstStyle/>
+          <a:p>
+            <a:pPr indent="0" lvl="0" marL="0" marR="0" rtl="0" algn="ctr">
+              <a:lnSpc>
+                <a:spcPct val="100000"/>
+              </a:lnSpc>
+              <a:spcBef>
+                <a:spcPts val="0"/>
+              </a:spcBef>
+              <a:spcAft>
+                <a:spcPts val="0"/>
+              </a:spcAft>
+              <a:buClr>
+                <a:srgbClr val="000000"/>
+              </a:buClr>
+              <a:buSzPts val="2200"/>
+              <a:buFont typeface="Arial"/>
+              <a:buNone/>
+            </a:pPr>
+            <a:r>
+              <a:rPr b="0" i="1" lang="en-US" sz="2200" u="none" cap="none" strike="noStrike">
+                <a:solidFill>
+                  <a:srgbClr val="C4B5FD"/>
+                </a:solidFill>
+                <a:latin typeface="Calibri"/>
+                <a:ea typeface="Calibri"/>
+                <a:cs typeface="Calibri"/>
+                <a:sym typeface="Calibri"/>
+              </a:rPr>
+              <a:t>Place aux questions</a:t>
+            </a:r>
+            <a:endParaRPr b="0" i="0" sz="1400" u="none" cap="none" strike="noStrike">
+              <a:solidFill>
+                <a:srgbClr val="000000"/>
+              </a:solidFill>
+              <a:latin typeface="Arial"/>
+              <a:ea typeface="Arial"/>
+              <a:cs typeface="Arial"/>
+              <a:sym typeface="Arial"/>
+            </a:endParaRPr>
+          </a:p>
+        </p:txBody>
+      </p:sp>
+      <p:sp>
+        <p:nvSpPr>
+          <p:cNvPr id="615" name="Google Shape;615;p26"/>
+          <p:cNvSpPr/>
+          <p:nvPr/>
+        </p:nvSpPr>
+        <p:spPr>
+          <a:xfrm>
+            <a:off x="5730087" y="6035040"/>
+            <a:ext cx="109728" cy="109728"/>
+          </a:xfrm>
+          <a:prstGeom prst="ellipse">
+            <a:avLst/>
+          </a:prstGeom>
+          <a:solidFill>
+            <a:srgbClr val="22D3EE"/>
+          </a:solidFill>
+          <a:ln>
+            <a:noFill/>
+          </a:ln>
+          <a:effectLst>
+            <a:outerShdw blurRad="40000" rotWithShape="0" dir="5400000" dist="23000">
+              <a:srgbClr val="000000">
+                <a:alpha val="34901"/>
+              </a:srgbClr>
+            </a:outerShdw>
+          </a:effectLst>
+        </p:spPr>
+        <p:txBody>
+          <a:bodyPr anchorCtr="0" anchor="ctr" bIns="45700" lIns="91425" spcFirstLastPara="1" rIns="91425" wrap="square" tIns="45700">
+            <a:noAutofit/>
+          </a:bodyPr>
+          <a:lstStyle/>
+          <a:p>
+            <a:pPr indent="0" lvl="0" marL="0" marR="0" rtl="0" algn="ctr">
+              <a:lnSpc>
+                <a:spcPct val="100000"/>
+              </a:lnSpc>
+              <a:spcBef>
+                <a:spcPts val="0"/>
+              </a:spcBef>
+              <a:spcAft>
+                <a:spcPts val="0"/>
+              </a:spcAft>
+              <a:buClr>
+                <a:srgbClr val="000000"/>
+              </a:buClr>
+              <a:buSzPts val="1800"/>
+              <a:buFont typeface="Arial"/>
+              <a:buNone/>
+            </a:pPr>
+            <a:r>
+              <a:t/>
+            </a:r>
+            <a:endParaRPr b="0" i="0" sz="1800" u="none" cap="none" strike="noStrike">
+              <a:solidFill>
+                <a:schemeClr val="dk1"/>
+              </a:solidFill>
+              <a:latin typeface="Calibri"/>
+              <a:ea typeface="Calibri"/>
+              <a:cs typeface="Calibri"/>
+              <a:sym typeface="Calibri"/>
+            </a:endParaRPr>
+          </a:p>
+        </p:txBody>
+      </p:sp>
+      <p:sp>
+        <p:nvSpPr>
+          <p:cNvPr id="616" name="Google Shape;616;p26"/>
+          <p:cNvSpPr/>
+          <p:nvPr/>
+        </p:nvSpPr>
+        <p:spPr>
+          <a:xfrm>
+            <a:off x="6040983" y="6035040"/>
+            <a:ext cx="109728" cy="109728"/>
+          </a:xfrm>
+          <a:prstGeom prst="ellipse">
+            <a:avLst/>
+          </a:prstGeom>
+          <a:solidFill>
+            <a:srgbClr val="8B5CF6"/>
+          </a:solidFill>
+          <a:ln>
+            <a:noFill/>
+          </a:ln>
+          <a:effectLst>
+            <a:outerShdw blurRad="40000" rotWithShape="0" dir="5400000" dist="23000">
+              <a:srgbClr val="000000">
+                <a:alpha val="34901"/>
+              </a:srgbClr>
+            </a:outerShdw>
+          </a:effectLst>
+        </p:spPr>
+        <p:txBody>
+          <a:bodyPr anchorCtr="0" anchor="ctr" bIns="45700" lIns="91425" spcFirstLastPara="1" rIns="91425" wrap="square" tIns="45700">
+            <a:noAutofit/>
+          </a:bodyPr>
+          <a:lstStyle/>
+          <a:p>
+            <a:pPr indent="0" lvl="0" marL="0" marR="0" rtl="0" algn="ctr">
+              <a:lnSpc>
+                <a:spcPct val="100000"/>
+              </a:lnSpc>
+              <a:spcBef>
+                <a:spcPts val="0"/>
+              </a:spcBef>
+              <a:spcAft>
+                <a:spcPts val="0"/>
+              </a:spcAft>
+              <a:buClr>
+                <a:srgbClr val="000000"/>
+              </a:buClr>
+              <a:buSzPts val="1800"/>
+              <a:buFont typeface="Arial"/>
+              <a:buNone/>
+            </a:pPr>
+            <a:r>
+              <a:t/>
+            </a:r>
+            <a:endParaRPr b="0" i="0" sz="1800" u="none" cap="none" strike="noStrike">
+              <a:solidFill>
+                <a:schemeClr val="dk1"/>
+              </a:solidFill>
+              <a:latin typeface="Calibri"/>
+              <a:ea typeface="Calibri"/>
+              <a:cs typeface="Calibri"/>
+              <a:sym typeface="Calibri"/>
+            </a:endParaRPr>
+          </a:p>
+        </p:txBody>
+      </p:sp>
+      <p:sp>
+        <p:nvSpPr>
+          <p:cNvPr id="617" name="Google Shape;617;p26"/>
+          <p:cNvSpPr/>
+          <p:nvPr/>
+        </p:nvSpPr>
+        <p:spPr>
+          <a:xfrm>
+            <a:off x="6351879" y="6035040"/>
+            <a:ext cx="109728" cy="109728"/>
+          </a:xfrm>
+          <a:prstGeom prst="ellipse">
+            <a:avLst/>
+          </a:prstGeom>
+          <a:solidFill>
+            <a:srgbClr val="E879F9"/>
+          </a:solidFill>
+          <a:ln>
+            <a:noFill/>
+          </a:ln>
+          <a:effectLst>
+            <a:outerShdw blurRad="40000" rotWithShape="0" dir="5400000" dist="23000">
+              <a:srgbClr val="000000">
+                <a:alpha val="34901"/>
+              </a:srgbClr>
+            </a:outerShdw>
+          </a:effectLst>
+        </p:spPr>
+        <p:txBody>
+          <a:bodyPr anchorCtr="0" anchor="ctr" bIns="45700" lIns="91425" spcFirstLastPara="1" rIns="91425" wrap="square" tIns="45700">
+            <a:noAutofit/>
+          </a:bodyPr>
+          <a:lstStyle/>
+          <a:p>
+            <a:pPr indent="0" lvl="0" marL="0" marR="0" rtl="0" algn="ctr">
+              <a:lnSpc>
+                <a:spcPct val="100000"/>
+              </a:lnSpc>
+              <a:spcBef>
+                <a:spcPts val="0"/>
+              </a:spcBef>
+              <a:spcAft>
+                <a:spcPts val="0"/>
+              </a:spcAft>
+              <a:buClr>
+                <a:srgbClr val="000000"/>
+              </a:buClr>
+              <a:buSzPts val="1800"/>
+              <a:buFont typeface="Arial"/>
+              <a:buNone/>
+            </a:pPr>
+            <a:r>
+              <a:t/>
+            </a:r>
+            <a:endParaRPr b="0" i="0" sz="1800" u="none" cap="none" strike="noStrike">
+              <a:solidFill>
+                <a:schemeClr val="dk1"/>
+              </a:solidFill>
+              <a:latin typeface="Calibri"/>
+              <a:ea typeface="Calibri"/>
+              <a:cs typeface="Calibri"/>
+              <a:sym typeface="Calibri"/>
+            </a:endParaRPr>
+          </a:p>
+        </p:txBody>
+      </p:sp>
+    </p:spTree>
+  </p:cSld>
+  <p:clrMapOvr>
+    <a:masterClrMapping/>
+  </p:clrMapOvr>
+</p:sld>
+</file>
+
 <file path=ppt/slides/slide4.xml><?xml version="1.0" encoding="utf-8"?>
 <p:sld xmlns:a="http://schemas.openxmlformats.org/drawingml/2006/main" xmlns:r="http://schemas.openxmlformats.org/officeDocument/2006/relationships" xmlns:mc="http://schemas.openxmlformats.org/markup-compatibility/2006" xmlns:mv="urn:schemas-microsoft-com:mac:vml" xmlns:p="http://schemas.openxmlformats.org/presentationml/2006/main" xmlns:c="http://schemas.openxmlformats.org/drawingml/2006/chart" xmlns:dgm="http://schemas.openxmlformats.org/drawingml/2006/diagram" xmlns:o="urn:schemas-microsoft-com:office:office" xmlns:v="urn:schemas-microsoft-com:vml" xmlns:pvml="urn:schemas-microsoft-com:office:powerpoint" xmlns:com="http://schemas.openxmlformats.org/drawingml/2006/compatibility" xmlns:p14="http://schemas.microsoft.com/office/powerpoint/2010/main" xmlns:p15="http://schemas.microsoft.com/office/powerpoint/2012/main" xmlns:ahyp="http://schemas.microsoft.com/office/drawing/2018/hyperlinkcolor">
   <p:cSld>
@@ -43469,7 +45223,7 @@
                 <a:cs typeface="Calibri"/>
                 <a:sym typeface="Calibri"/>
               </a:rPr>
-              <a:t>04 / 29</a:t>
+              <a:t>04 / 31</a:t>
             </a:r>
             <a:endParaRPr b="0" i="0" sz="1400" u="none" cap="none" strike="noStrike">
               <a:solidFill>
@@ -44719,7 +46473,7 @@
                 <a:cs typeface="Calibri"/>
                 <a:sym typeface="Calibri"/>
               </a:rPr>
-              <a:t>05 / 29</a:t>
+              <a:t>05 / 31</a:t>
             </a:r>
             <a:endParaRPr b="0" i="0" sz="1400" u="none" cap="none" strike="noStrike">
               <a:solidFill>
@@ -45985,7 +47739,7 @@
                 <a:cs typeface="Calibri"/>
                 <a:sym typeface="Calibri"/>
               </a:rPr>
-              <a:t>06 / 29</a:t>
+              <a:t>06 / 31</a:t>
             </a:r>
             <a:endParaRPr b="0" i="0" sz="1400" u="none" cap="none" strike="noStrike">
               <a:solidFill>
@@ -47187,7 +48941,7 @@
                 <a:cs typeface="Calibri"/>
                 <a:sym typeface="Calibri"/>
               </a:rPr>
-              <a:t>07 / 29</a:t>
+              <a:t>07 / 31</a:t>
             </a:r>
             <a:endParaRPr b="0" i="0" sz="1400" u="none" cap="none" strike="noStrike">
               <a:solidFill>
@@ -49401,7 +51155,7 @@
                 <a:cs typeface="Calibri"/>
                 <a:sym typeface="Calibri"/>
               </a:rPr>
-              <a:t>09 / 29</a:t>
+              <a:t>09 / 31</a:t>
             </a:r>
             <a:endParaRPr b="0" i="0" sz="1400" u="none" cap="none" strike="noStrike">
               <a:solidFill>
